--- a/LectureSlides/06b_IntroductionToBootstrap.pptx
+++ b/LectureSlides/06b_IntroductionToBootstrap.pptx
@@ -239,7 +239,7 @@
           <a:p>
             <a:fld id="{04109FAC-1BEC-4087-B676-5D9DDF25C61E}" type="datetimeFigureOut">
               <a:rPr lang="en-US" smtClean="0"/>
-              <a:t>9/18/2025</a:t>
+              <a:t>9/16/2026</a:t>
             </a:fld>
             <a:endParaRPr lang="en-US"/>
           </a:p>
@@ -772,7 +772,7 @@
           <a:p>
             <a:fld id="{241EB5C9-1307-BA42-ABA2-0BC069CD8E7F}" type="datetimeFigureOut">
               <a:rPr lang="en-US" smtClean="0"/>
-              <a:t>9/18/2025</a:t>
+              <a:t>9/16/2026</a:t>
             </a:fld>
             <a:endParaRPr lang="en-US"/>
           </a:p>
@@ -940,7 +940,7 @@
           <a:p>
             <a:fld id="{241EB5C9-1307-BA42-ABA2-0BC069CD8E7F}" type="datetimeFigureOut">
               <a:rPr lang="en-US" smtClean="0"/>
-              <a:t>9/18/2025</a:t>
+              <a:t>9/16/2026</a:t>
             </a:fld>
             <a:endParaRPr lang="en-US"/>
           </a:p>
@@ -1118,7 +1118,7 @@
           <a:p>
             <a:fld id="{241EB5C9-1307-BA42-ABA2-0BC069CD8E7F}" type="datetimeFigureOut">
               <a:rPr lang="en-US" smtClean="0"/>
-              <a:t>9/18/2025</a:t>
+              <a:t>9/16/2026</a:t>
             </a:fld>
             <a:endParaRPr lang="en-US"/>
           </a:p>
@@ -1286,7 +1286,7 @@
           <a:p>
             <a:fld id="{241EB5C9-1307-BA42-ABA2-0BC069CD8E7F}" type="datetimeFigureOut">
               <a:rPr lang="en-US" smtClean="0"/>
-              <a:t>9/18/2025</a:t>
+              <a:t>9/16/2026</a:t>
             </a:fld>
             <a:endParaRPr lang="en-US"/>
           </a:p>
@@ -1531,7 +1531,7 @@
           <a:p>
             <a:fld id="{241EB5C9-1307-BA42-ABA2-0BC069CD8E7F}" type="datetimeFigureOut">
               <a:rPr lang="en-US" smtClean="0"/>
-              <a:t>9/18/2025</a:t>
+              <a:t>9/16/2026</a:t>
             </a:fld>
             <a:endParaRPr lang="en-US"/>
           </a:p>
@@ -1816,7 +1816,7 @@
           <a:p>
             <a:fld id="{241EB5C9-1307-BA42-ABA2-0BC069CD8E7F}" type="datetimeFigureOut">
               <a:rPr lang="en-US" smtClean="0"/>
-              <a:t>9/18/2025</a:t>
+              <a:t>9/16/2026</a:t>
             </a:fld>
             <a:endParaRPr lang="en-US"/>
           </a:p>
@@ -2235,7 +2235,7 @@
           <a:p>
             <a:fld id="{241EB5C9-1307-BA42-ABA2-0BC069CD8E7F}" type="datetimeFigureOut">
               <a:rPr lang="en-US" smtClean="0"/>
-              <a:t>9/18/2025</a:t>
+              <a:t>9/16/2026</a:t>
             </a:fld>
             <a:endParaRPr lang="en-US"/>
           </a:p>
@@ -2352,7 +2352,7 @@
           <a:p>
             <a:fld id="{241EB5C9-1307-BA42-ABA2-0BC069CD8E7F}" type="datetimeFigureOut">
               <a:rPr lang="en-US" smtClean="0"/>
-              <a:t>9/18/2025</a:t>
+              <a:t>9/16/2026</a:t>
             </a:fld>
             <a:endParaRPr lang="en-US"/>
           </a:p>
@@ -2447,7 +2447,7 @@
           <a:p>
             <a:fld id="{241EB5C9-1307-BA42-ABA2-0BC069CD8E7F}" type="datetimeFigureOut">
               <a:rPr lang="en-US" smtClean="0"/>
-              <a:t>9/18/2025</a:t>
+              <a:t>9/16/2026</a:t>
             </a:fld>
             <a:endParaRPr lang="en-US"/>
           </a:p>
@@ -2722,7 +2722,7 @@
           <a:p>
             <a:fld id="{241EB5C9-1307-BA42-ABA2-0BC069CD8E7F}" type="datetimeFigureOut">
               <a:rPr lang="en-US" smtClean="0"/>
-              <a:t>9/18/2025</a:t>
+              <a:t>9/16/2026</a:t>
             </a:fld>
             <a:endParaRPr lang="en-US"/>
           </a:p>
@@ -2974,7 +2974,7 @@
           <a:p>
             <a:fld id="{241EB5C9-1307-BA42-ABA2-0BC069CD8E7F}" type="datetimeFigureOut">
               <a:rPr lang="en-US" smtClean="0"/>
-              <a:t>9/18/2025</a:t>
+              <a:t>9/16/2026</a:t>
             </a:fld>
             <a:endParaRPr lang="en-US"/>
           </a:p>
@@ -3185,7 +3185,7 @@
           <a:p>
             <a:fld id="{241EB5C9-1307-BA42-ABA2-0BC069CD8E7F}" type="datetimeFigureOut">
               <a:rPr lang="en-US" smtClean="0"/>
-              <a:t>9/18/2025</a:t>
+              <a:t>9/16/2026</a:t>
             </a:fld>
             <a:endParaRPr lang="en-US"/>
           </a:p>
@@ -3866,8 +3866,8 @@
           </a:p>
         </p:txBody>
       </p:sp>
-      <mc:AlternateContent xmlns:mc="http://schemas.openxmlformats.org/markup-compatibility/2006">
-        <mc:Choice xmlns:a14="http://schemas.microsoft.com/office/drawing/2010/main" Requires="a14">
+      <mc:AlternateContent xmlns:mc="http://schemas.openxmlformats.org/markup-compatibility/2006" xmlns:a14="http://schemas.microsoft.com/office/drawing/2010/main">
+        <mc:Choice Requires="a14">
           <p:sp>
             <p:nvSpPr>
               <p:cNvPr id="6" name="Content Placeholder 2">
@@ -4057,7 +4057,7 @@
                       <m:accPr>
                         <m:chr m:val="̂"/>
                         <m:ctrlPr>
-                          <a:rPr lang="ar-AE" i="1">
+                          <a:rPr lang="ar-AE">
                             <a:latin typeface="Cambria Math" panose="02040503050406030204" pitchFamily="18" charset="0"/>
                           </a:rPr>
                         </m:ctrlPr>
@@ -4101,7 +4101,7 @@
                     <m:sSup>
                       <m:sSupPr>
                         <m:ctrlPr>
-                          <a:rPr lang="en-US" i="1" smtClean="0">
+                          <a:rPr lang="ar-AE" i="1">
                             <a:latin typeface="Cambria Math" panose="02040503050406030204" pitchFamily="18" charset="0"/>
                           </a:rPr>
                         </m:ctrlPr>
@@ -4111,7 +4111,7 @@
                           <m:accPr>
                             <m:chr m:val="̂"/>
                             <m:ctrlPr>
-                              <a:rPr lang="ar-AE" i="1">
+                              <a:rPr lang="ar-AE">
                                 <a:latin typeface="Cambria Math" panose="02040503050406030204" pitchFamily="18" charset="0"/>
                               </a:rPr>
                             </m:ctrlPr>
@@ -4159,7 +4159,7 @@
                     <m:d>
                       <m:dPr>
                         <m:ctrlPr>
-                          <a:rPr lang="ar-AE" i="1">
+                          <a:rPr lang="en-US" i="1">
                             <a:latin typeface="Cambria Math" panose="02040503050406030204" pitchFamily="18" charset="0"/>
                           </a:rPr>
                         </m:ctrlPr>
@@ -4168,7 +4168,7 @@
                         <m:sSup>
                           <m:sSupPr>
                             <m:ctrlPr>
-                              <a:rPr lang="en-US" i="1">
+                              <a:rPr lang="ar-AE" i="1">
                                 <a:latin typeface="Cambria Math" panose="02040503050406030204" pitchFamily="18" charset="0"/>
                               </a:rPr>
                             </m:ctrlPr>
@@ -4178,7 +4178,7 @@
                               <m:accPr>
                                 <m:chr m:val="̂"/>
                                 <m:ctrlPr>
-                                  <a:rPr lang="ar-AE" i="1">
+                                  <a:rPr lang="ar-AE">
                                     <a:latin typeface="Cambria Math" panose="02040503050406030204" pitchFamily="18" charset="0"/>
                                   </a:rPr>
                                 </m:ctrlPr>
@@ -4232,7 +4232,7 @@
             </p:txBody>
           </p:sp>
         </mc:Choice>
-        <mc:Fallback>
+        <mc:Fallback xmlns="">
           <p:sp>
             <p:nvSpPr>
               <p:cNvPr id="6" name="Content Placeholder 2">
@@ -4293,8 +4293,8 @@
         </p:nvCxnSpPr>
         <p:spPr>
           <a:xfrm>
-            <a:off x="2915160" y="2173006"/>
-            <a:ext cx="1831407" cy="170676"/>
+            <a:off x="3267456" y="2173006"/>
+            <a:ext cx="1479111" cy="170676"/>
           </a:xfrm>
           <a:prstGeom prst="straightConnector1">
             <a:avLst/>
@@ -4337,8 +4337,8 @@
         </p:nvCxnSpPr>
         <p:spPr>
           <a:xfrm>
-            <a:off x="3545378" y="2943188"/>
-            <a:ext cx="552797" cy="86555"/>
+            <a:off x="3812032" y="2877312"/>
+            <a:ext cx="286143" cy="113792"/>
           </a:xfrm>
           <a:prstGeom prst="straightConnector1">
             <a:avLst/>
@@ -8341,6 +8341,7 @@
                     <m:groupChr>
                       <m:groupChrPr>
                         <m:chr m:val="→"/>
+                        <m:pos m:val="bot"/>
                         <m:vertJc m:val="bot"/>
                         <m:ctrlPr>
                           <a:rPr lang="en-US" sz="1350" b="1" i="1">
@@ -8492,6 +8493,7 @@
                     <m:groupChr>
                       <m:groupChrPr>
                         <m:chr m:val="→"/>
+                        <m:pos m:val="bot"/>
                         <m:vertJc m:val="bot"/>
                         <m:ctrlPr>
                           <a:rPr lang="en-US" sz="1350" b="1" i="1">
@@ -8643,6 +8645,7 @@
                     <m:groupChr>
                       <m:groupChrPr>
                         <m:chr m:val="→"/>
+                        <m:pos m:val="bot"/>
                         <m:vertJc m:val="bot"/>
                         <m:ctrlPr>
                           <a:rPr lang="en-US" sz="1350" b="1" i="1">
@@ -8794,6 +8797,7 @@
                     <m:groupChr>
                       <m:groupChrPr>
                         <m:chr m:val="→"/>
+                        <m:pos m:val="bot"/>
                         <m:vertJc m:val="bot"/>
                         <m:ctrlPr>
                           <a:rPr lang="en-US" sz="1350" b="1" i="1">
@@ -8943,10 +8947,7 @@
                 <a:pPr/>
                 <a14:m>
                   <m:oMathPara xmlns:m="http://schemas.openxmlformats.org/officeDocument/2006/math">
-                    <m:oMathParaPr>
-                      <m:jc m:val="centerGroup"/>
-                    </m:oMathParaPr>
-                    <m:oMath xmlns:m="http://schemas.openxmlformats.org/officeDocument/2006/math">
+                    <m:oMath>
                       <m:sSub>
                         <m:sSubPr>
                           <m:ctrlPr>
@@ -12241,8 +12242,8 @@
               <a:buNone/>
             </a:pPr>
             <a:r>
-              <a:rPr lang="en-US" dirty="0" err="1"/>
-              <a:t>Propoerties</a:t>
+              <a:rPr lang="en-US" dirty="0"/>
+              <a:t>Properties</a:t>
             </a:r>
             <a:r>
               <a:rPr dirty="0"/>
@@ -14351,7 +14352,7 @@
                     <m:sSub>
                       <m:sSubPr>
                         <m:ctrlPr>
-                          <a:rPr lang="ar-AE" i="1">
+                          <a:rPr lang="ar-AE">
                             <a:latin typeface="Cambria Math" panose="02040503050406030204" pitchFamily="18" charset="0"/>
                           </a:rPr>
                         </m:ctrlPr>
@@ -14397,7 +14398,7 @@
                     <m:sSub>
                       <m:sSubPr>
                         <m:ctrlPr>
-                          <a:rPr lang="ar-AE" i="1" smtClean="0">
+                          <a:rPr lang="ar-AE" b="0" i="1" smtClean="0">
                             <a:latin typeface="Cambria Math" panose="02040503050406030204" pitchFamily="18" charset="0"/>
                           </a:rPr>
                         </m:ctrlPr>
@@ -14447,13 +14448,7 @@
                       <a:rPr lang="ar-AE">
                         <a:latin typeface="Cambria Math" panose="02040503050406030204" pitchFamily="18" charset="0"/>
                       </a:rPr>
-                      <m:t>/</m:t>
-                    </m:r>
-                    <m:r>
-                      <a:rPr lang="ar-AE">
-                        <a:latin typeface="Cambria Math" panose="02040503050406030204" pitchFamily="18" charset="0"/>
-                      </a:rPr>
-                      <m:t>2</m:t>
+                      <m:t>/2</m:t>
                     </m:r>
                   </m:oMath>
                 </a14:m>
@@ -14521,7 +14516,7 @@
                     <m:d>
                       <m:dPr>
                         <m:ctrlPr>
-                          <a:rPr lang="ar-AE" i="1">
+                          <a:rPr lang="ar-AE">
                             <a:latin typeface="Cambria Math" panose="02040503050406030204" pitchFamily="18" charset="0"/>
                           </a:rPr>
                         </m:ctrlPr>
@@ -14531,13 +14526,7 @@
                           <a:rPr lang="ar-AE">
                             <a:latin typeface="Cambria Math" panose="02040503050406030204" pitchFamily="18" charset="0"/>
                           </a:rPr>
-                          <m:t>1</m:t>
-                        </m:r>
-                        <m:r>
-                          <a:rPr lang="ar-AE">
-                            <a:latin typeface="Cambria Math" panose="02040503050406030204" pitchFamily="18" charset="0"/>
-                          </a:rPr>
-                          <m:t>−</m:t>
+                          <m:t>1−</m:t>
                         </m:r>
                         <m:r>
                           <a:rPr lang="ar-AE">
@@ -14549,13 +14538,7 @@
                           <a:rPr lang="ar-AE">
                             <a:latin typeface="Cambria Math" panose="02040503050406030204" pitchFamily="18" charset="0"/>
                           </a:rPr>
-                          <m:t>/</m:t>
-                        </m:r>
-                        <m:r>
-                          <a:rPr lang="ar-AE">
-                            <a:latin typeface="Cambria Math" panose="02040503050406030204" pitchFamily="18" charset="0"/>
-                          </a:rPr>
-                          <m:t>2</m:t>
+                          <m:t>/2</m:t>
                         </m:r>
                       </m:e>
                     </m:d>
@@ -21766,7 +21749,7 @@
                       <m:accPr>
                         <m:chr m:val="‾"/>
                         <m:ctrlPr>
-                          <a:rPr i="1">
+                          <a:rPr>
                             <a:latin typeface="Cambria Math" panose="02040503050406030204" pitchFamily="18" charset="0"/>
                           </a:rPr>
                         </m:ctrlPr>
@@ -23293,7 +23276,7 @@
                       <m:accPr>
                         <m:chr m:val="‾"/>
                         <m:ctrlPr>
-                          <a:rPr i="1">
+                          <a:rPr>
                             <a:latin typeface="Cambria Math" panose="02040503050406030204" pitchFamily="18" charset="0"/>
                           </a:rPr>
                         </m:ctrlPr>

--- a/LectureSlides/06b_IntroductionToBootstrap.pptx
+++ b/LectureSlides/06b_IntroductionToBootstrap.pptx
@@ -5,7 +5,7 @@
     <p:sldMasterId id="2147483648" r:id="rId1"/>
   </p:sldMasterIdLst>
   <p:notesMasterIdLst>
-    <p:notesMasterId r:id="rId34"/>
+    <p:notesMasterId r:id="rId39"/>
   </p:notesMasterIdLst>
   <p:sldIdLst>
     <p:sldId id="299" r:id="rId2"/>
@@ -13,33 +13,38 @@
     <p:sldId id="258" r:id="rId4"/>
     <p:sldId id="259" r:id="rId5"/>
     <p:sldId id="260" r:id="rId6"/>
-    <p:sldId id="261" r:id="rId7"/>
-    <p:sldId id="262" r:id="rId8"/>
-    <p:sldId id="263" r:id="rId9"/>
-    <p:sldId id="264" r:id="rId10"/>
-    <p:sldId id="265" r:id="rId11"/>
-    <p:sldId id="266" r:id="rId12"/>
-    <p:sldId id="256" r:id="rId13"/>
-    <p:sldId id="267" r:id="rId14"/>
-    <p:sldId id="269" r:id="rId15"/>
-    <p:sldId id="270" r:id="rId16"/>
-    <p:sldId id="271" r:id="rId17"/>
-    <p:sldId id="272" r:id="rId18"/>
-    <p:sldId id="273" r:id="rId19"/>
-    <p:sldId id="274" r:id="rId20"/>
-    <p:sldId id="276" r:id="rId21"/>
-    <p:sldId id="275" r:id="rId22"/>
-    <p:sldId id="301" r:id="rId23"/>
-    <p:sldId id="302" r:id="rId24"/>
-    <p:sldId id="277" r:id="rId25"/>
-    <p:sldId id="278" r:id="rId26"/>
-    <p:sldId id="279" r:id="rId27"/>
-    <p:sldId id="280" r:id="rId28"/>
-    <p:sldId id="300" r:id="rId29"/>
-    <p:sldId id="303" r:id="rId30"/>
-    <p:sldId id="281" r:id="rId31"/>
-    <p:sldId id="282" r:id="rId32"/>
-    <p:sldId id="283" r:id="rId33"/>
+    <p:sldId id="304" r:id="rId7"/>
+    <p:sldId id="261" r:id="rId8"/>
+    <p:sldId id="262" r:id="rId9"/>
+    <p:sldId id="263" r:id="rId10"/>
+    <p:sldId id="264" r:id="rId11"/>
+    <p:sldId id="265" r:id="rId12"/>
+    <p:sldId id="308" r:id="rId13"/>
+    <p:sldId id="305" r:id="rId14"/>
+    <p:sldId id="266" r:id="rId15"/>
+    <p:sldId id="256" r:id="rId16"/>
+    <p:sldId id="267" r:id="rId17"/>
+    <p:sldId id="269" r:id="rId18"/>
+    <p:sldId id="270" r:id="rId19"/>
+    <p:sldId id="271" r:id="rId20"/>
+    <p:sldId id="272" r:id="rId21"/>
+    <p:sldId id="273" r:id="rId22"/>
+    <p:sldId id="274" r:id="rId23"/>
+    <p:sldId id="276" r:id="rId24"/>
+    <p:sldId id="275" r:id="rId25"/>
+    <p:sldId id="301" r:id="rId26"/>
+    <p:sldId id="306" r:id="rId27"/>
+    <p:sldId id="302" r:id="rId28"/>
+    <p:sldId id="277" r:id="rId29"/>
+    <p:sldId id="278" r:id="rId30"/>
+    <p:sldId id="279" r:id="rId31"/>
+    <p:sldId id="280" r:id="rId32"/>
+    <p:sldId id="300" r:id="rId33"/>
+    <p:sldId id="303" r:id="rId34"/>
+    <p:sldId id="307" r:id="rId35"/>
+    <p:sldId id="281" r:id="rId36"/>
+    <p:sldId id="282" r:id="rId37"/>
+    <p:sldId id="283" r:id="rId38"/>
   </p:sldIdLst>
   <p:sldSz cx="9144000" cy="5143500" type="screen16x9"/>
   <p:notesSz cx="6858000" cy="9144000"/>
@@ -239,7 +244,7 @@
           <a:p>
             <a:fld id="{04109FAC-1BEC-4087-B676-5D9DDF25C61E}" type="datetimeFigureOut">
               <a:rPr lang="en-US" smtClean="0"/>
-              <a:t>9/16/2026</a:t>
+              <a:t>9/17/2026</a:t>
             </a:fld>
             <a:endParaRPr lang="en-US"/>
           </a:p>
@@ -574,7 +579,7 @@
           <a:p>
             <a:fld id="{C190234C-2B15-41C7-8B44-0762390C23D2}" type="slidenum">
               <a:rPr lang="en-US" smtClean="0"/>
-              <a:t>17</a:t>
+              <a:t>20</a:t>
             </a:fld>
             <a:endParaRPr lang="en-US"/>
           </a:p>
@@ -772,7 +777,7 @@
           <a:p>
             <a:fld id="{241EB5C9-1307-BA42-ABA2-0BC069CD8E7F}" type="datetimeFigureOut">
               <a:rPr lang="en-US" smtClean="0"/>
-              <a:t>9/16/2026</a:t>
+              <a:t>9/17/2026</a:t>
             </a:fld>
             <a:endParaRPr lang="en-US"/>
           </a:p>
@@ -940,7 +945,7 @@
           <a:p>
             <a:fld id="{241EB5C9-1307-BA42-ABA2-0BC069CD8E7F}" type="datetimeFigureOut">
               <a:rPr lang="en-US" smtClean="0"/>
-              <a:t>9/16/2026</a:t>
+              <a:t>9/17/2026</a:t>
             </a:fld>
             <a:endParaRPr lang="en-US"/>
           </a:p>
@@ -1118,7 +1123,7 @@
           <a:p>
             <a:fld id="{241EB5C9-1307-BA42-ABA2-0BC069CD8E7F}" type="datetimeFigureOut">
               <a:rPr lang="en-US" smtClean="0"/>
-              <a:t>9/16/2026</a:t>
+              <a:t>9/17/2026</a:t>
             </a:fld>
             <a:endParaRPr lang="en-US"/>
           </a:p>
@@ -1286,7 +1291,7 @@
           <a:p>
             <a:fld id="{241EB5C9-1307-BA42-ABA2-0BC069CD8E7F}" type="datetimeFigureOut">
               <a:rPr lang="en-US" smtClean="0"/>
-              <a:t>9/16/2026</a:t>
+              <a:t>9/17/2026</a:t>
             </a:fld>
             <a:endParaRPr lang="en-US"/>
           </a:p>
@@ -1531,7 +1536,7 @@
           <a:p>
             <a:fld id="{241EB5C9-1307-BA42-ABA2-0BC069CD8E7F}" type="datetimeFigureOut">
               <a:rPr lang="en-US" smtClean="0"/>
-              <a:t>9/16/2026</a:t>
+              <a:t>9/17/2026</a:t>
             </a:fld>
             <a:endParaRPr lang="en-US"/>
           </a:p>
@@ -1816,7 +1821,7 @@
           <a:p>
             <a:fld id="{241EB5C9-1307-BA42-ABA2-0BC069CD8E7F}" type="datetimeFigureOut">
               <a:rPr lang="en-US" smtClean="0"/>
-              <a:t>9/16/2026</a:t>
+              <a:t>9/17/2026</a:t>
             </a:fld>
             <a:endParaRPr lang="en-US"/>
           </a:p>
@@ -2235,7 +2240,7 @@
           <a:p>
             <a:fld id="{241EB5C9-1307-BA42-ABA2-0BC069CD8E7F}" type="datetimeFigureOut">
               <a:rPr lang="en-US" smtClean="0"/>
-              <a:t>9/16/2026</a:t>
+              <a:t>9/17/2026</a:t>
             </a:fld>
             <a:endParaRPr lang="en-US"/>
           </a:p>
@@ -2352,7 +2357,7 @@
           <a:p>
             <a:fld id="{241EB5C9-1307-BA42-ABA2-0BC069CD8E7F}" type="datetimeFigureOut">
               <a:rPr lang="en-US" smtClean="0"/>
-              <a:t>9/16/2026</a:t>
+              <a:t>9/17/2026</a:t>
             </a:fld>
             <a:endParaRPr lang="en-US"/>
           </a:p>
@@ -2447,7 +2452,7 @@
           <a:p>
             <a:fld id="{241EB5C9-1307-BA42-ABA2-0BC069CD8E7F}" type="datetimeFigureOut">
               <a:rPr lang="en-US" smtClean="0"/>
-              <a:t>9/16/2026</a:t>
+              <a:t>9/17/2026</a:t>
             </a:fld>
             <a:endParaRPr lang="en-US"/>
           </a:p>
@@ -2722,7 +2727,7 @@
           <a:p>
             <a:fld id="{241EB5C9-1307-BA42-ABA2-0BC069CD8E7F}" type="datetimeFigureOut">
               <a:rPr lang="en-US" smtClean="0"/>
-              <a:t>9/16/2026</a:t>
+              <a:t>9/17/2026</a:t>
             </a:fld>
             <a:endParaRPr lang="en-US"/>
           </a:p>
@@ -2974,7 +2979,7 @@
           <a:p>
             <a:fld id="{241EB5C9-1307-BA42-ABA2-0BC069CD8E7F}" type="datetimeFigureOut">
               <a:rPr lang="en-US" smtClean="0"/>
-              <a:t>9/16/2026</a:t>
+              <a:t>9/17/2026</a:t>
             </a:fld>
             <a:endParaRPr lang="en-US"/>
           </a:p>
@@ -3185,7 +3190,7 @@
           <a:p>
             <a:fld id="{241EB5C9-1307-BA42-ABA2-0BC069CD8E7F}" type="datetimeFigureOut">
               <a:rPr lang="en-US" smtClean="0"/>
-              <a:t>9/16/2026</a:t>
+              <a:t>9/17/2026</a:t>
             </a:fld>
             <a:endParaRPr lang="en-US"/>
           </a:p>
@@ -3760,6 +3765,460 @@
               <a:buNone/>
             </a:pPr>
             <a:r>
+              <a:t>Bootstrap Distribution</a:t>
+            </a:r>
+          </a:p>
+        </p:txBody>
+      </p:sp>
+      <p:sp>
+        <p:nvSpPr>
+          <p:cNvPr id="3" name="Content Placeholder 2"/>
+          <p:cNvSpPr>
+            <a:spLocks noGrp="1"/>
+          </p:cNvSpPr>
+          <p:nvPr>
+            <p:ph idx="1"/>
+          </p:nvPr>
+        </p:nvSpPr>
+        <p:spPr>
+          <a:xfrm>
+            <a:off x="457200" y="1200150"/>
+            <a:ext cx="8229600" cy="3560535"/>
+          </a:xfrm>
+        </p:spPr>
+        <p:txBody>
+          <a:bodyPr>
+            <a:normAutofit fontScale="85000" lnSpcReduction="10000"/>
+          </a:bodyPr>
+          <a:lstStyle/>
+          <a:p>
+            <a:pPr marL="0" lvl="0" indent="0">
+              <a:buNone/>
+            </a:pPr>
+            <a:r>
+              <a:rPr dirty="0"/>
+              <a:t>Rather than computing a point estimate directly, bootstrap methods compute a bootstrap distribution of </a:t>
+            </a:r>
+            <a:r>
+              <a:rPr lang="en-US" dirty="0"/>
+              <a:t>a</a:t>
+            </a:r>
+            <a:r>
+              <a:rPr dirty="0"/>
+              <a:t> statistic</a:t>
+            </a:r>
+          </a:p>
+          <a:p>
+            <a:pPr lvl="0"/>
+            <a:r>
+              <a:rPr b="1" dirty="0"/>
+              <a:t>Bootstrap distribution </a:t>
+            </a:r>
+            <a:r>
+              <a:rPr dirty="0"/>
+              <a:t>comprise</a:t>
+            </a:r>
+            <a:r>
+              <a:rPr lang="en-US" dirty="0"/>
+              <a:t>s</a:t>
+            </a:r>
+            <a:r>
+              <a:rPr dirty="0"/>
+              <a:t> values of </a:t>
+            </a:r>
+            <a:r>
+              <a:rPr lang="en-US" dirty="0"/>
+              <a:t>a</a:t>
+            </a:r>
+            <a:r>
+              <a:rPr dirty="0"/>
+              <a:t> statistic computed from bootstrap resamples of the original observations </a:t>
+            </a:r>
+            <a:endParaRPr lang="en-US" dirty="0"/>
+          </a:p>
+          <a:p>
+            <a:pPr lvl="0"/>
+            <a:r>
+              <a:rPr dirty="0"/>
+              <a:t>Computing bootstrap distribution requires </a:t>
+            </a:r>
+            <a:r>
+              <a:rPr b="1" dirty="0"/>
+              <a:t>no assumptions about </a:t>
+            </a:r>
+            <a:r>
+              <a:rPr lang="en-US" b="1" dirty="0"/>
+              <a:t>sample</a:t>
+            </a:r>
+            <a:r>
+              <a:rPr b="1" dirty="0"/>
+              <a:t> distribution!</a:t>
+            </a:r>
+          </a:p>
+          <a:p>
+            <a:pPr lvl="1"/>
+            <a:r>
+              <a:rPr dirty="0"/>
+              <a:t>Bootstrap resampling substitutes computer power for paper and pencil statistician power</a:t>
+            </a:r>
+          </a:p>
+          <a:p>
+            <a:pPr lvl="0"/>
+            <a:r>
+              <a:rPr dirty="0"/>
+              <a:t>Bootstrap resampling estimates the </a:t>
+            </a:r>
+            <a:r>
+              <a:rPr b="1" dirty="0"/>
+              <a:t>bootstrap distribution</a:t>
+            </a:r>
+            <a:r>
+              <a:rPr dirty="0"/>
+              <a:t> of a statistic</a:t>
+            </a:r>
+          </a:p>
+          <a:p>
+            <a:pPr lvl="1"/>
+            <a:r>
+              <a:rPr dirty="0"/>
+              <a:t>Compute mostly likely point estimate of the statistic, or </a:t>
+            </a:r>
+            <a:r>
+              <a:rPr b="1" dirty="0"/>
+              <a:t>bootstrap estimate</a:t>
+            </a:r>
+          </a:p>
+          <a:p>
+            <a:pPr lvl="1"/>
+            <a:r>
+              <a:rPr dirty="0"/>
+              <a:t>The </a:t>
+            </a:r>
+            <a:r>
+              <a:rPr b="1" dirty="0"/>
+              <a:t>bootstrap confidence interval </a:t>
+            </a:r>
+            <a:r>
+              <a:rPr dirty="0"/>
+              <a:t>is computed from the bootstrap distribution</a:t>
+            </a:r>
+          </a:p>
+        </p:txBody>
+      </p:sp>
+    </p:spTree>
+  </p:cSld>
+  <p:clrMapOvr>
+    <a:masterClrMapping/>
+  </p:clrMapOvr>
+  <p:timing>
+    <p:tnLst>
+      <p:par>
+        <p:cTn id="1" dur="indefinite" restart="never" nodeType="tmRoot">
+          <p:childTnLst>
+            <p:seq concurrent="1" nextAc="seek">
+              <p:cTn id="2" dur="indefinite" nodeType="mainSeq">
+                <p:childTnLst>
+                  <p:par>
+                    <p:cTn id="3" fill="hold">
+                      <p:stCondLst>
+                        <p:cond delay="indefinite"/>
+                      </p:stCondLst>
+                      <p:childTnLst>
+                        <p:par>
+                          <p:cTn id="4" fill="hold">
+                            <p:stCondLst>
+                              <p:cond delay="0"/>
+                            </p:stCondLst>
+                            <p:childTnLst>
+                              <p:par>
+                                <p:cTn id="5" presetID="1" presetClass="entr" presetSubtype="0" fill="hold" nodeType="clickEffect">
+                                  <p:stCondLst>
+                                    <p:cond delay="0"/>
+                                  </p:stCondLst>
+                                  <p:childTnLst>
+                                    <p:set>
+                                      <p:cBhvr>
+                                        <p:cTn id="6" dur="1" fill="hold">
+                                          <p:stCondLst>
+                                            <p:cond delay="0"/>
+                                          </p:stCondLst>
+                                        </p:cTn>
+                                        <p:tgtEl>
+                                          <p:spTgt spid="3">
+                                            <p:txEl>
+                                              <p:pRg st="1" end="1"/>
+                                            </p:txEl>
+                                          </p:spTgt>
+                                        </p:tgtEl>
+                                        <p:attrNameLst>
+                                          <p:attrName>style.visibility</p:attrName>
+                                        </p:attrNameLst>
+                                      </p:cBhvr>
+                                      <p:to>
+                                        <p:strVal val="visible"/>
+                                      </p:to>
+                                    </p:set>
+                                  </p:childTnLst>
+                                </p:cTn>
+                              </p:par>
+                            </p:childTnLst>
+                          </p:cTn>
+                        </p:par>
+                      </p:childTnLst>
+                    </p:cTn>
+                  </p:par>
+                  <p:par>
+                    <p:cTn id="7" fill="hold">
+                      <p:stCondLst>
+                        <p:cond delay="indefinite"/>
+                      </p:stCondLst>
+                      <p:childTnLst>
+                        <p:par>
+                          <p:cTn id="8" fill="hold">
+                            <p:stCondLst>
+                              <p:cond delay="0"/>
+                            </p:stCondLst>
+                            <p:childTnLst>
+                              <p:par>
+                                <p:cTn id="9" presetID="1" presetClass="entr" presetSubtype="0" fill="hold" nodeType="clickEffect">
+                                  <p:stCondLst>
+                                    <p:cond delay="0"/>
+                                  </p:stCondLst>
+                                  <p:childTnLst>
+                                    <p:set>
+                                      <p:cBhvr>
+                                        <p:cTn id="10" dur="1" fill="hold">
+                                          <p:stCondLst>
+                                            <p:cond delay="0"/>
+                                          </p:stCondLst>
+                                        </p:cTn>
+                                        <p:tgtEl>
+                                          <p:spTgt spid="3">
+                                            <p:txEl>
+                                              <p:pRg st="2" end="2"/>
+                                            </p:txEl>
+                                          </p:spTgt>
+                                        </p:tgtEl>
+                                        <p:attrNameLst>
+                                          <p:attrName>style.visibility</p:attrName>
+                                        </p:attrNameLst>
+                                      </p:cBhvr>
+                                      <p:to>
+                                        <p:strVal val="visible"/>
+                                      </p:to>
+                                    </p:set>
+                                  </p:childTnLst>
+                                </p:cTn>
+                              </p:par>
+                              <p:par>
+                                <p:cTn id="11" presetID="1" presetClass="entr" presetSubtype="0" fill="hold" nodeType="withEffect">
+                                  <p:stCondLst>
+                                    <p:cond delay="0"/>
+                                  </p:stCondLst>
+                                  <p:childTnLst>
+                                    <p:set>
+                                      <p:cBhvr>
+                                        <p:cTn id="12" dur="1" fill="hold">
+                                          <p:stCondLst>
+                                            <p:cond delay="0"/>
+                                          </p:stCondLst>
+                                        </p:cTn>
+                                        <p:tgtEl>
+                                          <p:spTgt spid="3">
+                                            <p:txEl>
+                                              <p:pRg st="3" end="3"/>
+                                            </p:txEl>
+                                          </p:spTgt>
+                                        </p:tgtEl>
+                                        <p:attrNameLst>
+                                          <p:attrName>style.visibility</p:attrName>
+                                        </p:attrNameLst>
+                                      </p:cBhvr>
+                                      <p:to>
+                                        <p:strVal val="visible"/>
+                                      </p:to>
+                                    </p:set>
+                                  </p:childTnLst>
+                                </p:cTn>
+                              </p:par>
+                            </p:childTnLst>
+                          </p:cTn>
+                        </p:par>
+                      </p:childTnLst>
+                    </p:cTn>
+                  </p:par>
+                  <p:par>
+                    <p:cTn id="13" fill="hold">
+                      <p:stCondLst>
+                        <p:cond delay="indefinite"/>
+                      </p:stCondLst>
+                      <p:childTnLst>
+                        <p:par>
+                          <p:cTn id="14" fill="hold">
+                            <p:stCondLst>
+                              <p:cond delay="0"/>
+                            </p:stCondLst>
+                            <p:childTnLst>
+                              <p:par>
+                                <p:cTn id="15" presetID="1" presetClass="entr" presetSubtype="0" fill="hold" nodeType="clickEffect">
+                                  <p:stCondLst>
+                                    <p:cond delay="0"/>
+                                  </p:stCondLst>
+                                  <p:childTnLst>
+                                    <p:set>
+                                      <p:cBhvr>
+                                        <p:cTn id="16" dur="1" fill="hold">
+                                          <p:stCondLst>
+                                            <p:cond delay="0"/>
+                                          </p:stCondLst>
+                                        </p:cTn>
+                                        <p:tgtEl>
+                                          <p:spTgt spid="3">
+                                            <p:txEl>
+                                              <p:pRg st="4" end="4"/>
+                                            </p:txEl>
+                                          </p:spTgt>
+                                        </p:tgtEl>
+                                        <p:attrNameLst>
+                                          <p:attrName>style.visibility</p:attrName>
+                                        </p:attrNameLst>
+                                      </p:cBhvr>
+                                      <p:to>
+                                        <p:strVal val="visible"/>
+                                      </p:to>
+                                    </p:set>
+                                  </p:childTnLst>
+                                </p:cTn>
+                              </p:par>
+                              <p:par>
+                                <p:cTn id="17" presetID="1" presetClass="entr" presetSubtype="0" fill="hold" nodeType="withEffect">
+                                  <p:stCondLst>
+                                    <p:cond delay="0"/>
+                                  </p:stCondLst>
+                                  <p:childTnLst>
+                                    <p:set>
+                                      <p:cBhvr>
+                                        <p:cTn id="18" dur="1" fill="hold">
+                                          <p:stCondLst>
+                                            <p:cond delay="0"/>
+                                          </p:stCondLst>
+                                        </p:cTn>
+                                        <p:tgtEl>
+                                          <p:spTgt spid="3">
+                                            <p:txEl>
+                                              <p:pRg st="5" end="5"/>
+                                            </p:txEl>
+                                          </p:spTgt>
+                                        </p:tgtEl>
+                                        <p:attrNameLst>
+                                          <p:attrName>style.visibility</p:attrName>
+                                        </p:attrNameLst>
+                                      </p:cBhvr>
+                                      <p:to>
+                                        <p:strVal val="visible"/>
+                                      </p:to>
+                                    </p:set>
+                                  </p:childTnLst>
+                                </p:cTn>
+                              </p:par>
+                              <p:par>
+                                <p:cTn id="19" presetID="1" presetClass="entr" presetSubtype="0" fill="hold" nodeType="withEffect">
+                                  <p:stCondLst>
+                                    <p:cond delay="0"/>
+                                  </p:stCondLst>
+                                  <p:childTnLst>
+                                    <p:set>
+                                      <p:cBhvr>
+                                        <p:cTn id="20" dur="1" fill="hold">
+                                          <p:stCondLst>
+                                            <p:cond delay="0"/>
+                                          </p:stCondLst>
+                                        </p:cTn>
+                                        <p:tgtEl>
+                                          <p:spTgt spid="3">
+                                            <p:txEl>
+                                              <p:pRg st="6" end="6"/>
+                                            </p:txEl>
+                                          </p:spTgt>
+                                        </p:tgtEl>
+                                        <p:attrNameLst>
+                                          <p:attrName>style.visibility</p:attrName>
+                                        </p:attrNameLst>
+                                      </p:cBhvr>
+                                      <p:to>
+                                        <p:strVal val="visible"/>
+                                      </p:to>
+                                    </p:set>
+                                  </p:childTnLst>
+                                </p:cTn>
+                              </p:par>
+                            </p:childTnLst>
+                          </p:cTn>
+                        </p:par>
+                      </p:childTnLst>
+                    </p:cTn>
+                  </p:par>
+                </p:childTnLst>
+              </p:cTn>
+              <p:prevCondLst>
+                <p:cond evt="onPrev" delay="0">
+                  <p:tgtEl>
+                    <p:sldTgt/>
+                  </p:tgtEl>
+                </p:cond>
+              </p:prevCondLst>
+              <p:nextCondLst>
+                <p:cond evt="onNext" delay="0">
+                  <p:tgtEl>
+                    <p:sldTgt/>
+                  </p:tgtEl>
+                </p:cond>
+              </p:nextCondLst>
+            </p:seq>
+          </p:childTnLst>
+        </p:cTn>
+      </p:par>
+    </p:tnLst>
+  </p:timing>
+</p:sld>
+</file>
+
+<file path=ppt/slides/slide11.xml><?xml version="1.0" encoding="utf-8"?>
+<p:sld xmlns:a="http://schemas.openxmlformats.org/drawingml/2006/main" xmlns:r="http://schemas.openxmlformats.org/officeDocument/2006/relationships" xmlns:p="http://schemas.openxmlformats.org/presentationml/2006/main">
+  <p:cSld>
+    <p:spTree>
+      <p:nvGrpSpPr>
+        <p:cNvPr id="1" name=""/>
+        <p:cNvGrpSpPr/>
+        <p:nvPr/>
+      </p:nvGrpSpPr>
+      <p:grpSpPr>
+        <a:xfrm>
+          <a:off x="0" y="0"/>
+          <a:ext cx="0" cy="0"/>
+          <a:chOff x="0" y="0"/>
+          <a:chExt cx="0" cy="0"/>
+        </a:xfrm>
+      </p:grpSpPr>
+      <p:sp>
+        <p:nvSpPr>
+          <p:cNvPr id="2" name="Title 1"/>
+          <p:cNvSpPr>
+            <a:spLocks noGrp="1"/>
+          </p:cNvSpPr>
+          <p:nvPr>
+            <p:ph type="title"/>
+          </p:nvPr>
+        </p:nvSpPr>
+        <p:spPr/>
+        <p:txBody>
+          <a:bodyPr/>
+          <a:lstStyle/>
+          <a:p>
+            <a:pPr marL="0" lvl="0" indent="0">
+              <a:buNone/>
+            </a:pPr>
+            <a:r>
               <a:rPr dirty="0"/>
               <a:t>Bootstrap Distribution</a:t>
             </a:r>
@@ -3836,8 +4295,8 @@
         </p:nvSpPr>
         <p:spPr>
           <a:xfrm>
-            <a:off x="4098175" y="4458721"/>
-            <a:ext cx="4825538" cy="632278"/>
+            <a:off x="3752193" y="4497113"/>
+            <a:ext cx="5356334" cy="593885"/>
           </a:xfrm>
           <a:prstGeom prst="rect">
             <a:avLst/>
@@ -3852,15 +4311,15 @@
               <a:buNone/>
             </a:pPr>
             <a:r>
-              <a:rPr dirty="0"/>
+              <a:rPr sz="1600" dirty="0"/>
               <a:t>Resampling estimate</a:t>
             </a:r>
             <a:r>
-              <a:rPr lang="en-US" dirty="0"/>
+              <a:rPr lang="en-US" sz="1600" dirty="0"/>
               <a:t>s</a:t>
             </a:r>
             <a:r>
-              <a:rPr dirty="0"/>
+              <a:rPr sz="1600" dirty="0"/>
               <a:t> the bootstrap distribution of a statistic</a:t>
             </a:r>
           </a:p>
@@ -4159,7 +4618,7 @@
                     <m:d>
                       <m:dPr>
                         <m:ctrlPr>
-                          <a:rPr lang="en-US" i="1">
+                          <a:rPr lang="ar-AE" i="1">
                             <a:latin typeface="Cambria Math" panose="02040503050406030204" pitchFamily="18" charset="0"/>
                           </a:rPr>
                         </m:ctrlPr>
@@ -4852,7 +5311,1308 @@
 </p:sld>
 </file>
 
-<file path=ppt/slides/slide11.xml><?xml version="1.0" encoding="utf-8"?>
+<file path=ppt/slides/slide12.xml><?xml version="1.0" encoding="utf-8"?>
+<p:sld xmlns:a="http://schemas.openxmlformats.org/drawingml/2006/main" xmlns:r="http://schemas.openxmlformats.org/officeDocument/2006/relationships" xmlns:p="http://schemas.openxmlformats.org/presentationml/2006/main">
+  <p:cSld>
+    <p:spTree>
+      <p:nvGrpSpPr>
+        <p:cNvPr id="1" name="">
+          <a:extLst>
+            <a:ext uri="{FF2B5EF4-FFF2-40B4-BE49-F238E27FC236}">
+              <a16:creationId xmlns:a16="http://schemas.microsoft.com/office/drawing/2014/main" id="{A6CCBBB3-FD2B-882C-A24C-F4647C703307}"/>
+            </a:ext>
+          </a:extLst>
+        </p:cNvPr>
+        <p:cNvGrpSpPr/>
+        <p:nvPr/>
+      </p:nvGrpSpPr>
+      <p:grpSpPr>
+        <a:xfrm>
+          <a:off x="0" y="0"/>
+          <a:ext cx="0" cy="0"/>
+          <a:chOff x="0" y="0"/>
+          <a:chExt cx="0" cy="0"/>
+        </a:xfrm>
+      </p:grpSpPr>
+      <p:sp>
+        <p:nvSpPr>
+          <p:cNvPr id="2" name="Title 1">
+            <a:extLst>
+              <a:ext uri="{FF2B5EF4-FFF2-40B4-BE49-F238E27FC236}">
+                <a16:creationId xmlns:a16="http://schemas.microsoft.com/office/drawing/2014/main" id="{7C97158D-5DB8-6A34-149A-0ADAB75E5E7E}"/>
+              </a:ext>
+            </a:extLst>
+          </p:cNvPr>
+          <p:cNvSpPr>
+            <a:spLocks noGrp="1"/>
+          </p:cNvSpPr>
+          <p:nvPr>
+            <p:ph type="title"/>
+          </p:nvPr>
+        </p:nvSpPr>
+        <p:spPr/>
+        <p:txBody>
+          <a:bodyPr/>
+          <a:lstStyle/>
+          <a:p>
+            <a:pPr marL="0" lvl="0" indent="0">
+              <a:buNone/>
+            </a:pPr>
+            <a:r>
+              <a:rPr dirty="0"/>
+              <a:t>Bootstrap Distribution</a:t>
+            </a:r>
+          </a:p>
+        </p:txBody>
+      </p:sp>
+      <p:sp>
+        <p:nvSpPr>
+          <p:cNvPr id="3" name="Content Placeholder 2">
+            <a:extLst>
+              <a:ext uri="{FF2B5EF4-FFF2-40B4-BE49-F238E27FC236}">
+                <a16:creationId xmlns:a16="http://schemas.microsoft.com/office/drawing/2014/main" id="{EE36743C-D3A9-DAD9-C860-A3030A819EE1}"/>
+              </a:ext>
+            </a:extLst>
+          </p:cNvPr>
+          <p:cNvSpPr>
+            <a:spLocks noGrp="1"/>
+          </p:cNvSpPr>
+          <p:nvPr>
+            <p:ph idx="1"/>
+          </p:nvPr>
+        </p:nvSpPr>
+        <p:spPr>
+          <a:xfrm>
+            <a:off x="457200" y="1149784"/>
+            <a:ext cx="8229600" cy="632278"/>
+          </a:xfrm>
+        </p:spPr>
+        <p:txBody>
+          <a:bodyPr>
+            <a:normAutofit fontScale="85000" lnSpcReduction="20000"/>
+          </a:bodyPr>
+          <a:lstStyle/>
+          <a:p>
+            <a:pPr marL="0" lvl="0" indent="0">
+              <a:buNone/>
+            </a:pPr>
+            <a:r>
+              <a:rPr dirty="0"/>
+              <a:t>Rather than repeatedly resample the population, bootstrapping repeatedly resamples an original sample</a:t>
+            </a:r>
+          </a:p>
+        </p:txBody>
+      </p:sp>
+      <p:pic>
+        <p:nvPicPr>
+          <p:cNvPr id="4" name="Picture 1" descr="../images/BootstrapDistribution.png">
+            <a:extLst>
+              <a:ext uri="{FF2B5EF4-FFF2-40B4-BE49-F238E27FC236}">
+                <a16:creationId xmlns:a16="http://schemas.microsoft.com/office/drawing/2014/main" id="{BBA9B431-428F-D881-0A62-EA08AED6DF08}"/>
+              </a:ext>
+            </a:extLst>
+          </p:cNvPr>
+          <p:cNvPicPr>
+            <a:picLocks noGrp="1" noChangeAspect="1"/>
+          </p:cNvPicPr>
+          <p:nvPr/>
+        </p:nvPicPr>
+        <p:blipFill>
+          <a:blip r:embed="rId2"/>
+          <a:stretch>
+            <a:fillRect/>
+          </a:stretch>
+        </p:blipFill>
+        <p:spPr bwMode="auto">
+          <a:xfrm>
+            <a:off x="3918744" y="1711404"/>
+            <a:ext cx="4898749" cy="2686029"/>
+          </a:xfrm>
+          <a:prstGeom prst="rect">
+            <a:avLst/>
+          </a:prstGeom>
+          <a:noFill/>
+          <a:ln w="9525">
+            <a:noFill/>
+            <a:headEnd/>
+            <a:tailEnd/>
+          </a:ln>
+        </p:spPr>
+      </p:pic>
+      <p:sp>
+        <p:nvSpPr>
+          <p:cNvPr id="5" name="TextBox 3">
+            <a:extLst>
+              <a:ext uri="{FF2B5EF4-FFF2-40B4-BE49-F238E27FC236}">
+                <a16:creationId xmlns:a16="http://schemas.microsoft.com/office/drawing/2014/main" id="{63F2BDD2-9000-3C1C-50C9-6972527C4482}"/>
+              </a:ext>
+            </a:extLst>
+          </p:cNvPr>
+          <p:cNvSpPr txBox="1"/>
+          <p:nvPr/>
+        </p:nvSpPr>
+        <p:spPr>
+          <a:xfrm>
+            <a:off x="3911483" y="4637214"/>
+            <a:ext cx="5193725" cy="390695"/>
+          </a:xfrm>
+          <a:prstGeom prst="rect">
+            <a:avLst/>
+          </a:prstGeom>
+          <a:noFill/>
+        </p:spPr>
+        <p:txBody>
+          <a:bodyPr/>
+          <a:lstStyle/>
+          <a:p>
+            <a:pPr marL="0" lvl="0" indent="0" algn="ctr">
+              <a:buNone/>
+            </a:pPr>
+            <a:r>
+              <a:rPr sz="1600" dirty="0"/>
+              <a:t>Resampling estimate</a:t>
+            </a:r>
+            <a:r>
+              <a:rPr lang="en-US" sz="1600" dirty="0"/>
+              <a:t>s</a:t>
+            </a:r>
+            <a:r>
+              <a:rPr sz="1600" dirty="0"/>
+              <a:t> the bootstrap distribution of a statistic</a:t>
+            </a:r>
+          </a:p>
+        </p:txBody>
+      </p:sp>
+      <mc:AlternateContent xmlns:mc="http://schemas.openxmlformats.org/markup-compatibility/2006">
+        <mc:Choice xmlns:a14="http://schemas.microsoft.com/office/drawing/2010/main" Requires="a14">
+          <p:sp>
+            <p:nvSpPr>
+              <p:cNvPr id="6" name="Content Placeholder 2">
+                <a:extLst>
+                  <a:ext uri="{FF2B5EF4-FFF2-40B4-BE49-F238E27FC236}">
+                    <a16:creationId xmlns:a16="http://schemas.microsoft.com/office/drawing/2014/main" id="{BF485ED5-55FE-FE99-B556-0F4FE4B92717}"/>
+                  </a:ext>
+                </a:extLst>
+              </p:cNvPr>
+              <p:cNvSpPr txBox="1">
+                <a:spLocks/>
+              </p:cNvSpPr>
+              <p:nvPr/>
+            </p:nvSpPr>
+            <p:spPr>
+              <a:xfrm>
+                <a:off x="402658" y="1749290"/>
+                <a:ext cx="3516086" cy="3316081"/>
+              </a:xfrm>
+              <a:prstGeom prst="rect">
+                <a:avLst/>
+              </a:prstGeom>
+            </p:spPr>
+            <p:txBody>
+              <a:bodyPr vert="horz" lIns="91440" tIns="45720" rIns="91440" bIns="45720" rtlCol="0">
+                <a:normAutofit fontScale="70000" lnSpcReduction="20000"/>
+              </a:bodyPr>
+              <a:lstStyle>
+                <a:lvl1pPr marL="342900" indent="-342900" algn="l" defTabSz="342900" rtl="0" eaLnBrk="1" latinLnBrk="0" hangingPunct="1">
+                  <a:spcBef>
+                    <a:spcPct val="20000"/>
+                  </a:spcBef>
+                  <a:buFont typeface="Arial"/>
+                  <a:buChar char="•"/>
+                  <a:defRPr sz="2400" kern="1200">
+                    <a:solidFill>
+                      <a:schemeClr val="tx1"/>
+                    </a:solidFill>
+                    <a:latin typeface="+mn-lt"/>
+                    <a:ea typeface="+mn-ea"/>
+                    <a:cs typeface="+mn-cs"/>
+                  </a:defRPr>
+                </a:lvl1pPr>
+                <a:lvl2pPr marL="685800" indent="-342900" algn="l" defTabSz="342900" rtl="0" eaLnBrk="1" latinLnBrk="0" hangingPunct="1">
+                  <a:spcBef>
+                    <a:spcPct val="20000"/>
+                  </a:spcBef>
+                  <a:buFont typeface="Arial"/>
+                  <a:buChar char="–"/>
+                  <a:defRPr sz="2100" kern="1200">
+                    <a:solidFill>
+                      <a:schemeClr val="tx1"/>
+                    </a:solidFill>
+                    <a:latin typeface="+mn-lt"/>
+                    <a:ea typeface="+mn-ea"/>
+                    <a:cs typeface="+mn-cs"/>
+                  </a:defRPr>
+                </a:lvl2pPr>
+                <a:lvl3pPr marL="1028700" indent="-342900" algn="l" defTabSz="342900" rtl="0" eaLnBrk="1" latinLnBrk="0" hangingPunct="1">
+                  <a:spcBef>
+                    <a:spcPct val="20000"/>
+                  </a:spcBef>
+                  <a:buFont typeface="Arial"/>
+                  <a:buChar char="•"/>
+                  <a:defRPr sz="1800" kern="1200">
+                    <a:solidFill>
+                      <a:schemeClr val="tx1"/>
+                    </a:solidFill>
+                    <a:latin typeface="+mn-lt"/>
+                    <a:ea typeface="+mn-ea"/>
+                    <a:cs typeface="+mn-cs"/>
+                  </a:defRPr>
+                </a:lvl3pPr>
+                <a:lvl4pPr marL="1371600" indent="-342900" algn="l" defTabSz="342900" rtl="0" eaLnBrk="1" latinLnBrk="0" hangingPunct="1">
+                  <a:spcBef>
+                    <a:spcPct val="20000"/>
+                  </a:spcBef>
+                  <a:buFont typeface="Arial"/>
+                  <a:buChar char="–"/>
+                  <a:defRPr sz="1500" kern="1200">
+                    <a:solidFill>
+                      <a:schemeClr val="tx1"/>
+                    </a:solidFill>
+                    <a:latin typeface="+mn-lt"/>
+                    <a:ea typeface="+mn-ea"/>
+                    <a:cs typeface="+mn-cs"/>
+                  </a:defRPr>
+                </a:lvl4pPr>
+                <a:lvl5pPr marL="1714500" indent="-342900" algn="l" defTabSz="342900" rtl="0" eaLnBrk="1" latinLnBrk="0" hangingPunct="1">
+                  <a:spcBef>
+                    <a:spcPct val="20000"/>
+                  </a:spcBef>
+                  <a:buFont typeface="Arial"/>
+                  <a:buChar char="»"/>
+                  <a:defRPr sz="1500" kern="1200">
+                    <a:solidFill>
+                      <a:schemeClr val="tx1"/>
+                    </a:solidFill>
+                    <a:latin typeface="+mn-lt"/>
+                    <a:ea typeface="+mn-ea"/>
+                    <a:cs typeface="+mn-cs"/>
+                  </a:defRPr>
+                </a:lvl5pPr>
+                <a:lvl6pPr marL="2057400" indent="-342900" algn="l" defTabSz="342900" rtl="0" eaLnBrk="1" latinLnBrk="0" hangingPunct="1">
+                  <a:spcBef>
+                    <a:spcPct val="20000"/>
+                  </a:spcBef>
+                  <a:buFont typeface="Arial"/>
+                  <a:buChar char="•"/>
+                  <a:defRPr sz="1500" kern="1200">
+                    <a:solidFill>
+                      <a:schemeClr val="tx1"/>
+                    </a:solidFill>
+                    <a:latin typeface="+mn-lt"/>
+                    <a:ea typeface="+mn-ea"/>
+                    <a:cs typeface="+mn-cs"/>
+                  </a:defRPr>
+                </a:lvl6pPr>
+                <a:lvl7pPr marL="2400300" indent="-342900" algn="l" defTabSz="342900" rtl="0" eaLnBrk="1" latinLnBrk="0" hangingPunct="1">
+                  <a:spcBef>
+                    <a:spcPct val="20000"/>
+                  </a:spcBef>
+                  <a:buFont typeface="Arial"/>
+                  <a:buChar char="•"/>
+                  <a:defRPr sz="1500" kern="1200">
+                    <a:solidFill>
+                      <a:schemeClr val="tx1"/>
+                    </a:solidFill>
+                    <a:latin typeface="+mn-lt"/>
+                    <a:ea typeface="+mn-ea"/>
+                    <a:cs typeface="+mn-cs"/>
+                  </a:defRPr>
+                </a:lvl7pPr>
+                <a:lvl8pPr marL="2743200" indent="-342900" algn="l" defTabSz="342900" rtl="0" eaLnBrk="1" latinLnBrk="0" hangingPunct="1">
+                  <a:spcBef>
+                    <a:spcPct val="20000"/>
+                  </a:spcBef>
+                  <a:buFont typeface="Arial"/>
+                  <a:buChar char="•"/>
+                  <a:defRPr sz="1500" kern="1200">
+                    <a:solidFill>
+                      <a:schemeClr val="tx1"/>
+                    </a:solidFill>
+                    <a:latin typeface="+mn-lt"/>
+                    <a:ea typeface="+mn-ea"/>
+                    <a:cs typeface="+mn-cs"/>
+                  </a:defRPr>
+                </a:lvl8pPr>
+                <a:lvl9pPr marL="3086100" indent="-342900" algn="l" defTabSz="342900" rtl="0" eaLnBrk="1" latinLnBrk="0" hangingPunct="1">
+                  <a:spcBef>
+                    <a:spcPct val="20000"/>
+                  </a:spcBef>
+                  <a:buFont typeface="Arial"/>
+                  <a:buChar char="•"/>
+                  <a:defRPr sz="1500" kern="1200">
+                    <a:solidFill>
+                      <a:schemeClr val="tx1"/>
+                    </a:solidFill>
+                    <a:latin typeface="+mn-lt"/>
+                    <a:ea typeface="+mn-ea"/>
+                    <a:cs typeface="+mn-cs"/>
+                  </a:defRPr>
+                </a:lvl9pPr>
+              </a:lstStyle>
+              <a:p>
+                <a:pPr lvl="0"/>
+                <a:r>
+                  <a:rPr lang="en-US" dirty="0"/>
+                  <a:t>Confidence intervals are with respect to the </a:t>
+                </a:r>
+                <a:r>
+                  <a:rPr lang="en-US" b="1" dirty="0"/>
+                  <a:t>bootstrap distribution</a:t>
+                </a:r>
+                <a:r>
+                  <a:rPr lang="en-US" dirty="0"/>
+                  <a:t> of a statistic </a:t>
+                </a:r>
+                <a14:m>
+                  <m:oMath xmlns:m="http://schemas.openxmlformats.org/officeDocument/2006/math">
+                    <m:r>
+                      <a:rPr lang="en-US">
+                        <a:latin typeface="Cambria Math" panose="02040503050406030204" pitchFamily="18" charset="0"/>
+                      </a:rPr>
+                      <m:t>𝑠</m:t>
+                    </m:r>
+                    <m:d>
+                      <m:dPr>
+                        <m:ctrlPr>
+                          <a:rPr lang="ar-AE" i="1" smtClean="0">
+                            <a:latin typeface="Cambria Math" panose="02040503050406030204" pitchFamily="18" charset="0"/>
+                          </a:rPr>
+                        </m:ctrlPr>
+                      </m:dPr>
+                      <m:e>
+                        <m:sSup>
+                          <m:sSupPr>
+                            <m:ctrlPr>
+                              <a:rPr lang="ar-AE" i="1">
+                                <a:latin typeface="Cambria Math" panose="02040503050406030204" pitchFamily="18" charset="0"/>
+                              </a:rPr>
+                            </m:ctrlPr>
+                          </m:sSupPr>
+                          <m:e>
+                            <m:acc>
+                              <m:accPr>
+                                <m:chr m:val="̂"/>
+                                <m:ctrlPr>
+                                  <a:rPr lang="ar-AE">
+                                    <a:latin typeface="Cambria Math" panose="02040503050406030204" pitchFamily="18" charset="0"/>
+                                  </a:rPr>
+                                </m:ctrlPr>
+                              </m:accPr>
+                              <m:e>
+                                <m:r>
+                                  <a:rPr lang="ar-AE">
+                                    <a:latin typeface="Cambria Math" panose="02040503050406030204" pitchFamily="18" charset="0"/>
+                                  </a:rPr>
+                                  <m:t>ℱ</m:t>
+                                </m:r>
+                              </m:e>
+                            </m:acc>
+                          </m:e>
+                          <m:sup>
+                            <m:r>
+                              <a:rPr lang="en-US" b="0" i="1" smtClean="0">
+                                <a:latin typeface="Cambria Math" panose="02040503050406030204" pitchFamily="18" charset="0"/>
+                              </a:rPr>
+                              <m:t>∗</m:t>
+                            </m:r>
+                          </m:sup>
+                        </m:sSup>
+                      </m:e>
+                    </m:d>
+                  </m:oMath>
+                </a14:m>
+                <a:endParaRPr lang="ar-AE" dirty="0"/>
+              </a:p>
+              <a:p>
+                <a:pPr lvl="0"/>
+                <a:r>
+                  <a:rPr lang="en-US" dirty="0"/>
+                  <a:t>CIs are a </a:t>
+                </a:r>
+                <a:r>
+                  <a:rPr lang="en-US" b="1" dirty="0"/>
+                  <a:t>measure of variation from resampling alone!</a:t>
+                </a:r>
+                <a:r>
+                  <a:rPr lang="en-US" dirty="0"/>
+                  <a:t> </a:t>
+                </a:r>
+              </a:p>
+              <a:p>
+                <a:pPr lvl="0"/>
+                <a:r>
+                  <a:rPr lang="en-US" dirty="0"/>
+                  <a:t>With probability </a:t>
+                </a:r>
+                <a14:m>
+                  <m:oMath xmlns:m="http://schemas.openxmlformats.org/officeDocument/2006/math">
+                    <m:r>
+                      <a:rPr lang="en-US">
+                        <a:latin typeface="Cambria Math" panose="02040503050406030204" pitchFamily="18" charset="0"/>
+                      </a:rPr>
+                      <m:t>1−</m:t>
+                    </m:r>
+                    <m:r>
+                      <a:rPr lang="en-US">
+                        <a:latin typeface="Cambria Math" panose="02040503050406030204" pitchFamily="18" charset="0"/>
+                      </a:rPr>
+                      <m:t>𝛼</m:t>
+                    </m:r>
+                  </m:oMath>
+                </a14:m>
+                <a:r>
+                  <a:rPr lang="en-US" dirty="0"/>
+                  <a:t> the sample statistic values computed from resamples of the population, </a:t>
+                </a:r>
+                <a14:m>
+                  <m:oMath xmlns:m="http://schemas.openxmlformats.org/officeDocument/2006/math">
+                    <m:sSup>
+                      <m:sSupPr>
+                        <m:ctrlPr>
+                          <a:rPr lang="ar-AE" i="1">
+                            <a:latin typeface="Cambria Math" panose="02040503050406030204" pitchFamily="18" charset="0"/>
+                          </a:rPr>
+                        </m:ctrlPr>
+                      </m:sSupPr>
+                      <m:e>
+                        <m:acc>
+                          <m:accPr>
+                            <m:chr m:val="̂"/>
+                            <m:ctrlPr>
+                              <a:rPr lang="ar-AE">
+                                <a:latin typeface="Cambria Math" panose="02040503050406030204" pitchFamily="18" charset="0"/>
+                              </a:rPr>
+                            </m:ctrlPr>
+                          </m:accPr>
+                          <m:e>
+                            <m:r>
+                              <a:rPr lang="ar-AE">
+                                <a:latin typeface="Cambria Math" panose="02040503050406030204" pitchFamily="18" charset="0"/>
+                              </a:rPr>
+                              <m:t>ℱ</m:t>
+                            </m:r>
+                          </m:e>
+                        </m:acc>
+                      </m:e>
+                      <m:sup>
+                        <m:r>
+                          <a:rPr lang="en-US" i="1">
+                            <a:latin typeface="Cambria Math" panose="02040503050406030204" pitchFamily="18" charset="0"/>
+                          </a:rPr>
+                          <m:t>∗</m:t>
+                        </m:r>
+                      </m:sup>
+                    </m:sSup>
+                  </m:oMath>
+                </a14:m>
+                <a:r>
+                  <a:rPr lang="ar-AE" dirty="0"/>
+                  <a:t> </a:t>
+                </a:r>
+                <a:r>
+                  <a:rPr lang="en-US" dirty="0"/>
+                  <a:t>,are within the CI</a:t>
+                </a:r>
+              </a:p>
+              <a:p>
+                <a:pPr lvl="0"/>
+                <a:r>
+                  <a:rPr lang="en-US" dirty="0"/>
+                  <a:t>Confidence intervals </a:t>
+                </a:r>
+                <a:r>
+                  <a:rPr lang="en-US" b="1" dirty="0"/>
+                  <a:t>do not indicate the probability the population parameter is within a range!</a:t>
+                </a:r>
+              </a:p>
+              <a:p>
+                <a:endParaRPr lang="en-US" b="1" dirty="0"/>
+              </a:p>
+            </p:txBody>
+          </p:sp>
+        </mc:Choice>
+        <mc:Fallback>
+          <p:sp>
+            <p:nvSpPr>
+              <p:cNvPr id="6" name="Content Placeholder 2">
+                <a:extLst>
+                  <a:ext uri="{FF2B5EF4-FFF2-40B4-BE49-F238E27FC236}">
+                    <a16:creationId xmlns:a16="http://schemas.microsoft.com/office/drawing/2014/main" id="{BF485ED5-55FE-FE99-B556-0F4FE4B92717}"/>
+                  </a:ext>
+                </a:extLst>
+              </p:cNvPr>
+              <p:cNvSpPr txBox="1">
+                <a:spLocks noRot="1" noChangeAspect="1" noMove="1" noResize="1" noEditPoints="1" noAdjustHandles="1" noChangeArrowheads="1" noChangeShapeType="1" noTextEdit="1"/>
+              </p:cNvSpPr>
+              <p:nvPr/>
+            </p:nvSpPr>
+            <p:spPr>
+              <a:xfrm>
+                <a:off x="402658" y="1749290"/>
+                <a:ext cx="3516086" cy="3316081"/>
+              </a:xfrm>
+              <a:prstGeom prst="rect">
+                <a:avLst/>
+              </a:prstGeom>
+              <a:blipFill>
+                <a:blip r:embed="rId3"/>
+                <a:stretch>
+                  <a:fillRect l="-867" t="-2022" r="-867"/>
+                </a:stretch>
+              </a:blipFill>
+            </p:spPr>
+            <p:txBody>
+              <a:bodyPr/>
+              <a:lstStyle/>
+              <a:p>
+                <a:r>
+                  <a:rPr lang="en-US">
+                    <a:noFill/>
+                  </a:rPr>
+                  <a:t> </a:t>
+                </a:r>
+              </a:p>
+            </p:txBody>
+          </p:sp>
+        </mc:Fallback>
+      </mc:AlternateContent>
+      <p:cxnSp>
+        <p:nvCxnSpPr>
+          <p:cNvPr id="10" name="Straight Arrow Connector 9">
+            <a:extLst>
+              <a:ext uri="{FF2B5EF4-FFF2-40B4-BE49-F238E27FC236}">
+                <a16:creationId xmlns:a16="http://schemas.microsoft.com/office/drawing/2014/main" id="{68ACC6EF-6B22-67D8-E7F6-A15F71AF7CA8}"/>
+              </a:ext>
+            </a:extLst>
+          </p:cNvPr>
+          <p:cNvCxnSpPr>
+            <a:cxnSpLocks/>
+          </p:cNvCxnSpPr>
+          <p:nvPr/>
+        </p:nvCxnSpPr>
+        <p:spPr>
+          <a:xfrm>
+            <a:off x="3789635" y="3677918"/>
+            <a:ext cx="1661293" cy="440823"/>
+          </a:xfrm>
+          <a:prstGeom prst="straightConnector1">
+            <a:avLst/>
+          </a:prstGeom>
+          <a:ln>
+            <a:solidFill>
+              <a:schemeClr val="tx1"/>
+            </a:solidFill>
+            <a:tailEnd type="triangle"/>
+          </a:ln>
+        </p:spPr>
+        <p:style>
+          <a:lnRef idx="2">
+            <a:schemeClr val="accent1"/>
+          </a:lnRef>
+          <a:fillRef idx="0">
+            <a:schemeClr val="accent1"/>
+          </a:fillRef>
+          <a:effectRef idx="1">
+            <a:schemeClr val="accent1"/>
+          </a:effectRef>
+          <a:fontRef idx="minor">
+            <a:schemeClr val="tx1"/>
+          </a:fontRef>
+        </p:style>
+      </p:cxnSp>
+      <p:sp>
+        <p:nvSpPr>
+          <p:cNvPr id="12" name="TextBox 3">
+            <a:extLst>
+              <a:ext uri="{FF2B5EF4-FFF2-40B4-BE49-F238E27FC236}">
+                <a16:creationId xmlns:a16="http://schemas.microsoft.com/office/drawing/2014/main" id="{338A61D8-0B02-17EC-0D9F-7F8EF74D2844}"/>
+              </a:ext>
+            </a:extLst>
+          </p:cNvPr>
+          <p:cNvSpPr txBox="1"/>
+          <p:nvPr/>
+        </p:nvSpPr>
+        <p:spPr>
+          <a:xfrm>
+            <a:off x="6101308" y="4330869"/>
+            <a:ext cx="407038" cy="336607"/>
+          </a:xfrm>
+          <a:prstGeom prst="rect">
+            <a:avLst/>
+          </a:prstGeom>
+          <a:noFill/>
+        </p:spPr>
+        <p:txBody>
+          <a:bodyPr/>
+          <a:lstStyle/>
+          <a:p>
+            <a:pPr marL="0" lvl="0" indent="0" algn="ctr">
+              <a:buNone/>
+            </a:pPr>
+            <a:r>
+              <a:rPr lang="en-US" b="1" dirty="0"/>
+              <a:t>CI</a:t>
+            </a:r>
+            <a:endParaRPr b="1" dirty="0"/>
+          </a:p>
+        </p:txBody>
+      </p:sp>
+      <p:cxnSp>
+        <p:nvCxnSpPr>
+          <p:cNvPr id="13" name="Straight Connector 12">
+            <a:extLst>
+              <a:ext uri="{FF2B5EF4-FFF2-40B4-BE49-F238E27FC236}">
+                <a16:creationId xmlns:a16="http://schemas.microsoft.com/office/drawing/2014/main" id="{C5A8A891-E170-9A93-6B64-0FB3F22C02B1}"/>
+              </a:ext>
+            </a:extLst>
+          </p:cNvPr>
+          <p:cNvCxnSpPr>
+            <a:cxnSpLocks/>
+            <a:stCxn id="16" idx="3"/>
+          </p:cNvCxnSpPr>
+          <p:nvPr/>
+        </p:nvCxnSpPr>
+        <p:spPr>
+          <a:xfrm flipH="1" flipV="1">
+            <a:off x="5636590" y="3707356"/>
+            <a:ext cx="12129" cy="812431"/>
+          </a:xfrm>
+          <a:prstGeom prst="line">
+            <a:avLst/>
+          </a:prstGeom>
+          <a:ln>
+            <a:solidFill>
+              <a:srgbClr val="C00000"/>
+            </a:solidFill>
+          </a:ln>
+        </p:spPr>
+        <p:style>
+          <a:lnRef idx="2">
+            <a:schemeClr val="accent1"/>
+          </a:lnRef>
+          <a:fillRef idx="0">
+            <a:schemeClr val="accent1"/>
+          </a:fillRef>
+          <a:effectRef idx="1">
+            <a:schemeClr val="accent1"/>
+          </a:effectRef>
+          <a:fontRef idx="minor">
+            <a:schemeClr val="tx1"/>
+          </a:fontRef>
+        </p:style>
+      </p:cxnSp>
+      <p:cxnSp>
+        <p:nvCxnSpPr>
+          <p:cNvPr id="14" name="Straight Connector 13">
+            <a:extLst>
+              <a:ext uri="{FF2B5EF4-FFF2-40B4-BE49-F238E27FC236}">
+                <a16:creationId xmlns:a16="http://schemas.microsoft.com/office/drawing/2014/main" id="{ECB36E2A-1CE9-1FF9-B341-DEE34D1ADF57}"/>
+              </a:ext>
+            </a:extLst>
+          </p:cNvPr>
+          <p:cNvCxnSpPr>
+            <a:cxnSpLocks/>
+            <a:stCxn id="15" idx="3"/>
+          </p:cNvCxnSpPr>
+          <p:nvPr/>
+        </p:nvCxnSpPr>
+        <p:spPr>
+          <a:xfrm flipV="1">
+            <a:off x="6970537" y="3703664"/>
+            <a:ext cx="0" cy="829211"/>
+          </a:xfrm>
+          <a:prstGeom prst="line">
+            <a:avLst/>
+          </a:prstGeom>
+          <a:ln>
+            <a:solidFill>
+              <a:srgbClr val="C00000"/>
+            </a:solidFill>
+          </a:ln>
+        </p:spPr>
+        <p:style>
+          <a:lnRef idx="2">
+            <a:schemeClr val="accent1"/>
+          </a:lnRef>
+          <a:fillRef idx="0">
+            <a:schemeClr val="accent1"/>
+          </a:fillRef>
+          <a:effectRef idx="1">
+            <a:schemeClr val="accent1"/>
+          </a:effectRef>
+          <a:fontRef idx="minor">
+            <a:schemeClr val="tx1"/>
+          </a:fontRef>
+        </p:style>
+      </p:cxnSp>
+      <p:sp>
+        <p:nvSpPr>
+          <p:cNvPr id="15" name="Arrow: Right 14">
+            <a:extLst>
+              <a:ext uri="{FF2B5EF4-FFF2-40B4-BE49-F238E27FC236}">
+                <a16:creationId xmlns:a16="http://schemas.microsoft.com/office/drawing/2014/main" id="{AECD0555-C5A6-AB33-31E3-EF77FE85636D}"/>
+              </a:ext>
+            </a:extLst>
+          </p:cNvPr>
+          <p:cNvSpPr/>
+          <p:nvPr/>
+        </p:nvSpPr>
+        <p:spPr>
+          <a:xfrm>
+            <a:off x="6446839" y="4453335"/>
+            <a:ext cx="523698" cy="159079"/>
+          </a:xfrm>
+          <a:prstGeom prst="rightArrow">
+            <a:avLst/>
+          </a:prstGeom>
+          <a:noFill/>
+          <a:ln w="25400">
+            <a:solidFill>
+              <a:schemeClr val="tx1"/>
+            </a:solidFill>
+          </a:ln>
+        </p:spPr>
+        <p:style>
+          <a:lnRef idx="1">
+            <a:schemeClr val="accent1"/>
+          </a:lnRef>
+          <a:fillRef idx="3">
+            <a:schemeClr val="accent1"/>
+          </a:fillRef>
+          <a:effectRef idx="2">
+            <a:schemeClr val="accent1"/>
+          </a:effectRef>
+          <a:fontRef idx="minor">
+            <a:schemeClr val="lt1"/>
+          </a:fontRef>
+        </p:style>
+        <p:txBody>
+          <a:bodyPr rtlCol="0" anchor="ctr"/>
+          <a:lstStyle/>
+          <a:p>
+            <a:pPr algn="ctr"/>
+            <a:endParaRPr lang="en-US"/>
+          </a:p>
+        </p:txBody>
+      </p:sp>
+      <p:sp>
+        <p:nvSpPr>
+          <p:cNvPr id="16" name="Arrow: Right 15">
+            <a:extLst>
+              <a:ext uri="{FF2B5EF4-FFF2-40B4-BE49-F238E27FC236}">
+                <a16:creationId xmlns:a16="http://schemas.microsoft.com/office/drawing/2014/main" id="{37168800-11A2-6173-4C67-8EF9B0B09CEF}"/>
+              </a:ext>
+            </a:extLst>
+          </p:cNvPr>
+          <p:cNvSpPr/>
+          <p:nvPr/>
+        </p:nvSpPr>
+        <p:spPr>
+          <a:xfrm rot="10800000">
+            <a:off x="5648719" y="4440248"/>
+            <a:ext cx="523698" cy="159079"/>
+          </a:xfrm>
+          <a:prstGeom prst="rightArrow">
+            <a:avLst/>
+          </a:prstGeom>
+          <a:noFill/>
+          <a:ln w="25400">
+            <a:solidFill>
+              <a:schemeClr val="tx1"/>
+            </a:solidFill>
+          </a:ln>
+        </p:spPr>
+        <p:style>
+          <a:lnRef idx="1">
+            <a:schemeClr val="accent1"/>
+          </a:lnRef>
+          <a:fillRef idx="3">
+            <a:schemeClr val="accent1"/>
+          </a:fillRef>
+          <a:effectRef idx="2">
+            <a:schemeClr val="accent1"/>
+          </a:effectRef>
+          <a:fontRef idx="minor">
+            <a:schemeClr val="lt1"/>
+          </a:fontRef>
+        </p:style>
+        <p:txBody>
+          <a:bodyPr rtlCol="0" anchor="ctr"/>
+          <a:lstStyle/>
+          <a:p>
+            <a:pPr algn="ctr"/>
+            <a:endParaRPr lang="en-US"/>
+          </a:p>
+        </p:txBody>
+      </p:sp>
+    </p:spTree>
+    <p:extLst>
+      <p:ext uri="{BB962C8B-B14F-4D97-AF65-F5344CB8AC3E}">
+        <p14:creationId xmlns:p14="http://schemas.microsoft.com/office/powerpoint/2010/main" val="2852215617"/>
+      </p:ext>
+    </p:extLst>
+  </p:cSld>
+  <p:clrMapOvr>
+    <a:masterClrMapping/>
+  </p:clrMapOvr>
+  <p:timing>
+    <p:tnLst>
+      <p:par>
+        <p:cTn id="1" dur="indefinite" restart="never" nodeType="tmRoot">
+          <p:childTnLst>
+            <p:seq concurrent="1" nextAc="seek">
+              <p:cTn id="2" dur="indefinite" nodeType="mainSeq">
+                <p:childTnLst>
+                  <p:par>
+                    <p:cTn id="3" fill="hold">
+                      <p:stCondLst>
+                        <p:cond delay="indefinite"/>
+                      </p:stCondLst>
+                      <p:childTnLst>
+                        <p:par>
+                          <p:cTn id="4" fill="hold">
+                            <p:stCondLst>
+                              <p:cond delay="0"/>
+                            </p:stCondLst>
+                            <p:childTnLst>
+                              <p:par>
+                                <p:cTn id="5" presetID="1" presetClass="entr" presetSubtype="0" fill="hold" nodeType="clickEffect">
+                                  <p:stCondLst>
+                                    <p:cond delay="0"/>
+                                  </p:stCondLst>
+                                  <p:childTnLst>
+                                    <p:set>
+                                      <p:cBhvr>
+                                        <p:cTn id="6" dur="1" fill="hold">
+                                          <p:stCondLst>
+                                            <p:cond delay="0"/>
+                                          </p:stCondLst>
+                                        </p:cTn>
+                                        <p:tgtEl>
+                                          <p:spTgt spid="6">
+                                            <p:txEl>
+                                              <p:pRg st="0" end="0"/>
+                                            </p:txEl>
+                                          </p:spTgt>
+                                        </p:tgtEl>
+                                        <p:attrNameLst>
+                                          <p:attrName>style.visibility</p:attrName>
+                                        </p:attrNameLst>
+                                      </p:cBhvr>
+                                      <p:to>
+                                        <p:strVal val="visible"/>
+                                      </p:to>
+                                    </p:set>
+                                  </p:childTnLst>
+                                </p:cTn>
+                              </p:par>
+                            </p:childTnLst>
+                          </p:cTn>
+                        </p:par>
+                      </p:childTnLst>
+                    </p:cTn>
+                  </p:par>
+                  <p:par>
+                    <p:cTn id="7" fill="hold">
+                      <p:stCondLst>
+                        <p:cond delay="indefinite"/>
+                      </p:stCondLst>
+                      <p:childTnLst>
+                        <p:par>
+                          <p:cTn id="8" fill="hold">
+                            <p:stCondLst>
+                              <p:cond delay="0"/>
+                            </p:stCondLst>
+                            <p:childTnLst>
+                              <p:par>
+                                <p:cTn id="9" presetID="1" presetClass="entr" presetSubtype="0" fill="hold" nodeType="clickEffect">
+                                  <p:stCondLst>
+                                    <p:cond delay="0"/>
+                                  </p:stCondLst>
+                                  <p:childTnLst>
+                                    <p:set>
+                                      <p:cBhvr>
+                                        <p:cTn id="10" dur="1" fill="hold">
+                                          <p:stCondLst>
+                                            <p:cond delay="0"/>
+                                          </p:stCondLst>
+                                        </p:cTn>
+                                        <p:tgtEl>
+                                          <p:spTgt spid="6">
+                                            <p:txEl>
+                                              <p:pRg st="1" end="1"/>
+                                            </p:txEl>
+                                          </p:spTgt>
+                                        </p:tgtEl>
+                                        <p:attrNameLst>
+                                          <p:attrName>style.visibility</p:attrName>
+                                        </p:attrNameLst>
+                                      </p:cBhvr>
+                                      <p:to>
+                                        <p:strVal val="visible"/>
+                                      </p:to>
+                                    </p:set>
+                                  </p:childTnLst>
+                                </p:cTn>
+                              </p:par>
+                            </p:childTnLst>
+                          </p:cTn>
+                        </p:par>
+                      </p:childTnLst>
+                    </p:cTn>
+                  </p:par>
+                  <p:par>
+                    <p:cTn id="11" fill="hold">
+                      <p:stCondLst>
+                        <p:cond delay="indefinite"/>
+                      </p:stCondLst>
+                      <p:childTnLst>
+                        <p:par>
+                          <p:cTn id="12" fill="hold">
+                            <p:stCondLst>
+                              <p:cond delay="0"/>
+                            </p:stCondLst>
+                            <p:childTnLst>
+                              <p:par>
+                                <p:cTn id="13" presetID="1" presetClass="entr" presetSubtype="0" fill="hold" nodeType="clickEffect">
+                                  <p:stCondLst>
+                                    <p:cond delay="0"/>
+                                  </p:stCondLst>
+                                  <p:childTnLst>
+                                    <p:set>
+                                      <p:cBhvr>
+                                        <p:cTn id="14" dur="1" fill="hold">
+                                          <p:stCondLst>
+                                            <p:cond delay="0"/>
+                                          </p:stCondLst>
+                                        </p:cTn>
+                                        <p:tgtEl>
+                                          <p:spTgt spid="6">
+                                            <p:txEl>
+                                              <p:pRg st="2" end="2"/>
+                                            </p:txEl>
+                                          </p:spTgt>
+                                        </p:tgtEl>
+                                        <p:attrNameLst>
+                                          <p:attrName>style.visibility</p:attrName>
+                                        </p:attrNameLst>
+                                      </p:cBhvr>
+                                      <p:to>
+                                        <p:strVal val="visible"/>
+                                      </p:to>
+                                    </p:set>
+                                  </p:childTnLst>
+                                </p:cTn>
+                              </p:par>
+                              <p:par>
+                                <p:cTn id="15" presetID="1" presetClass="entr" presetSubtype="0" fill="hold" nodeType="withEffect">
+                                  <p:stCondLst>
+                                    <p:cond delay="0"/>
+                                  </p:stCondLst>
+                                  <p:childTnLst>
+                                    <p:set>
+                                      <p:cBhvr>
+                                        <p:cTn id="16" dur="1" fill="hold">
+                                          <p:stCondLst>
+                                            <p:cond delay="0"/>
+                                          </p:stCondLst>
+                                        </p:cTn>
+                                        <p:tgtEl>
+                                          <p:spTgt spid="10"/>
+                                        </p:tgtEl>
+                                        <p:attrNameLst>
+                                          <p:attrName>style.visibility</p:attrName>
+                                        </p:attrNameLst>
+                                      </p:cBhvr>
+                                      <p:to>
+                                        <p:strVal val="visible"/>
+                                      </p:to>
+                                    </p:set>
+                                  </p:childTnLst>
+                                </p:cTn>
+                              </p:par>
+                              <p:par>
+                                <p:cTn id="17" presetID="1" presetClass="entr" presetSubtype="0" fill="hold" grpId="0" nodeType="withEffect">
+                                  <p:stCondLst>
+                                    <p:cond delay="0"/>
+                                  </p:stCondLst>
+                                  <p:childTnLst>
+                                    <p:set>
+                                      <p:cBhvr>
+                                        <p:cTn id="18" dur="1" fill="hold">
+                                          <p:stCondLst>
+                                            <p:cond delay="0"/>
+                                          </p:stCondLst>
+                                        </p:cTn>
+                                        <p:tgtEl>
+                                          <p:spTgt spid="12"/>
+                                        </p:tgtEl>
+                                        <p:attrNameLst>
+                                          <p:attrName>style.visibility</p:attrName>
+                                        </p:attrNameLst>
+                                      </p:cBhvr>
+                                      <p:to>
+                                        <p:strVal val="visible"/>
+                                      </p:to>
+                                    </p:set>
+                                  </p:childTnLst>
+                                </p:cTn>
+                              </p:par>
+                              <p:par>
+                                <p:cTn id="19" presetID="1" presetClass="entr" presetSubtype="0" fill="hold" nodeType="withEffect">
+                                  <p:stCondLst>
+                                    <p:cond delay="0"/>
+                                  </p:stCondLst>
+                                  <p:childTnLst>
+                                    <p:set>
+                                      <p:cBhvr>
+                                        <p:cTn id="20" dur="1" fill="hold">
+                                          <p:stCondLst>
+                                            <p:cond delay="0"/>
+                                          </p:stCondLst>
+                                        </p:cTn>
+                                        <p:tgtEl>
+                                          <p:spTgt spid="13"/>
+                                        </p:tgtEl>
+                                        <p:attrNameLst>
+                                          <p:attrName>style.visibility</p:attrName>
+                                        </p:attrNameLst>
+                                      </p:cBhvr>
+                                      <p:to>
+                                        <p:strVal val="visible"/>
+                                      </p:to>
+                                    </p:set>
+                                  </p:childTnLst>
+                                </p:cTn>
+                              </p:par>
+                              <p:par>
+                                <p:cTn id="21" presetID="1" presetClass="entr" presetSubtype="0" fill="hold" nodeType="withEffect">
+                                  <p:stCondLst>
+                                    <p:cond delay="0"/>
+                                  </p:stCondLst>
+                                  <p:childTnLst>
+                                    <p:set>
+                                      <p:cBhvr>
+                                        <p:cTn id="22" dur="1" fill="hold">
+                                          <p:stCondLst>
+                                            <p:cond delay="0"/>
+                                          </p:stCondLst>
+                                        </p:cTn>
+                                        <p:tgtEl>
+                                          <p:spTgt spid="14"/>
+                                        </p:tgtEl>
+                                        <p:attrNameLst>
+                                          <p:attrName>style.visibility</p:attrName>
+                                        </p:attrNameLst>
+                                      </p:cBhvr>
+                                      <p:to>
+                                        <p:strVal val="visible"/>
+                                      </p:to>
+                                    </p:set>
+                                  </p:childTnLst>
+                                </p:cTn>
+                              </p:par>
+                              <p:par>
+                                <p:cTn id="23" presetID="1" presetClass="entr" presetSubtype="0" fill="hold" grpId="0" nodeType="withEffect">
+                                  <p:stCondLst>
+                                    <p:cond delay="0"/>
+                                  </p:stCondLst>
+                                  <p:childTnLst>
+                                    <p:set>
+                                      <p:cBhvr>
+                                        <p:cTn id="24" dur="1" fill="hold">
+                                          <p:stCondLst>
+                                            <p:cond delay="0"/>
+                                          </p:stCondLst>
+                                        </p:cTn>
+                                        <p:tgtEl>
+                                          <p:spTgt spid="15"/>
+                                        </p:tgtEl>
+                                        <p:attrNameLst>
+                                          <p:attrName>style.visibility</p:attrName>
+                                        </p:attrNameLst>
+                                      </p:cBhvr>
+                                      <p:to>
+                                        <p:strVal val="visible"/>
+                                      </p:to>
+                                    </p:set>
+                                  </p:childTnLst>
+                                </p:cTn>
+                              </p:par>
+                              <p:par>
+                                <p:cTn id="25" presetID="1" presetClass="entr" presetSubtype="0" fill="hold" grpId="0" nodeType="withEffect">
+                                  <p:stCondLst>
+                                    <p:cond delay="0"/>
+                                  </p:stCondLst>
+                                  <p:childTnLst>
+                                    <p:set>
+                                      <p:cBhvr>
+                                        <p:cTn id="26" dur="1" fill="hold">
+                                          <p:stCondLst>
+                                            <p:cond delay="0"/>
+                                          </p:stCondLst>
+                                        </p:cTn>
+                                        <p:tgtEl>
+                                          <p:spTgt spid="16"/>
+                                        </p:tgtEl>
+                                        <p:attrNameLst>
+                                          <p:attrName>style.visibility</p:attrName>
+                                        </p:attrNameLst>
+                                      </p:cBhvr>
+                                      <p:to>
+                                        <p:strVal val="visible"/>
+                                      </p:to>
+                                    </p:set>
+                                  </p:childTnLst>
+                                </p:cTn>
+                              </p:par>
+                            </p:childTnLst>
+                          </p:cTn>
+                        </p:par>
+                      </p:childTnLst>
+                    </p:cTn>
+                  </p:par>
+                  <p:par>
+                    <p:cTn id="27" fill="hold">
+                      <p:stCondLst>
+                        <p:cond delay="indefinite"/>
+                      </p:stCondLst>
+                      <p:childTnLst>
+                        <p:par>
+                          <p:cTn id="28" fill="hold">
+                            <p:stCondLst>
+                              <p:cond delay="0"/>
+                            </p:stCondLst>
+                            <p:childTnLst>
+                              <p:par>
+                                <p:cTn id="29" presetID="1" presetClass="entr" presetSubtype="0" fill="hold" nodeType="clickEffect">
+                                  <p:stCondLst>
+                                    <p:cond delay="0"/>
+                                  </p:stCondLst>
+                                  <p:childTnLst>
+                                    <p:set>
+                                      <p:cBhvr>
+                                        <p:cTn id="30" dur="1" fill="hold">
+                                          <p:stCondLst>
+                                            <p:cond delay="0"/>
+                                          </p:stCondLst>
+                                        </p:cTn>
+                                        <p:tgtEl>
+                                          <p:spTgt spid="6">
+                                            <p:txEl>
+                                              <p:pRg st="3" end="3"/>
+                                            </p:txEl>
+                                          </p:spTgt>
+                                        </p:tgtEl>
+                                        <p:attrNameLst>
+                                          <p:attrName>style.visibility</p:attrName>
+                                        </p:attrNameLst>
+                                      </p:cBhvr>
+                                      <p:to>
+                                        <p:strVal val="visible"/>
+                                      </p:to>
+                                    </p:set>
+                                  </p:childTnLst>
+                                </p:cTn>
+                              </p:par>
+                            </p:childTnLst>
+                          </p:cTn>
+                        </p:par>
+                      </p:childTnLst>
+                    </p:cTn>
+                  </p:par>
+                </p:childTnLst>
+              </p:cTn>
+              <p:prevCondLst>
+                <p:cond evt="onPrev" delay="0">
+                  <p:tgtEl>
+                    <p:sldTgt/>
+                  </p:tgtEl>
+                </p:cond>
+              </p:prevCondLst>
+              <p:nextCondLst>
+                <p:cond evt="onNext" delay="0">
+                  <p:tgtEl>
+                    <p:sldTgt/>
+                  </p:tgtEl>
+                </p:cond>
+              </p:nextCondLst>
+            </p:seq>
+          </p:childTnLst>
+        </p:cTn>
+      </p:par>
+    </p:tnLst>
+    <p:bldLst>
+      <p:bldP spid="12" grpId="0"/>
+      <p:bldP spid="15" grpId="0" animBg="1"/>
+      <p:bldP spid="16" grpId="0" animBg="1"/>
+    </p:bldLst>
+  </p:timing>
+</p:sld>
+</file>
+
+<file path=ppt/slides/slide13.xml><?xml version="1.0" encoding="utf-8"?>
+<p:sld xmlns:a="http://schemas.openxmlformats.org/drawingml/2006/main" xmlns:r="http://schemas.openxmlformats.org/officeDocument/2006/relationships" xmlns:p="http://schemas.openxmlformats.org/presentationml/2006/main">
+  <p:cSld>
+    <p:spTree>
+      <p:nvGrpSpPr>
+        <p:cNvPr id="1" name=""/>
+        <p:cNvGrpSpPr/>
+        <p:nvPr/>
+      </p:nvGrpSpPr>
+      <p:grpSpPr>
+        <a:xfrm>
+          <a:off x="0" y="0"/>
+          <a:ext cx="0" cy="0"/>
+          <a:chOff x="0" y="0"/>
+          <a:chExt cx="0" cy="0"/>
+        </a:xfrm>
+      </p:grpSpPr>
+      <p:sp>
+        <p:nvSpPr>
+          <p:cNvPr id="3" name="Text Placeholder 2">
+            <a:extLst>
+              <a:ext uri="{FF2B5EF4-FFF2-40B4-BE49-F238E27FC236}">
+                <a16:creationId xmlns:a16="http://schemas.microsoft.com/office/drawing/2014/main" id="{AA41574F-0B0C-7AE8-882D-CBE480D8D64D}"/>
+              </a:ext>
+            </a:extLst>
+          </p:cNvPr>
+          <p:cNvSpPr>
+            <a:spLocks noGrp="1"/>
+          </p:cNvSpPr>
+          <p:nvPr>
+            <p:ph type="body" idx="1"/>
+          </p:nvPr>
+        </p:nvSpPr>
+        <p:spPr/>
+        <p:txBody>
+          <a:bodyPr>
+            <a:normAutofit/>
+          </a:bodyPr>
+          <a:lstStyle/>
+          <a:p>
+            <a:pPr algn="ctr"/>
+            <a:r>
+              <a:rPr lang="en-US" sz="3200" dirty="0"/>
+              <a:t>One Sample Bootstrap Algorithm</a:t>
+            </a:r>
+          </a:p>
+        </p:txBody>
+      </p:sp>
+    </p:spTree>
+    <p:extLst>
+      <p:ext uri="{BB962C8B-B14F-4D97-AF65-F5344CB8AC3E}">
+        <p14:creationId xmlns:p14="http://schemas.microsoft.com/office/powerpoint/2010/main" val="172537209"/>
+      </p:ext>
+    </p:extLst>
+  </p:cSld>
+  <p:clrMapOvr>
+    <a:masterClrMapping/>
+  </p:clrMapOvr>
+</p:sld>
+</file>
+
+<file path=ppt/slides/slide14.xml><?xml version="1.0" encoding="utf-8"?>
 <p:sld xmlns:a="http://schemas.openxmlformats.org/drawingml/2006/main" xmlns:r="http://schemas.openxmlformats.org/officeDocument/2006/relationships" xmlns:p="http://schemas.openxmlformats.org/presentationml/2006/main">
   <p:cSld>
     <p:spTree>
@@ -5304,7 +7064,7 @@
 </p:sld>
 </file>
 
-<file path=ppt/slides/slide12.xml><?xml version="1.0" encoding="utf-8"?>
+<file path=ppt/slides/slide15.xml><?xml version="1.0" encoding="utf-8"?>
 <p:sld xmlns:a="http://schemas.openxmlformats.org/drawingml/2006/main" xmlns:r="http://schemas.openxmlformats.org/officeDocument/2006/relationships" xmlns:p="http://schemas.openxmlformats.org/presentationml/2006/main">
   <p:cSld>
     <p:spTree>
@@ -12206,7 +13966,7 @@
 </p:sld>
 </file>
 
-<file path=ppt/slides/slide13.xml><?xml version="1.0" encoding="utf-8"?>
+<file path=ppt/slides/slide16.xml><?xml version="1.0" encoding="utf-8"?>
 <p:sld xmlns:a="http://schemas.openxmlformats.org/drawingml/2006/main" xmlns:r="http://schemas.openxmlformats.org/officeDocument/2006/relationships" xmlns:p="http://schemas.openxmlformats.org/presentationml/2006/main">
   <p:cSld>
     <p:spTree>
@@ -12293,11 +14053,11 @@
             </a:r>
             <a:r>
               <a:rPr lang="en-US" dirty="0"/>
-              <a:t> of a statistic</a:t>
+              <a:t> of a statistic from an unbiased sample </a:t>
             </a:r>
             <a:r>
               <a:rPr dirty="0"/>
-              <a:t> converges</a:t>
+              <a:t>converges</a:t>
             </a:r>
             <a:r>
               <a:rPr lang="en-US" dirty="0"/>
@@ -12599,7 +14359,7 @@
 </p:sld>
 </file>
 
-<file path=ppt/slides/slide14.xml><?xml version="1.0" encoding="utf-8"?>
+<file path=ppt/slides/slide17.xml><?xml version="1.0" encoding="utf-8"?>
 <p:sld xmlns:a="http://schemas.openxmlformats.org/drawingml/2006/main" xmlns:r="http://schemas.openxmlformats.org/officeDocument/2006/relationships" xmlns:p="http://schemas.openxmlformats.org/presentationml/2006/main">
   <p:cSld>
     <p:spTree>
@@ -12762,7 +14522,7 @@
 </p:sld>
 </file>
 
-<file path=ppt/slides/slide15.xml><?xml version="1.0" encoding="utf-8"?>
+<file path=ppt/slides/slide18.xml><?xml version="1.0" encoding="utf-8"?>
 <p:sld xmlns:a="http://schemas.openxmlformats.org/drawingml/2006/main" xmlns:r="http://schemas.openxmlformats.org/officeDocument/2006/relationships" xmlns:p="http://schemas.openxmlformats.org/presentationml/2006/main">
   <p:cSld>
     <p:spTree>
@@ -12887,7 +14647,7 @@
 </p:sld>
 </file>
 
-<file path=ppt/slides/slide16.xml><?xml version="1.0" encoding="utf-8"?>
+<file path=ppt/slides/slide19.xml><?xml version="1.0" encoding="utf-8"?>
 <p:sld xmlns:a="http://schemas.openxmlformats.org/drawingml/2006/main" xmlns:r="http://schemas.openxmlformats.org/officeDocument/2006/relationships" xmlns:p="http://schemas.openxmlformats.org/presentationml/2006/main">
   <p:cSld>
     <p:spTree>
@@ -14033,7 +15793,401 @@
 </p:sld>
 </file>
 
-<file path=ppt/slides/slide17.xml><?xml version="1.0" encoding="utf-8"?>
+<file path=ppt/slides/slide2.xml><?xml version="1.0" encoding="utf-8"?>
+<p:sld xmlns:a="http://schemas.openxmlformats.org/drawingml/2006/main" xmlns:r="http://schemas.openxmlformats.org/officeDocument/2006/relationships" xmlns:p="http://schemas.openxmlformats.org/presentationml/2006/main">
+  <p:cSld>
+    <p:spTree>
+      <p:nvGrpSpPr>
+        <p:cNvPr id="1" name=""/>
+        <p:cNvGrpSpPr/>
+        <p:nvPr/>
+      </p:nvGrpSpPr>
+      <p:grpSpPr>
+        <a:xfrm>
+          <a:off x="0" y="0"/>
+          <a:ext cx="0" cy="0"/>
+          <a:chOff x="0" y="0"/>
+          <a:chExt cx="0" cy="0"/>
+        </a:xfrm>
+      </p:grpSpPr>
+      <p:sp>
+        <p:nvSpPr>
+          <p:cNvPr id="2" name="Title 1"/>
+          <p:cNvSpPr>
+            <a:spLocks noGrp="1"/>
+          </p:cNvSpPr>
+          <p:nvPr>
+            <p:ph type="title"/>
+          </p:nvPr>
+        </p:nvSpPr>
+        <p:spPr/>
+        <p:txBody>
+          <a:bodyPr/>
+          <a:lstStyle/>
+          <a:p>
+            <a:pPr marL="0" lvl="0" indent="0">
+              <a:buNone/>
+            </a:pPr>
+            <a:r>
+              <a:t>Introduction</a:t>
+            </a:r>
+          </a:p>
+        </p:txBody>
+      </p:sp>
+      <p:sp>
+        <p:nvSpPr>
+          <p:cNvPr id="3" name="Content Placeholder 2"/>
+          <p:cNvSpPr>
+            <a:spLocks noGrp="1"/>
+          </p:cNvSpPr>
+          <p:nvPr>
+            <p:ph idx="1"/>
+          </p:nvPr>
+        </p:nvSpPr>
+        <p:spPr/>
+        <p:txBody>
+          <a:bodyPr>
+            <a:normAutofit fontScale="92500" lnSpcReduction="20000"/>
+          </a:bodyPr>
+          <a:lstStyle/>
+          <a:p>
+            <a:pPr marL="0" lvl="0" indent="0">
+              <a:buNone/>
+            </a:pPr>
+            <a:r>
+              <a:rPr i="1" dirty="0"/>
+              <a:t>“There were others who had forced their way to the top from the lowest rung by the aid of their bootstraps.”</a:t>
+            </a:r>
+            <a:br>
+              <a:rPr dirty="0"/>
+            </a:br>
+            <a:r>
+              <a:rPr i="1" dirty="0"/>
+              <a:t>James Joyce, ‘Ulysses’ 1922</a:t>
+            </a:r>
+          </a:p>
+          <a:p>
+            <a:pPr marL="0" lvl="0" indent="0">
+              <a:buNone/>
+            </a:pPr>
+            <a:r>
+              <a:rPr dirty="0"/>
+              <a:t>Bootstrap and re-sampling methods are widely applicable statistical </a:t>
+            </a:r>
+            <a:r>
+              <a:rPr lang="en-US" dirty="0"/>
+              <a:t>inference </a:t>
+            </a:r>
+            <a:r>
+              <a:rPr dirty="0"/>
+              <a:t>methods</a:t>
+            </a:r>
+          </a:p>
+          <a:p>
+            <a:pPr lvl="0"/>
+            <a:r>
+              <a:rPr dirty="0"/>
+              <a:t>Resampling methods are products of the computer age</a:t>
+            </a:r>
+          </a:p>
+          <a:p>
+            <a:pPr lvl="0"/>
+            <a:r>
+              <a:rPr dirty="0"/>
+              <a:t>Use computational resources un</a:t>
+            </a:r>
+            <a:r>
+              <a:rPr lang="en-US" dirty="0"/>
+              <a:t>availa</a:t>
+            </a:r>
+            <a:r>
+              <a:rPr dirty="0"/>
+              <a:t>ble </a:t>
+            </a:r>
+            <a:r>
+              <a:rPr lang="en-US" dirty="0"/>
+              <a:t>until late </a:t>
+            </a:r>
+            <a:r>
+              <a:rPr dirty="0"/>
+              <a:t>20th Century</a:t>
+            </a:r>
+          </a:p>
+          <a:p>
+            <a:pPr lvl="0"/>
+            <a:r>
+              <a:rPr dirty="0"/>
+              <a:t>Repeatedly re-sampling the data </a:t>
+            </a:r>
+            <a:r>
+              <a:rPr lang="en-US" dirty="0"/>
+              <a:t>using</a:t>
+            </a:r>
+            <a:r>
+              <a:rPr dirty="0"/>
+              <a:t> nonparametric model relax</a:t>
+            </a:r>
+            <a:r>
+              <a:rPr lang="en-US" dirty="0"/>
+              <a:t>es</a:t>
+            </a:r>
+            <a:r>
+              <a:rPr dirty="0"/>
+              <a:t> some assumptions of classical statistical methods</a:t>
+            </a:r>
+          </a:p>
+          <a:p>
+            <a:pPr lvl="0"/>
+            <a:r>
+              <a:rPr dirty="0"/>
+              <a:t>Re-sampling methods draw heavily on the law of large number</a:t>
+            </a:r>
+            <a:r>
+              <a:rPr lang="en-US" dirty="0"/>
+              <a:t>s</a:t>
+            </a:r>
+            <a:r>
+              <a:rPr dirty="0"/>
+              <a:t> and the central limit theorem</a:t>
+            </a:r>
+          </a:p>
+        </p:txBody>
+      </p:sp>
+    </p:spTree>
+  </p:cSld>
+  <p:clrMapOvr>
+    <a:masterClrMapping/>
+  </p:clrMapOvr>
+  <p:timing>
+    <p:tnLst>
+      <p:par>
+        <p:cTn id="1" dur="indefinite" restart="never" nodeType="tmRoot">
+          <p:childTnLst>
+            <p:seq concurrent="1" nextAc="seek">
+              <p:cTn id="2" dur="indefinite" nodeType="mainSeq">
+                <p:childTnLst>
+                  <p:par>
+                    <p:cTn id="3" fill="hold">
+                      <p:stCondLst>
+                        <p:cond delay="indefinite"/>
+                      </p:stCondLst>
+                      <p:childTnLst>
+                        <p:par>
+                          <p:cTn id="4" fill="hold">
+                            <p:stCondLst>
+                              <p:cond delay="0"/>
+                            </p:stCondLst>
+                            <p:childTnLst>
+                              <p:par>
+                                <p:cTn id="5" presetID="1" presetClass="entr" presetSubtype="0" fill="hold" nodeType="clickEffect">
+                                  <p:stCondLst>
+                                    <p:cond delay="0"/>
+                                  </p:stCondLst>
+                                  <p:childTnLst>
+                                    <p:set>
+                                      <p:cBhvr>
+                                        <p:cTn id="6" dur="1" fill="hold">
+                                          <p:stCondLst>
+                                            <p:cond delay="0"/>
+                                          </p:stCondLst>
+                                        </p:cTn>
+                                        <p:tgtEl>
+                                          <p:spTgt spid="3">
+                                            <p:txEl>
+                                              <p:pRg st="2" end="2"/>
+                                            </p:txEl>
+                                          </p:spTgt>
+                                        </p:tgtEl>
+                                        <p:attrNameLst>
+                                          <p:attrName>style.visibility</p:attrName>
+                                        </p:attrNameLst>
+                                      </p:cBhvr>
+                                      <p:to>
+                                        <p:strVal val="visible"/>
+                                      </p:to>
+                                    </p:set>
+                                  </p:childTnLst>
+                                </p:cTn>
+                              </p:par>
+                            </p:childTnLst>
+                          </p:cTn>
+                        </p:par>
+                      </p:childTnLst>
+                    </p:cTn>
+                  </p:par>
+                  <p:par>
+                    <p:cTn id="7" fill="hold">
+                      <p:stCondLst>
+                        <p:cond delay="indefinite"/>
+                      </p:stCondLst>
+                      <p:childTnLst>
+                        <p:par>
+                          <p:cTn id="8" fill="hold">
+                            <p:stCondLst>
+                              <p:cond delay="0"/>
+                            </p:stCondLst>
+                            <p:childTnLst>
+                              <p:par>
+                                <p:cTn id="9" presetID="1" presetClass="entr" presetSubtype="0" fill="hold" nodeType="clickEffect">
+                                  <p:stCondLst>
+                                    <p:cond delay="0"/>
+                                  </p:stCondLst>
+                                  <p:childTnLst>
+                                    <p:set>
+                                      <p:cBhvr>
+                                        <p:cTn id="10" dur="1" fill="hold">
+                                          <p:stCondLst>
+                                            <p:cond delay="0"/>
+                                          </p:stCondLst>
+                                        </p:cTn>
+                                        <p:tgtEl>
+                                          <p:spTgt spid="3">
+                                            <p:txEl>
+                                              <p:pRg st="3" end="3"/>
+                                            </p:txEl>
+                                          </p:spTgt>
+                                        </p:tgtEl>
+                                        <p:attrNameLst>
+                                          <p:attrName>style.visibility</p:attrName>
+                                        </p:attrNameLst>
+                                      </p:cBhvr>
+                                      <p:to>
+                                        <p:strVal val="visible"/>
+                                      </p:to>
+                                    </p:set>
+                                  </p:childTnLst>
+                                </p:cTn>
+                              </p:par>
+                            </p:childTnLst>
+                          </p:cTn>
+                        </p:par>
+                      </p:childTnLst>
+                    </p:cTn>
+                  </p:par>
+                  <p:par>
+                    <p:cTn id="11" fill="hold">
+                      <p:stCondLst>
+                        <p:cond delay="indefinite"/>
+                      </p:stCondLst>
+                      <p:childTnLst>
+                        <p:par>
+                          <p:cTn id="12" fill="hold">
+                            <p:stCondLst>
+                              <p:cond delay="0"/>
+                            </p:stCondLst>
+                            <p:childTnLst>
+                              <p:par>
+                                <p:cTn id="13" presetID="1" presetClass="entr" presetSubtype="0" fill="hold" nodeType="clickEffect">
+                                  <p:stCondLst>
+                                    <p:cond delay="0"/>
+                                  </p:stCondLst>
+                                  <p:childTnLst>
+                                    <p:set>
+                                      <p:cBhvr>
+                                        <p:cTn id="14" dur="1" fill="hold">
+                                          <p:stCondLst>
+                                            <p:cond delay="0"/>
+                                          </p:stCondLst>
+                                        </p:cTn>
+                                        <p:tgtEl>
+                                          <p:spTgt spid="3">
+                                            <p:txEl>
+                                              <p:pRg st="4" end="4"/>
+                                            </p:txEl>
+                                          </p:spTgt>
+                                        </p:tgtEl>
+                                        <p:attrNameLst>
+                                          <p:attrName>style.visibility</p:attrName>
+                                        </p:attrNameLst>
+                                      </p:cBhvr>
+                                      <p:to>
+                                        <p:strVal val="visible"/>
+                                      </p:to>
+                                    </p:set>
+                                  </p:childTnLst>
+                                </p:cTn>
+                              </p:par>
+                            </p:childTnLst>
+                          </p:cTn>
+                        </p:par>
+                      </p:childTnLst>
+                    </p:cTn>
+                  </p:par>
+                  <p:par>
+                    <p:cTn id="15" fill="hold">
+                      <p:stCondLst>
+                        <p:cond delay="indefinite"/>
+                      </p:stCondLst>
+                      <p:childTnLst>
+                        <p:par>
+                          <p:cTn id="16" fill="hold">
+                            <p:stCondLst>
+                              <p:cond delay="0"/>
+                            </p:stCondLst>
+                            <p:childTnLst>
+                              <p:par>
+                                <p:cTn id="17" presetID="1" presetClass="entr" presetSubtype="0" fill="hold" nodeType="clickEffect">
+                                  <p:stCondLst>
+                                    <p:cond delay="0"/>
+                                  </p:stCondLst>
+                                  <p:childTnLst>
+                                    <p:set>
+                                      <p:cBhvr>
+                                        <p:cTn id="18" dur="1" fill="hold">
+                                          <p:stCondLst>
+                                            <p:cond delay="0"/>
+                                          </p:stCondLst>
+                                        </p:cTn>
+                                        <p:tgtEl>
+                                          <p:spTgt spid="3">
+                                            <p:txEl>
+                                              <p:pRg st="5" end="5"/>
+                                            </p:txEl>
+                                          </p:spTgt>
+                                        </p:tgtEl>
+                                        <p:attrNameLst>
+                                          <p:attrName>style.visibility</p:attrName>
+                                        </p:attrNameLst>
+                                      </p:cBhvr>
+                                      <p:to>
+                                        <p:strVal val="visible"/>
+                                      </p:to>
+                                    </p:set>
+                                  </p:childTnLst>
+                                </p:cTn>
+                              </p:par>
+                            </p:childTnLst>
+                          </p:cTn>
+                        </p:par>
+                      </p:childTnLst>
+                    </p:cTn>
+                  </p:par>
+                </p:childTnLst>
+              </p:cTn>
+              <p:prevCondLst>
+                <p:cond evt="onPrev" delay="0">
+                  <p:tgtEl>
+                    <p:sldTgt/>
+                  </p:tgtEl>
+                </p:cond>
+              </p:prevCondLst>
+              <p:nextCondLst>
+                <p:cond evt="onNext" delay="0">
+                  <p:tgtEl>
+                    <p:sldTgt/>
+                  </p:tgtEl>
+                </p:cond>
+              </p:nextCondLst>
+            </p:seq>
+          </p:childTnLst>
+        </p:cTn>
+      </p:par>
+    </p:tnLst>
+  </p:timing>
+</p:sld>
+</file>
+
+<file path=ppt/slides/slide20.xml><?xml version="1.0" encoding="utf-8"?>
 <p:sld xmlns:a="http://schemas.openxmlformats.org/drawingml/2006/main" xmlns:r="http://schemas.openxmlformats.org/officeDocument/2006/relationships" xmlns:p="http://schemas.openxmlformats.org/presentationml/2006/main">
   <p:cSld>
     <p:spTree>
@@ -14221,7 +16375,7 @@
 </p:sld>
 </file>
 
-<file path=ppt/slides/slide18.xml><?xml version="1.0" encoding="utf-8"?>
+<file path=ppt/slides/slide21.xml><?xml version="1.0" encoding="utf-8"?>
 <p:sld xmlns:a="http://schemas.openxmlformats.org/drawingml/2006/main" xmlns:r="http://schemas.openxmlformats.org/officeDocument/2006/relationships" xmlns:p="http://schemas.openxmlformats.org/presentationml/2006/main">
   <p:cSld>
     <p:spTree>
@@ -15044,7 +17198,7 @@
 </p:sld>
 </file>
 
-<file path=ppt/slides/slide19.xml><?xml version="1.0" encoding="utf-8"?>
+<file path=ppt/slides/slide22.xml><?xml version="1.0" encoding="utf-8"?>
 <p:sld xmlns:a="http://schemas.openxmlformats.org/drawingml/2006/main" xmlns:r="http://schemas.openxmlformats.org/officeDocument/2006/relationships" xmlns:p="http://schemas.openxmlformats.org/presentationml/2006/main">
   <p:cSld>
     <p:spTree>
@@ -15346,385 +17500,7 @@
 </p:sld>
 </file>
 
-<file path=ppt/slides/slide2.xml><?xml version="1.0" encoding="utf-8"?>
-<p:sld xmlns:a="http://schemas.openxmlformats.org/drawingml/2006/main" xmlns:r="http://schemas.openxmlformats.org/officeDocument/2006/relationships" xmlns:p="http://schemas.openxmlformats.org/presentationml/2006/main">
-  <p:cSld>
-    <p:spTree>
-      <p:nvGrpSpPr>
-        <p:cNvPr id="1" name=""/>
-        <p:cNvGrpSpPr/>
-        <p:nvPr/>
-      </p:nvGrpSpPr>
-      <p:grpSpPr>
-        <a:xfrm>
-          <a:off x="0" y="0"/>
-          <a:ext cx="0" cy="0"/>
-          <a:chOff x="0" y="0"/>
-          <a:chExt cx="0" cy="0"/>
-        </a:xfrm>
-      </p:grpSpPr>
-      <p:sp>
-        <p:nvSpPr>
-          <p:cNvPr id="2" name="Title 1"/>
-          <p:cNvSpPr>
-            <a:spLocks noGrp="1"/>
-          </p:cNvSpPr>
-          <p:nvPr>
-            <p:ph type="title"/>
-          </p:nvPr>
-        </p:nvSpPr>
-        <p:spPr/>
-        <p:txBody>
-          <a:bodyPr/>
-          <a:lstStyle/>
-          <a:p>
-            <a:pPr marL="0" lvl="0" indent="0">
-              <a:buNone/>
-            </a:pPr>
-            <a:r>
-              <a:t>Introduction</a:t>
-            </a:r>
-          </a:p>
-        </p:txBody>
-      </p:sp>
-      <p:sp>
-        <p:nvSpPr>
-          <p:cNvPr id="3" name="Content Placeholder 2"/>
-          <p:cNvSpPr>
-            <a:spLocks noGrp="1"/>
-          </p:cNvSpPr>
-          <p:nvPr>
-            <p:ph idx="1"/>
-          </p:nvPr>
-        </p:nvSpPr>
-        <p:spPr/>
-        <p:txBody>
-          <a:bodyPr>
-            <a:normAutofit fontScale="92500" lnSpcReduction="20000"/>
-          </a:bodyPr>
-          <a:lstStyle/>
-          <a:p>
-            <a:pPr marL="0" lvl="0" indent="0">
-              <a:buNone/>
-            </a:pPr>
-            <a:r>
-              <a:rPr i="1" dirty="0"/>
-              <a:t>“There were others who had forced their way to the top from the lowest rung by the aid of their bootstraps.”</a:t>
-            </a:r>
-            <a:br>
-              <a:rPr dirty="0"/>
-            </a:br>
-            <a:r>
-              <a:rPr i="1" dirty="0"/>
-              <a:t>James Joyce, ‘Ulysses’ 1922</a:t>
-            </a:r>
-          </a:p>
-          <a:p>
-            <a:pPr marL="0" lvl="0" indent="0">
-              <a:buNone/>
-            </a:pPr>
-            <a:r>
-              <a:rPr dirty="0"/>
-              <a:t>Bootstrap and re-sampling methods are widely applicable statistical methods</a:t>
-            </a:r>
-          </a:p>
-          <a:p>
-            <a:pPr lvl="0"/>
-            <a:r>
-              <a:rPr dirty="0"/>
-              <a:t>Resampling methods are products of the computer age</a:t>
-            </a:r>
-          </a:p>
-          <a:p>
-            <a:pPr lvl="0"/>
-            <a:r>
-              <a:rPr dirty="0"/>
-              <a:t>Use computational resources un</a:t>
-            </a:r>
-            <a:r>
-              <a:rPr lang="en-US" dirty="0"/>
-              <a:t>availa</a:t>
-            </a:r>
-            <a:r>
-              <a:rPr dirty="0"/>
-              <a:t>ble </a:t>
-            </a:r>
-            <a:r>
-              <a:rPr lang="en-US" dirty="0"/>
-              <a:t>until late </a:t>
-            </a:r>
-            <a:r>
-              <a:rPr dirty="0"/>
-              <a:t>20th Century</a:t>
-            </a:r>
-          </a:p>
-          <a:p>
-            <a:pPr lvl="0"/>
-            <a:r>
-              <a:rPr dirty="0"/>
-              <a:t>Repeatedly re-sampling the data </a:t>
-            </a:r>
-            <a:r>
-              <a:rPr lang="en-US" dirty="0"/>
-              <a:t>using</a:t>
-            </a:r>
-            <a:r>
-              <a:rPr dirty="0"/>
-              <a:t> nonparametric model relaxes some assumptions of classical statistical methods</a:t>
-            </a:r>
-          </a:p>
-          <a:p>
-            <a:pPr lvl="0"/>
-            <a:r>
-              <a:rPr dirty="0"/>
-              <a:t>Re-sampling methods draw heavily on the law of large number</a:t>
-            </a:r>
-            <a:r>
-              <a:rPr lang="en-US" dirty="0"/>
-              <a:t>s</a:t>
-            </a:r>
-            <a:r>
-              <a:rPr dirty="0"/>
-              <a:t> and the central limit theorem</a:t>
-            </a:r>
-          </a:p>
-        </p:txBody>
-      </p:sp>
-    </p:spTree>
-  </p:cSld>
-  <p:clrMapOvr>
-    <a:masterClrMapping/>
-  </p:clrMapOvr>
-  <p:timing>
-    <p:tnLst>
-      <p:par>
-        <p:cTn id="1" dur="indefinite" restart="never" nodeType="tmRoot">
-          <p:childTnLst>
-            <p:seq concurrent="1" nextAc="seek">
-              <p:cTn id="2" dur="indefinite" nodeType="mainSeq">
-                <p:childTnLst>
-                  <p:par>
-                    <p:cTn id="3" fill="hold">
-                      <p:stCondLst>
-                        <p:cond delay="indefinite"/>
-                      </p:stCondLst>
-                      <p:childTnLst>
-                        <p:par>
-                          <p:cTn id="4" fill="hold">
-                            <p:stCondLst>
-                              <p:cond delay="0"/>
-                            </p:stCondLst>
-                            <p:childTnLst>
-                              <p:par>
-                                <p:cTn id="5" presetID="1" presetClass="entr" presetSubtype="0" fill="hold" nodeType="clickEffect">
-                                  <p:stCondLst>
-                                    <p:cond delay="0"/>
-                                  </p:stCondLst>
-                                  <p:childTnLst>
-                                    <p:set>
-                                      <p:cBhvr>
-                                        <p:cTn id="6" dur="1" fill="hold">
-                                          <p:stCondLst>
-                                            <p:cond delay="0"/>
-                                          </p:stCondLst>
-                                        </p:cTn>
-                                        <p:tgtEl>
-                                          <p:spTgt spid="3">
-                                            <p:txEl>
-                                              <p:pRg st="2" end="2"/>
-                                            </p:txEl>
-                                          </p:spTgt>
-                                        </p:tgtEl>
-                                        <p:attrNameLst>
-                                          <p:attrName>style.visibility</p:attrName>
-                                        </p:attrNameLst>
-                                      </p:cBhvr>
-                                      <p:to>
-                                        <p:strVal val="visible"/>
-                                      </p:to>
-                                    </p:set>
-                                  </p:childTnLst>
-                                </p:cTn>
-                              </p:par>
-                            </p:childTnLst>
-                          </p:cTn>
-                        </p:par>
-                      </p:childTnLst>
-                    </p:cTn>
-                  </p:par>
-                  <p:par>
-                    <p:cTn id="7" fill="hold">
-                      <p:stCondLst>
-                        <p:cond delay="indefinite"/>
-                      </p:stCondLst>
-                      <p:childTnLst>
-                        <p:par>
-                          <p:cTn id="8" fill="hold">
-                            <p:stCondLst>
-                              <p:cond delay="0"/>
-                            </p:stCondLst>
-                            <p:childTnLst>
-                              <p:par>
-                                <p:cTn id="9" presetID="1" presetClass="entr" presetSubtype="0" fill="hold" nodeType="clickEffect">
-                                  <p:stCondLst>
-                                    <p:cond delay="0"/>
-                                  </p:stCondLst>
-                                  <p:childTnLst>
-                                    <p:set>
-                                      <p:cBhvr>
-                                        <p:cTn id="10" dur="1" fill="hold">
-                                          <p:stCondLst>
-                                            <p:cond delay="0"/>
-                                          </p:stCondLst>
-                                        </p:cTn>
-                                        <p:tgtEl>
-                                          <p:spTgt spid="3">
-                                            <p:txEl>
-                                              <p:pRg st="3" end="3"/>
-                                            </p:txEl>
-                                          </p:spTgt>
-                                        </p:tgtEl>
-                                        <p:attrNameLst>
-                                          <p:attrName>style.visibility</p:attrName>
-                                        </p:attrNameLst>
-                                      </p:cBhvr>
-                                      <p:to>
-                                        <p:strVal val="visible"/>
-                                      </p:to>
-                                    </p:set>
-                                  </p:childTnLst>
-                                </p:cTn>
-                              </p:par>
-                            </p:childTnLst>
-                          </p:cTn>
-                        </p:par>
-                      </p:childTnLst>
-                    </p:cTn>
-                  </p:par>
-                  <p:par>
-                    <p:cTn id="11" fill="hold">
-                      <p:stCondLst>
-                        <p:cond delay="indefinite"/>
-                      </p:stCondLst>
-                      <p:childTnLst>
-                        <p:par>
-                          <p:cTn id="12" fill="hold">
-                            <p:stCondLst>
-                              <p:cond delay="0"/>
-                            </p:stCondLst>
-                            <p:childTnLst>
-                              <p:par>
-                                <p:cTn id="13" presetID="1" presetClass="entr" presetSubtype="0" fill="hold" nodeType="clickEffect">
-                                  <p:stCondLst>
-                                    <p:cond delay="0"/>
-                                  </p:stCondLst>
-                                  <p:childTnLst>
-                                    <p:set>
-                                      <p:cBhvr>
-                                        <p:cTn id="14" dur="1" fill="hold">
-                                          <p:stCondLst>
-                                            <p:cond delay="0"/>
-                                          </p:stCondLst>
-                                        </p:cTn>
-                                        <p:tgtEl>
-                                          <p:spTgt spid="3">
-                                            <p:txEl>
-                                              <p:pRg st="4" end="4"/>
-                                            </p:txEl>
-                                          </p:spTgt>
-                                        </p:tgtEl>
-                                        <p:attrNameLst>
-                                          <p:attrName>style.visibility</p:attrName>
-                                        </p:attrNameLst>
-                                      </p:cBhvr>
-                                      <p:to>
-                                        <p:strVal val="visible"/>
-                                      </p:to>
-                                    </p:set>
-                                  </p:childTnLst>
-                                </p:cTn>
-                              </p:par>
-                            </p:childTnLst>
-                          </p:cTn>
-                        </p:par>
-                      </p:childTnLst>
-                    </p:cTn>
-                  </p:par>
-                  <p:par>
-                    <p:cTn id="15" fill="hold">
-                      <p:stCondLst>
-                        <p:cond delay="indefinite"/>
-                      </p:stCondLst>
-                      <p:childTnLst>
-                        <p:par>
-                          <p:cTn id="16" fill="hold">
-                            <p:stCondLst>
-                              <p:cond delay="0"/>
-                            </p:stCondLst>
-                            <p:childTnLst>
-                              <p:par>
-                                <p:cTn id="17" presetID="1" presetClass="entr" presetSubtype="0" fill="hold" nodeType="clickEffect">
-                                  <p:stCondLst>
-                                    <p:cond delay="0"/>
-                                  </p:stCondLst>
-                                  <p:childTnLst>
-                                    <p:set>
-                                      <p:cBhvr>
-                                        <p:cTn id="18" dur="1" fill="hold">
-                                          <p:stCondLst>
-                                            <p:cond delay="0"/>
-                                          </p:stCondLst>
-                                        </p:cTn>
-                                        <p:tgtEl>
-                                          <p:spTgt spid="3">
-                                            <p:txEl>
-                                              <p:pRg st="5" end="5"/>
-                                            </p:txEl>
-                                          </p:spTgt>
-                                        </p:tgtEl>
-                                        <p:attrNameLst>
-                                          <p:attrName>style.visibility</p:attrName>
-                                        </p:attrNameLst>
-                                      </p:cBhvr>
-                                      <p:to>
-                                        <p:strVal val="visible"/>
-                                      </p:to>
-                                    </p:set>
-                                  </p:childTnLst>
-                                </p:cTn>
-                              </p:par>
-                            </p:childTnLst>
-                          </p:cTn>
-                        </p:par>
-                      </p:childTnLst>
-                    </p:cTn>
-                  </p:par>
-                </p:childTnLst>
-              </p:cTn>
-              <p:prevCondLst>
-                <p:cond evt="onPrev" delay="0">
-                  <p:tgtEl>
-                    <p:sldTgt/>
-                  </p:tgtEl>
-                </p:cond>
-              </p:prevCondLst>
-              <p:nextCondLst>
-                <p:cond evt="onNext" delay="0">
-                  <p:tgtEl>
-                    <p:sldTgt/>
-                  </p:tgtEl>
-                </p:cond>
-              </p:nextCondLst>
-            </p:seq>
-          </p:childTnLst>
-        </p:cTn>
-      </p:par>
-    </p:tnLst>
-  </p:timing>
-</p:sld>
-</file>
-
-<file path=ppt/slides/slide20.xml><?xml version="1.0" encoding="utf-8"?>
+<file path=ppt/slides/slide23.xml><?xml version="1.0" encoding="utf-8"?>
 <p:sld xmlns:a="http://schemas.openxmlformats.org/drawingml/2006/main" xmlns:r="http://schemas.openxmlformats.org/officeDocument/2006/relationships" xmlns:p="http://schemas.openxmlformats.org/presentationml/2006/main">
   <p:cSld>
     <p:spTree>
@@ -16092,7 +17868,7 @@
 </p:sld>
 </file>
 
-<file path=ppt/slides/slide21.xml><?xml version="1.0" encoding="utf-8"?>
+<file path=ppt/slides/slide24.xml><?xml version="1.0" encoding="utf-8"?>
 <p:sld xmlns:a="http://schemas.openxmlformats.org/drawingml/2006/main" xmlns:r="http://schemas.openxmlformats.org/officeDocument/2006/relationships" xmlns:p="http://schemas.openxmlformats.org/presentationml/2006/main">
   <p:cSld>
     <p:spTree>
@@ -16276,7 +18052,7 @@
 </p:sld>
 </file>
 
-<file path=ppt/slides/slide22.xml><?xml version="1.0" encoding="utf-8"?>
+<file path=ppt/slides/slide25.xml><?xml version="1.0" encoding="utf-8"?>
 <p:sld xmlns:a="http://schemas.openxmlformats.org/drawingml/2006/main" xmlns:r="http://schemas.openxmlformats.org/officeDocument/2006/relationships" xmlns:p="http://schemas.openxmlformats.org/presentationml/2006/main">
   <p:cSld>
     <p:spTree>
@@ -16667,7 +18443,74 @@
 </p:sld>
 </file>
 
-<file path=ppt/slides/slide23.xml><?xml version="1.0" encoding="utf-8"?>
+<file path=ppt/slides/slide26.xml><?xml version="1.0" encoding="utf-8"?>
+<p:sld xmlns:a="http://schemas.openxmlformats.org/drawingml/2006/main" xmlns:r="http://schemas.openxmlformats.org/officeDocument/2006/relationships" xmlns:p="http://schemas.openxmlformats.org/presentationml/2006/main">
+  <p:cSld>
+    <p:spTree>
+      <p:nvGrpSpPr>
+        <p:cNvPr id="1" name="">
+          <a:extLst>
+            <a:ext uri="{FF2B5EF4-FFF2-40B4-BE49-F238E27FC236}">
+              <a16:creationId xmlns:a16="http://schemas.microsoft.com/office/drawing/2014/main" id="{DA467293-AB25-066C-9E42-DFE0D09C3608}"/>
+            </a:ext>
+          </a:extLst>
+        </p:cNvPr>
+        <p:cNvGrpSpPr/>
+        <p:nvPr/>
+      </p:nvGrpSpPr>
+      <p:grpSpPr>
+        <a:xfrm>
+          <a:off x="0" y="0"/>
+          <a:ext cx="0" cy="0"/>
+          <a:chOff x="0" y="0"/>
+          <a:chExt cx="0" cy="0"/>
+        </a:xfrm>
+      </p:grpSpPr>
+      <p:sp>
+        <p:nvSpPr>
+          <p:cNvPr id="3" name="Text Placeholder 2">
+            <a:extLst>
+              <a:ext uri="{FF2B5EF4-FFF2-40B4-BE49-F238E27FC236}">
+                <a16:creationId xmlns:a16="http://schemas.microsoft.com/office/drawing/2014/main" id="{6FB90382-A00D-9924-95B5-759B18B833BA}"/>
+              </a:ext>
+            </a:extLst>
+          </p:cNvPr>
+          <p:cNvSpPr>
+            <a:spLocks noGrp="1"/>
+          </p:cNvSpPr>
+          <p:nvPr>
+            <p:ph type="body" idx="1"/>
+          </p:nvPr>
+        </p:nvSpPr>
+        <p:spPr/>
+        <p:txBody>
+          <a:bodyPr>
+            <a:normAutofit/>
+          </a:bodyPr>
+          <a:lstStyle/>
+          <a:p>
+            <a:pPr algn="ctr"/>
+            <a:r>
+              <a:rPr lang="en-US" sz="3200" dirty="0"/>
+              <a:t>Two Sample Bootstrap Algorithm</a:t>
+            </a:r>
+          </a:p>
+        </p:txBody>
+      </p:sp>
+    </p:spTree>
+    <p:extLst>
+      <p:ext uri="{BB962C8B-B14F-4D97-AF65-F5344CB8AC3E}">
+        <p14:creationId xmlns:p14="http://schemas.microsoft.com/office/powerpoint/2010/main" val="492395003"/>
+      </p:ext>
+    </p:extLst>
+  </p:cSld>
+  <p:clrMapOvr>
+    <a:masterClrMapping/>
+  </p:clrMapOvr>
+</p:sld>
+</file>
+
+<file path=ppt/slides/slide27.xml><?xml version="1.0" encoding="utf-8"?>
 <p:sld xmlns:a="http://schemas.openxmlformats.org/drawingml/2006/main" xmlns:r="http://schemas.openxmlformats.org/officeDocument/2006/relationships" xmlns:p="http://schemas.openxmlformats.org/presentationml/2006/main">
   <p:cSld>
     <p:spTree>
@@ -17215,7 +19058,7 @@
 </p:sld>
 </file>
 
-<file path=ppt/slides/slide24.xml><?xml version="1.0" encoding="utf-8"?>
+<file path=ppt/slides/slide28.xml><?xml version="1.0" encoding="utf-8"?>
 <p:sld xmlns:a="http://schemas.openxmlformats.org/drawingml/2006/main" xmlns:r="http://schemas.openxmlformats.org/officeDocument/2006/relationships" xmlns:p="http://schemas.openxmlformats.org/presentationml/2006/main">
   <p:cSld>
     <p:spTree>
@@ -17665,7 +19508,7 @@
 </p:sld>
 </file>
 
-<file path=ppt/slides/slide25.xml><?xml version="1.0" encoding="utf-8"?>
+<file path=ppt/slides/slide29.xml><?xml version="1.0" encoding="utf-8"?>
 <p:sld xmlns:a="http://schemas.openxmlformats.org/drawingml/2006/main" xmlns:r="http://schemas.openxmlformats.org/officeDocument/2006/relationships" xmlns:p="http://schemas.openxmlformats.org/presentationml/2006/main">
   <p:cSld>
     <p:spTree>
@@ -17808,7 +19651,712 @@
 </p:sld>
 </file>
 
-<file path=ppt/slides/slide26.xml><?xml version="1.0" encoding="utf-8"?>
+<file path=ppt/slides/slide3.xml><?xml version="1.0" encoding="utf-8"?>
+<p:sld xmlns:a="http://schemas.openxmlformats.org/drawingml/2006/main" xmlns:r="http://schemas.openxmlformats.org/officeDocument/2006/relationships" xmlns:p="http://schemas.openxmlformats.org/presentationml/2006/main">
+  <p:cSld>
+    <p:spTree>
+      <p:nvGrpSpPr>
+        <p:cNvPr id="1" name=""/>
+        <p:cNvGrpSpPr/>
+        <p:nvPr/>
+      </p:nvGrpSpPr>
+      <p:grpSpPr>
+        <a:xfrm>
+          <a:off x="0" y="0"/>
+          <a:ext cx="0" cy="0"/>
+          <a:chOff x="0" y="0"/>
+          <a:chExt cx="0" cy="0"/>
+        </a:xfrm>
+      </p:grpSpPr>
+      <p:sp>
+        <p:nvSpPr>
+          <p:cNvPr id="2" name="Title 1"/>
+          <p:cNvSpPr>
+            <a:spLocks noGrp="1"/>
+          </p:cNvSpPr>
+          <p:nvPr>
+            <p:ph type="title"/>
+          </p:nvPr>
+        </p:nvSpPr>
+        <p:spPr/>
+        <p:txBody>
+          <a:bodyPr/>
+          <a:lstStyle/>
+          <a:p>
+            <a:pPr marL="0" lvl="0" indent="0">
+              <a:buNone/>
+            </a:pPr>
+            <a:r>
+              <a:t>Types of Resampling Methods</a:t>
+            </a:r>
+          </a:p>
+        </p:txBody>
+      </p:sp>
+      <p:sp>
+        <p:nvSpPr>
+          <p:cNvPr id="3" name="Content Placeholder 2"/>
+          <p:cNvSpPr>
+            <a:spLocks noGrp="1"/>
+          </p:cNvSpPr>
+          <p:nvPr>
+            <p:ph idx="1"/>
+          </p:nvPr>
+        </p:nvSpPr>
+        <p:spPr>
+          <a:xfrm>
+            <a:off x="457200" y="1139371"/>
+            <a:ext cx="8229600" cy="3715658"/>
+          </a:xfrm>
+        </p:spPr>
+        <p:txBody>
+          <a:bodyPr>
+            <a:normAutofit fontScale="70000" lnSpcReduction="20000"/>
+          </a:bodyPr>
+          <a:lstStyle/>
+          <a:p>
+            <a:pPr marL="0" lvl="0" indent="0">
+              <a:buNone/>
+            </a:pPr>
+            <a:r>
+              <a:rPr dirty="0"/>
+              <a:t>Commonly used re-sampling methods include:</a:t>
+            </a:r>
+          </a:p>
+          <a:p>
+            <a:pPr lvl="0"/>
+            <a:r>
+              <a:rPr b="1" dirty="0"/>
+              <a:t>Randomization or Permutation methods:</a:t>
+            </a:r>
+            <a:r>
+              <a:rPr dirty="0"/>
+              <a:t> aka exact tests</a:t>
+            </a:r>
+          </a:p>
+          <a:p>
+            <a:pPr lvl="1"/>
+            <a:r>
+              <a:rPr dirty="0"/>
+              <a:t>Have a long history; e.g. Fisher’s exact test (1922)</a:t>
+            </a:r>
+          </a:p>
+          <a:p>
+            <a:pPr lvl="1"/>
+            <a:r>
+              <a:rPr dirty="0"/>
+              <a:t>Practical approximate algorithms for </a:t>
+            </a:r>
+            <a:r>
+              <a:rPr lang="en-US" dirty="0"/>
+              <a:t>medium-sized</a:t>
+            </a:r>
+            <a:r>
+              <a:rPr dirty="0"/>
+              <a:t> data sets in computer era</a:t>
+            </a:r>
+          </a:p>
+          <a:p>
+            <a:pPr lvl="0"/>
+            <a:r>
+              <a:rPr b="1" dirty="0"/>
+              <a:t>Cross validation:</a:t>
+            </a:r>
+            <a:r>
+              <a:rPr dirty="0"/>
+              <a:t> resample into multiple folds without replacement</a:t>
+            </a:r>
+          </a:p>
+          <a:p>
+            <a:pPr lvl="1"/>
+            <a:r>
+              <a:rPr dirty="0"/>
+              <a:t>Leave n out method</a:t>
+            </a:r>
+          </a:p>
+          <a:p>
+            <a:pPr lvl="1"/>
+            <a:r>
+              <a:rPr dirty="0"/>
+              <a:t>Has origins in the 1950s</a:t>
+            </a:r>
+          </a:p>
+          <a:p>
+            <a:pPr lvl="1"/>
+            <a:r>
+              <a:rPr dirty="0"/>
+              <a:t>Widely used to evaluate machine learning (ML) models</a:t>
+            </a:r>
+          </a:p>
+          <a:p>
+            <a:pPr lvl="0"/>
+            <a:r>
+              <a:rPr b="1" dirty="0"/>
+              <a:t>Jackknife:</a:t>
+            </a:r>
+            <a:r>
+              <a:rPr dirty="0"/>
+              <a:t> leave one out re-sampling</a:t>
+            </a:r>
+          </a:p>
+          <a:p>
+            <a:pPr lvl="1"/>
+            <a:r>
+              <a:rPr dirty="0"/>
+              <a:t>Leave one out method</a:t>
+            </a:r>
+          </a:p>
+          <a:p>
+            <a:pPr lvl="1"/>
+            <a:r>
+              <a:rPr dirty="0"/>
+              <a:t>Early general purpose resampling method</a:t>
+            </a:r>
+          </a:p>
+          <a:p>
+            <a:pPr lvl="1"/>
+            <a:r>
+              <a:rPr lang="en-US" dirty="0"/>
+              <a:t>Proposed by John Tukey</a:t>
+            </a:r>
+            <a:r>
+              <a:rPr dirty="0"/>
+              <a:t> in the 1950s</a:t>
+            </a:r>
+          </a:p>
+          <a:p>
+            <a:pPr lvl="0"/>
+            <a:r>
+              <a:rPr b="1" dirty="0"/>
+              <a:t>Nonparametric Bootstrap:</a:t>
+            </a:r>
+            <a:r>
+              <a:rPr dirty="0"/>
+              <a:t> resample with equivalent size and replacement - our focus here</a:t>
+            </a:r>
+          </a:p>
+          <a:p>
+            <a:pPr lvl="1"/>
+            <a:r>
+              <a:rPr dirty="0"/>
+              <a:t>Published by Prof Brad Efron in 1979</a:t>
+            </a:r>
+          </a:p>
+        </p:txBody>
+      </p:sp>
+    </p:spTree>
+  </p:cSld>
+  <p:clrMapOvr>
+    <a:masterClrMapping/>
+  </p:clrMapOvr>
+  <p:timing>
+    <p:tnLst>
+      <p:par>
+        <p:cTn id="1" dur="indefinite" restart="never" nodeType="tmRoot">
+          <p:childTnLst>
+            <p:seq concurrent="1" nextAc="seek">
+              <p:cTn id="2" dur="indefinite" nodeType="mainSeq">
+                <p:childTnLst>
+                  <p:par>
+                    <p:cTn id="3" fill="hold">
+                      <p:stCondLst>
+                        <p:cond delay="indefinite"/>
+                      </p:stCondLst>
+                      <p:childTnLst>
+                        <p:par>
+                          <p:cTn id="4" fill="hold">
+                            <p:stCondLst>
+                              <p:cond delay="0"/>
+                            </p:stCondLst>
+                            <p:childTnLst>
+                              <p:par>
+                                <p:cTn id="5" presetID="1" presetClass="entr" presetSubtype="0" fill="hold" nodeType="clickEffect">
+                                  <p:stCondLst>
+                                    <p:cond delay="0"/>
+                                  </p:stCondLst>
+                                  <p:childTnLst>
+                                    <p:set>
+                                      <p:cBhvr>
+                                        <p:cTn id="6" dur="1" fill="hold">
+                                          <p:stCondLst>
+                                            <p:cond delay="0"/>
+                                          </p:stCondLst>
+                                        </p:cTn>
+                                        <p:tgtEl>
+                                          <p:spTgt spid="3">
+                                            <p:txEl>
+                                              <p:pRg st="1" end="1"/>
+                                            </p:txEl>
+                                          </p:spTgt>
+                                        </p:tgtEl>
+                                        <p:attrNameLst>
+                                          <p:attrName>style.visibility</p:attrName>
+                                        </p:attrNameLst>
+                                      </p:cBhvr>
+                                      <p:to>
+                                        <p:strVal val="visible"/>
+                                      </p:to>
+                                    </p:set>
+                                  </p:childTnLst>
+                                </p:cTn>
+                              </p:par>
+                              <p:par>
+                                <p:cTn id="7" presetID="1" presetClass="entr" presetSubtype="0" fill="hold" nodeType="withEffect">
+                                  <p:stCondLst>
+                                    <p:cond delay="0"/>
+                                  </p:stCondLst>
+                                  <p:childTnLst>
+                                    <p:set>
+                                      <p:cBhvr>
+                                        <p:cTn id="8" dur="1" fill="hold">
+                                          <p:stCondLst>
+                                            <p:cond delay="0"/>
+                                          </p:stCondLst>
+                                        </p:cTn>
+                                        <p:tgtEl>
+                                          <p:spTgt spid="3">
+                                            <p:txEl>
+                                              <p:pRg st="2" end="2"/>
+                                            </p:txEl>
+                                          </p:spTgt>
+                                        </p:tgtEl>
+                                        <p:attrNameLst>
+                                          <p:attrName>style.visibility</p:attrName>
+                                        </p:attrNameLst>
+                                      </p:cBhvr>
+                                      <p:to>
+                                        <p:strVal val="visible"/>
+                                      </p:to>
+                                    </p:set>
+                                  </p:childTnLst>
+                                </p:cTn>
+                              </p:par>
+                              <p:par>
+                                <p:cTn id="9" presetID="1" presetClass="entr" presetSubtype="0" fill="hold" nodeType="withEffect">
+                                  <p:stCondLst>
+                                    <p:cond delay="0"/>
+                                  </p:stCondLst>
+                                  <p:childTnLst>
+                                    <p:set>
+                                      <p:cBhvr>
+                                        <p:cTn id="10" dur="1" fill="hold">
+                                          <p:stCondLst>
+                                            <p:cond delay="0"/>
+                                          </p:stCondLst>
+                                        </p:cTn>
+                                        <p:tgtEl>
+                                          <p:spTgt spid="3">
+                                            <p:txEl>
+                                              <p:pRg st="3" end="3"/>
+                                            </p:txEl>
+                                          </p:spTgt>
+                                        </p:tgtEl>
+                                        <p:attrNameLst>
+                                          <p:attrName>style.visibility</p:attrName>
+                                        </p:attrNameLst>
+                                      </p:cBhvr>
+                                      <p:to>
+                                        <p:strVal val="visible"/>
+                                      </p:to>
+                                    </p:set>
+                                  </p:childTnLst>
+                                </p:cTn>
+                              </p:par>
+                            </p:childTnLst>
+                          </p:cTn>
+                        </p:par>
+                      </p:childTnLst>
+                    </p:cTn>
+                  </p:par>
+                  <p:par>
+                    <p:cTn id="11" fill="hold">
+                      <p:stCondLst>
+                        <p:cond delay="indefinite"/>
+                      </p:stCondLst>
+                      <p:childTnLst>
+                        <p:par>
+                          <p:cTn id="12" fill="hold">
+                            <p:stCondLst>
+                              <p:cond delay="0"/>
+                            </p:stCondLst>
+                            <p:childTnLst>
+                              <p:par>
+                                <p:cTn id="13" presetID="1" presetClass="entr" presetSubtype="0" fill="hold" nodeType="clickEffect">
+                                  <p:stCondLst>
+                                    <p:cond delay="0"/>
+                                  </p:stCondLst>
+                                  <p:childTnLst>
+                                    <p:set>
+                                      <p:cBhvr>
+                                        <p:cTn id="14" dur="1" fill="hold">
+                                          <p:stCondLst>
+                                            <p:cond delay="0"/>
+                                          </p:stCondLst>
+                                        </p:cTn>
+                                        <p:tgtEl>
+                                          <p:spTgt spid="3">
+                                            <p:txEl>
+                                              <p:pRg st="4" end="4"/>
+                                            </p:txEl>
+                                          </p:spTgt>
+                                        </p:tgtEl>
+                                        <p:attrNameLst>
+                                          <p:attrName>style.visibility</p:attrName>
+                                        </p:attrNameLst>
+                                      </p:cBhvr>
+                                      <p:to>
+                                        <p:strVal val="visible"/>
+                                      </p:to>
+                                    </p:set>
+                                  </p:childTnLst>
+                                </p:cTn>
+                              </p:par>
+                              <p:par>
+                                <p:cTn id="15" presetID="1" presetClass="entr" presetSubtype="0" fill="hold" nodeType="withEffect">
+                                  <p:stCondLst>
+                                    <p:cond delay="0"/>
+                                  </p:stCondLst>
+                                  <p:childTnLst>
+                                    <p:set>
+                                      <p:cBhvr>
+                                        <p:cTn id="16" dur="1" fill="hold">
+                                          <p:stCondLst>
+                                            <p:cond delay="0"/>
+                                          </p:stCondLst>
+                                        </p:cTn>
+                                        <p:tgtEl>
+                                          <p:spTgt spid="3">
+                                            <p:txEl>
+                                              <p:pRg st="5" end="5"/>
+                                            </p:txEl>
+                                          </p:spTgt>
+                                        </p:tgtEl>
+                                        <p:attrNameLst>
+                                          <p:attrName>style.visibility</p:attrName>
+                                        </p:attrNameLst>
+                                      </p:cBhvr>
+                                      <p:to>
+                                        <p:strVal val="visible"/>
+                                      </p:to>
+                                    </p:set>
+                                  </p:childTnLst>
+                                </p:cTn>
+                              </p:par>
+                              <p:par>
+                                <p:cTn id="17" presetID="1" presetClass="entr" presetSubtype="0" fill="hold" nodeType="withEffect">
+                                  <p:stCondLst>
+                                    <p:cond delay="0"/>
+                                  </p:stCondLst>
+                                  <p:childTnLst>
+                                    <p:set>
+                                      <p:cBhvr>
+                                        <p:cTn id="18" dur="1" fill="hold">
+                                          <p:stCondLst>
+                                            <p:cond delay="0"/>
+                                          </p:stCondLst>
+                                        </p:cTn>
+                                        <p:tgtEl>
+                                          <p:spTgt spid="3">
+                                            <p:txEl>
+                                              <p:pRg st="6" end="6"/>
+                                            </p:txEl>
+                                          </p:spTgt>
+                                        </p:tgtEl>
+                                        <p:attrNameLst>
+                                          <p:attrName>style.visibility</p:attrName>
+                                        </p:attrNameLst>
+                                      </p:cBhvr>
+                                      <p:to>
+                                        <p:strVal val="visible"/>
+                                      </p:to>
+                                    </p:set>
+                                  </p:childTnLst>
+                                </p:cTn>
+                              </p:par>
+                              <p:par>
+                                <p:cTn id="19" presetID="1" presetClass="entr" presetSubtype="0" fill="hold" nodeType="withEffect">
+                                  <p:stCondLst>
+                                    <p:cond delay="0"/>
+                                  </p:stCondLst>
+                                  <p:childTnLst>
+                                    <p:set>
+                                      <p:cBhvr>
+                                        <p:cTn id="20" dur="1" fill="hold">
+                                          <p:stCondLst>
+                                            <p:cond delay="0"/>
+                                          </p:stCondLst>
+                                        </p:cTn>
+                                        <p:tgtEl>
+                                          <p:spTgt spid="3">
+                                            <p:txEl>
+                                              <p:pRg st="7" end="7"/>
+                                            </p:txEl>
+                                          </p:spTgt>
+                                        </p:tgtEl>
+                                        <p:attrNameLst>
+                                          <p:attrName>style.visibility</p:attrName>
+                                        </p:attrNameLst>
+                                      </p:cBhvr>
+                                      <p:to>
+                                        <p:strVal val="visible"/>
+                                      </p:to>
+                                    </p:set>
+                                  </p:childTnLst>
+                                </p:cTn>
+                              </p:par>
+                            </p:childTnLst>
+                          </p:cTn>
+                        </p:par>
+                      </p:childTnLst>
+                    </p:cTn>
+                  </p:par>
+                  <p:par>
+                    <p:cTn id="21" fill="hold">
+                      <p:stCondLst>
+                        <p:cond delay="indefinite"/>
+                      </p:stCondLst>
+                      <p:childTnLst>
+                        <p:par>
+                          <p:cTn id="22" fill="hold">
+                            <p:stCondLst>
+                              <p:cond delay="0"/>
+                            </p:stCondLst>
+                            <p:childTnLst>
+                              <p:par>
+                                <p:cTn id="23" presetID="1" presetClass="entr" presetSubtype="0" fill="hold" nodeType="clickEffect">
+                                  <p:stCondLst>
+                                    <p:cond delay="0"/>
+                                  </p:stCondLst>
+                                  <p:childTnLst>
+                                    <p:set>
+                                      <p:cBhvr>
+                                        <p:cTn id="24" dur="1" fill="hold">
+                                          <p:stCondLst>
+                                            <p:cond delay="0"/>
+                                          </p:stCondLst>
+                                        </p:cTn>
+                                        <p:tgtEl>
+                                          <p:spTgt spid="3">
+                                            <p:txEl>
+                                              <p:pRg st="8" end="8"/>
+                                            </p:txEl>
+                                          </p:spTgt>
+                                        </p:tgtEl>
+                                        <p:attrNameLst>
+                                          <p:attrName>style.visibility</p:attrName>
+                                        </p:attrNameLst>
+                                      </p:cBhvr>
+                                      <p:to>
+                                        <p:strVal val="visible"/>
+                                      </p:to>
+                                    </p:set>
+                                  </p:childTnLst>
+                                </p:cTn>
+                              </p:par>
+                              <p:par>
+                                <p:cTn id="25" presetID="1" presetClass="entr" presetSubtype="0" fill="hold" nodeType="withEffect">
+                                  <p:stCondLst>
+                                    <p:cond delay="0"/>
+                                  </p:stCondLst>
+                                  <p:childTnLst>
+                                    <p:set>
+                                      <p:cBhvr>
+                                        <p:cTn id="26" dur="1" fill="hold">
+                                          <p:stCondLst>
+                                            <p:cond delay="0"/>
+                                          </p:stCondLst>
+                                        </p:cTn>
+                                        <p:tgtEl>
+                                          <p:spTgt spid="3">
+                                            <p:txEl>
+                                              <p:pRg st="9" end="9"/>
+                                            </p:txEl>
+                                          </p:spTgt>
+                                        </p:tgtEl>
+                                        <p:attrNameLst>
+                                          <p:attrName>style.visibility</p:attrName>
+                                        </p:attrNameLst>
+                                      </p:cBhvr>
+                                      <p:to>
+                                        <p:strVal val="visible"/>
+                                      </p:to>
+                                    </p:set>
+                                  </p:childTnLst>
+                                </p:cTn>
+                              </p:par>
+                              <p:par>
+                                <p:cTn id="27" presetID="1" presetClass="entr" presetSubtype="0" fill="hold" nodeType="withEffect">
+                                  <p:stCondLst>
+                                    <p:cond delay="0"/>
+                                  </p:stCondLst>
+                                  <p:childTnLst>
+                                    <p:set>
+                                      <p:cBhvr>
+                                        <p:cTn id="28" dur="1" fill="hold">
+                                          <p:stCondLst>
+                                            <p:cond delay="0"/>
+                                          </p:stCondLst>
+                                        </p:cTn>
+                                        <p:tgtEl>
+                                          <p:spTgt spid="3">
+                                            <p:txEl>
+                                              <p:pRg st="10" end="10"/>
+                                            </p:txEl>
+                                          </p:spTgt>
+                                        </p:tgtEl>
+                                        <p:attrNameLst>
+                                          <p:attrName>style.visibility</p:attrName>
+                                        </p:attrNameLst>
+                                      </p:cBhvr>
+                                      <p:to>
+                                        <p:strVal val="visible"/>
+                                      </p:to>
+                                    </p:set>
+                                  </p:childTnLst>
+                                </p:cTn>
+                              </p:par>
+                              <p:par>
+                                <p:cTn id="29" presetID="1" presetClass="entr" presetSubtype="0" fill="hold" nodeType="withEffect">
+                                  <p:stCondLst>
+                                    <p:cond delay="0"/>
+                                  </p:stCondLst>
+                                  <p:childTnLst>
+                                    <p:set>
+                                      <p:cBhvr>
+                                        <p:cTn id="30" dur="1" fill="hold">
+                                          <p:stCondLst>
+                                            <p:cond delay="0"/>
+                                          </p:stCondLst>
+                                        </p:cTn>
+                                        <p:tgtEl>
+                                          <p:spTgt spid="3">
+                                            <p:txEl>
+                                              <p:pRg st="11" end="11"/>
+                                            </p:txEl>
+                                          </p:spTgt>
+                                        </p:tgtEl>
+                                        <p:attrNameLst>
+                                          <p:attrName>style.visibility</p:attrName>
+                                        </p:attrNameLst>
+                                      </p:cBhvr>
+                                      <p:to>
+                                        <p:strVal val="visible"/>
+                                      </p:to>
+                                    </p:set>
+                                  </p:childTnLst>
+                                </p:cTn>
+                              </p:par>
+                            </p:childTnLst>
+                          </p:cTn>
+                        </p:par>
+                      </p:childTnLst>
+                    </p:cTn>
+                  </p:par>
+                  <p:par>
+                    <p:cTn id="31" fill="hold">
+                      <p:stCondLst>
+                        <p:cond delay="indefinite"/>
+                      </p:stCondLst>
+                      <p:childTnLst>
+                        <p:par>
+                          <p:cTn id="32" fill="hold">
+                            <p:stCondLst>
+                              <p:cond delay="0"/>
+                            </p:stCondLst>
+                            <p:childTnLst>
+                              <p:par>
+                                <p:cTn id="33" presetID="1" presetClass="entr" presetSubtype="0" fill="hold" nodeType="clickEffect">
+                                  <p:stCondLst>
+                                    <p:cond delay="0"/>
+                                  </p:stCondLst>
+                                  <p:childTnLst>
+                                    <p:set>
+                                      <p:cBhvr>
+                                        <p:cTn id="34" dur="1" fill="hold">
+                                          <p:stCondLst>
+                                            <p:cond delay="0"/>
+                                          </p:stCondLst>
+                                        </p:cTn>
+                                        <p:tgtEl>
+                                          <p:spTgt spid="3">
+                                            <p:txEl>
+                                              <p:pRg st="12" end="12"/>
+                                            </p:txEl>
+                                          </p:spTgt>
+                                        </p:tgtEl>
+                                        <p:attrNameLst>
+                                          <p:attrName>style.visibility</p:attrName>
+                                        </p:attrNameLst>
+                                      </p:cBhvr>
+                                      <p:to>
+                                        <p:strVal val="visible"/>
+                                      </p:to>
+                                    </p:set>
+                                  </p:childTnLst>
+                                </p:cTn>
+                              </p:par>
+                              <p:par>
+                                <p:cTn id="35" presetID="1" presetClass="entr" presetSubtype="0" fill="hold" nodeType="withEffect">
+                                  <p:stCondLst>
+                                    <p:cond delay="0"/>
+                                  </p:stCondLst>
+                                  <p:childTnLst>
+                                    <p:set>
+                                      <p:cBhvr>
+                                        <p:cTn id="36" dur="1" fill="hold">
+                                          <p:stCondLst>
+                                            <p:cond delay="0"/>
+                                          </p:stCondLst>
+                                        </p:cTn>
+                                        <p:tgtEl>
+                                          <p:spTgt spid="3">
+                                            <p:txEl>
+                                              <p:pRg st="13" end="13"/>
+                                            </p:txEl>
+                                          </p:spTgt>
+                                        </p:tgtEl>
+                                        <p:attrNameLst>
+                                          <p:attrName>style.visibility</p:attrName>
+                                        </p:attrNameLst>
+                                      </p:cBhvr>
+                                      <p:to>
+                                        <p:strVal val="visible"/>
+                                      </p:to>
+                                    </p:set>
+                                  </p:childTnLst>
+                                </p:cTn>
+                              </p:par>
+                            </p:childTnLst>
+                          </p:cTn>
+                        </p:par>
+                      </p:childTnLst>
+                    </p:cTn>
+                  </p:par>
+                </p:childTnLst>
+              </p:cTn>
+              <p:prevCondLst>
+                <p:cond evt="onPrev" delay="0">
+                  <p:tgtEl>
+                    <p:sldTgt/>
+                  </p:tgtEl>
+                </p:cond>
+              </p:prevCondLst>
+              <p:nextCondLst>
+                <p:cond evt="onNext" delay="0">
+                  <p:tgtEl>
+                    <p:sldTgt/>
+                  </p:tgtEl>
+                </p:cond>
+              </p:nextCondLst>
+            </p:seq>
+          </p:childTnLst>
+        </p:cTn>
+      </p:par>
+    </p:tnLst>
+  </p:timing>
+</p:sld>
+</file>
+
+<file path=ppt/slides/slide30.xml><?xml version="1.0" encoding="utf-8"?>
 <p:sld xmlns:a="http://schemas.openxmlformats.org/drawingml/2006/main" xmlns:r="http://schemas.openxmlformats.org/officeDocument/2006/relationships" xmlns:p="http://schemas.openxmlformats.org/presentationml/2006/main">
   <p:cSld>
     <p:spTree>
@@ -19250,7 +21798,7 @@
 </p:sld>
 </file>
 
-<file path=ppt/slides/slide27.xml><?xml version="1.0" encoding="utf-8"?>
+<file path=ppt/slides/slide31.xml><?xml version="1.0" encoding="utf-8"?>
 <p:sld xmlns:a="http://schemas.openxmlformats.org/drawingml/2006/main" xmlns:r="http://schemas.openxmlformats.org/officeDocument/2006/relationships" xmlns:p="http://schemas.openxmlformats.org/presentationml/2006/main">
   <p:cSld>
     <p:spTree>
@@ -19663,7 +22211,7 @@
 </p:sld>
 </file>
 
-<file path=ppt/slides/slide28.xml><?xml version="1.0" encoding="utf-8"?>
+<file path=ppt/slides/slide32.xml><?xml version="1.0" encoding="utf-8"?>
 <p:sld xmlns:a="http://schemas.openxmlformats.org/drawingml/2006/main" xmlns:r="http://schemas.openxmlformats.org/officeDocument/2006/relationships" xmlns:p="http://schemas.openxmlformats.org/presentationml/2006/main">
   <p:cSld>
     <p:spTree>
@@ -20127,7 +22675,7 @@
 </p:sld>
 </file>
 
-<file path=ppt/slides/slide29.xml><?xml version="1.0" encoding="utf-8"?>
+<file path=ppt/slides/slide33.xml><?xml version="1.0" encoding="utf-8"?>
 <p:sld xmlns:a="http://schemas.openxmlformats.org/drawingml/2006/main" xmlns:r="http://schemas.openxmlformats.org/officeDocument/2006/relationships" xmlns:p="http://schemas.openxmlformats.org/presentationml/2006/main">
   <p:cSld>
     <p:spTree>
@@ -20642,7 +23190,74 @@
 </p:sld>
 </file>
 
-<file path=ppt/slides/slide3.xml><?xml version="1.0" encoding="utf-8"?>
+<file path=ppt/slides/slide34.xml><?xml version="1.0" encoding="utf-8"?>
+<p:sld xmlns:a="http://schemas.openxmlformats.org/drawingml/2006/main" xmlns:r="http://schemas.openxmlformats.org/officeDocument/2006/relationships" xmlns:p="http://schemas.openxmlformats.org/presentationml/2006/main">
+  <p:cSld>
+    <p:spTree>
+      <p:nvGrpSpPr>
+        <p:cNvPr id="1" name="">
+          <a:extLst>
+            <a:ext uri="{FF2B5EF4-FFF2-40B4-BE49-F238E27FC236}">
+              <a16:creationId xmlns:a16="http://schemas.microsoft.com/office/drawing/2014/main" id="{E1D9B1C8-7AD7-7653-0F81-EF7217391021}"/>
+            </a:ext>
+          </a:extLst>
+        </p:cNvPr>
+        <p:cNvGrpSpPr/>
+        <p:nvPr/>
+      </p:nvGrpSpPr>
+      <p:grpSpPr>
+        <a:xfrm>
+          <a:off x="0" y="0"/>
+          <a:ext cx="0" cy="0"/>
+          <a:chOff x="0" y="0"/>
+          <a:chExt cx="0" cy="0"/>
+        </a:xfrm>
+      </p:grpSpPr>
+      <p:sp>
+        <p:nvSpPr>
+          <p:cNvPr id="3" name="Text Placeholder 2">
+            <a:extLst>
+              <a:ext uri="{FF2B5EF4-FFF2-40B4-BE49-F238E27FC236}">
+                <a16:creationId xmlns:a16="http://schemas.microsoft.com/office/drawing/2014/main" id="{AFE711FB-672F-9E1F-D2C8-7203219F8A73}"/>
+              </a:ext>
+            </a:extLst>
+          </p:cNvPr>
+          <p:cNvSpPr>
+            <a:spLocks noGrp="1"/>
+          </p:cNvSpPr>
+          <p:nvPr>
+            <p:ph type="body" idx="1"/>
+          </p:nvPr>
+        </p:nvSpPr>
+        <p:spPr/>
+        <p:txBody>
+          <a:bodyPr>
+            <a:normAutofit/>
+          </a:bodyPr>
+          <a:lstStyle/>
+          <a:p>
+            <a:pPr algn="ctr"/>
+            <a:r>
+              <a:rPr lang="en-US" sz="3200" dirty="0"/>
+              <a:t>Summary</a:t>
+            </a:r>
+          </a:p>
+        </p:txBody>
+      </p:sp>
+    </p:spTree>
+    <p:extLst>
+      <p:ext uri="{BB962C8B-B14F-4D97-AF65-F5344CB8AC3E}">
+        <p14:creationId xmlns:p14="http://schemas.microsoft.com/office/powerpoint/2010/main" val="2281679559"/>
+      </p:ext>
+    </p:extLst>
+  </p:cSld>
+  <p:clrMapOvr>
+    <a:masterClrMapping/>
+  </p:clrMapOvr>
+</p:sld>
+</file>
+
+<file path=ppt/slides/slide35.xml><?xml version="1.0" encoding="utf-8"?>
 <p:sld xmlns:a="http://schemas.openxmlformats.org/drawingml/2006/main" xmlns:r="http://schemas.openxmlformats.org/officeDocument/2006/relationships" xmlns:p="http://schemas.openxmlformats.org/presentationml/2006/main">
   <p:cSld>
     <p:spTree>
@@ -20678,7 +23293,7 @@
               <a:buNone/>
             </a:pPr>
             <a:r>
-              <a:t>Types of Resampling Methods</a:t>
+              <a:t>Summary</a:t>
             </a:r>
           </a:p>
         </p:txBody>
@@ -20695,13 +23310,13 @@
         </p:nvSpPr>
         <p:spPr>
           <a:xfrm>
-            <a:off x="457200" y="1139371"/>
-            <a:ext cx="8229600" cy="3715658"/>
+            <a:off x="457200" y="1063229"/>
+            <a:ext cx="8229600" cy="3643028"/>
           </a:xfrm>
         </p:spPr>
         <p:txBody>
           <a:bodyPr>
-            <a:normAutofit fontScale="70000" lnSpcReduction="20000"/>
+            <a:normAutofit fontScale="92500" lnSpcReduction="20000"/>
           </a:bodyPr>
           <a:lstStyle/>
           <a:p>
@@ -20710,122 +23325,81 @@
             </a:pPr>
             <a:r>
               <a:rPr dirty="0"/>
-              <a:t>Commonly used re-sampling methods include:</a:t>
+              <a:t>Bootstrap estimation is widely useful and requires minimal assumption</a:t>
             </a:r>
           </a:p>
           <a:p>
             <a:pPr lvl="0"/>
             <a:r>
+              <a:rPr dirty="0"/>
+              <a:t>Bootstrap distribution comprise</a:t>
+            </a:r>
+            <a:r>
+              <a:rPr lang="en-US" dirty="0"/>
+              <a:t>s</a:t>
+            </a:r>
+            <a:r>
+              <a:rPr dirty="0"/>
+              <a:t> values of </a:t>
+            </a:r>
+            <a:r>
+              <a:rPr lang="en-US" dirty="0"/>
+              <a:t>a</a:t>
+            </a:r>
+            <a:r>
+              <a:rPr dirty="0"/>
+              <a:t> statistic computed from bootstrap resamples of the original observations (data sample)</a:t>
+            </a:r>
+          </a:p>
+          <a:p>
+            <a:pPr lvl="0"/>
+            <a:r>
+              <a:rPr dirty="0"/>
+              <a:t>Computing bootstrap distribution requires </a:t>
+            </a:r>
+            <a:r>
               <a:rPr b="1" dirty="0"/>
-              <a:t>Randomization or Permutation methods:</a:t>
-            </a:r>
+              <a:t>no assumptions about population distribution!</a:t>
+            </a:r>
+          </a:p>
+          <a:p>
+            <a:pPr lvl="1"/>
             <a:r>
               <a:rPr dirty="0"/>
-              <a:t> aka exact tests</a:t>
+              <a:t>Bootstrap resampling substitutes computer power for paper and pencil statistician power</a:t>
+            </a:r>
+          </a:p>
+          <a:p>
+            <a:pPr lvl="0"/>
+            <a:r>
+              <a:rPr dirty="0"/>
+              <a:t>Bootstrap resampling estimates the </a:t>
+            </a:r>
+            <a:r>
+              <a:rPr b="1" dirty="0"/>
+              <a:t>bootstrap distribution</a:t>
+            </a:r>
+            <a:r>
+              <a:rPr dirty="0"/>
+              <a:t> of a statistic</a:t>
             </a:r>
           </a:p>
           <a:p>
             <a:pPr lvl="1"/>
             <a:r>
               <a:rPr dirty="0"/>
-              <a:t>Have a long history; e.g. Fisher’s exact test (1922)</a:t>
+              <a:t>Compute point estimate of the statistic, or bootstrap estimate</a:t>
             </a:r>
           </a:p>
           <a:p>
             <a:pPr lvl="1"/>
             <a:r>
+              <a:rPr lang="en-US" dirty="0"/>
+              <a:t>Compute </a:t>
+            </a:r>
+            <a:r>
               <a:rPr dirty="0"/>
-              <a:t>Practical approximate algorithms for </a:t>
-            </a:r>
-            <a:r>
-              <a:rPr lang="en-US" dirty="0"/>
-              <a:t>medium-sized</a:t>
-            </a:r>
-            <a:r>
-              <a:rPr dirty="0"/>
-              <a:t> data sets in computer era</a:t>
-            </a:r>
-          </a:p>
-          <a:p>
-            <a:pPr lvl="0"/>
-            <a:r>
-              <a:rPr b="1" dirty="0"/>
-              <a:t>Cross validation:</a:t>
-            </a:r>
-            <a:r>
-              <a:rPr dirty="0"/>
-              <a:t> resample into multiple folds without replacement</a:t>
-            </a:r>
-          </a:p>
-          <a:p>
-            <a:pPr lvl="1"/>
-            <a:r>
-              <a:rPr dirty="0"/>
-              <a:t>Leave n out method</a:t>
-            </a:r>
-          </a:p>
-          <a:p>
-            <a:pPr lvl="1"/>
-            <a:r>
-              <a:rPr dirty="0"/>
-              <a:t>Has origins in the 1950s</a:t>
-            </a:r>
-          </a:p>
-          <a:p>
-            <a:pPr lvl="1"/>
-            <a:r>
-              <a:rPr dirty="0"/>
-              <a:t>Widely used to evaluate machine learning (ML) models</a:t>
-            </a:r>
-          </a:p>
-          <a:p>
-            <a:pPr lvl="0"/>
-            <a:r>
-              <a:rPr b="1" dirty="0"/>
-              <a:t>Jackknife:</a:t>
-            </a:r>
-            <a:r>
-              <a:rPr dirty="0"/>
-              <a:t> leave one out re-sampling</a:t>
-            </a:r>
-          </a:p>
-          <a:p>
-            <a:pPr lvl="1"/>
-            <a:r>
-              <a:rPr dirty="0"/>
-              <a:t>Leave one out method</a:t>
-            </a:r>
-          </a:p>
-          <a:p>
-            <a:pPr lvl="1"/>
-            <a:r>
-              <a:rPr dirty="0"/>
-              <a:t>Early general purpose resampling method</a:t>
-            </a:r>
-          </a:p>
-          <a:p>
-            <a:pPr lvl="1"/>
-            <a:r>
-              <a:rPr dirty="0"/>
-              <a:t>Has origins in the 1950s</a:t>
-            </a:r>
-          </a:p>
-          <a:p>
-            <a:pPr lvl="0"/>
-            <a:r>
-              <a:rPr b="1" dirty="0"/>
-              <a:t>Nonparametric Bootstrap:</a:t>
-            </a:r>
-            <a:r>
-              <a:rPr dirty="0"/>
-              <a:t> resample with equivalent size and replacement - our focus here</a:t>
-            </a:r>
-          </a:p>
-          <a:p>
-            <a:pPr lvl="1"/>
-            <a:r>
-              <a:rPr dirty="0"/>
-              <a:t>Published by Prof Brad Efron in 1979</a:t>
+              <a:t>bootstrap confidence interval from the bootstrap distribution</a:t>
             </a:r>
           </a:p>
         </p:txBody>
@@ -20835,515 +23409,10 @@
   <p:clrMapOvr>
     <a:masterClrMapping/>
   </p:clrMapOvr>
-  <p:timing>
-    <p:tnLst>
-      <p:par>
-        <p:cTn id="1" dur="indefinite" restart="never" nodeType="tmRoot">
-          <p:childTnLst>
-            <p:seq concurrent="1" nextAc="seek">
-              <p:cTn id="2" dur="indefinite" nodeType="mainSeq">
-                <p:childTnLst>
-                  <p:par>
-                    <p:cTn id="3" fill="hold">
-                      <p:stCondLst>
-                        <p:cond delay="indefinite"/>
-                      </p:stCondLst>
-                      <p:childTnLst>
-                        <p:par>
-                          <p:cTn id="4" fill="hold">
-                            <p:stCondLst>
-                              <p:cond delay="0"/>
-                            </p:stCondLst>
-                            <p:childTnLst>
-                              <p:par>
-                                <p:cTn id="5" presetID="1" presetClass="entr" presetSubtype="0" fill="hold" nodeType="clickEffect">
-                                  <p:stCondLst>
-                                    <p:cond delay="0"/>
-                                  </p:stCondLst>
-                                  <p:childTnLst>
-                                    <p:set>
-                                      <p:cBhvr>
-                                        <p:cTn id="6" dur="1" fill="hold">
-                                          <p:stCondLst>
-                                            <p:cond delay="0"/>
-                                          </p:stCondLst>
-                                        </p:cTn>
-                                        <p:tgtEl>
-                                          <p:spTgt spid="3">
-                                            <p:txEl>
-                                              <p:pRg st="1" end="1"/>
-                                            </p:txEl>
-                                          </p:spTgt>
-                                        </p:tgtEl>
-                                        <p:attrNameLst>
-                                          <p:attrName>style.visibility</p:attrName>
-                                        </p:attrNameLst>
-                                      </p:cBhvr>
-                                      <p:to>
-                                        <p:strVal val="visible"/>
-                                      </p:to>
-                                    </p:set>
-                                  </p:childTnLst>
-                                </p:cTn>
-                              </p:par>
-                              <p:par>
-                                <p:cTn id="7" presetID="1" presetClass="entr" presetSubtype="0" fill="hold" nodeType="withEffect">
-                                  <p:stCondLst>
-                                    <p:cond delay="0"/>
-                                  </p:stCondLst>
-                                  <p:childTnLst>
-                                    <p:set>
-                                      <p:cBhvr>
-                                        <p:cTn id="8" dur="1" fill="hold">
-                                          <p:stCondLst>
-                                            <p:cond delay="0"/>
-                                          </p:stCondLst>
-                                        </p:cTn>
-                                        <p:tgtEl>
-                                          <p:spTgt spid="3">
-                                            <p:txEl>
-                                              <p:pRg st="2" end="2"/>
-                                            </p:txEl>
-                                          </p:spTgt>
-                                        </p:tgtEl>
-                                        <p:attrNameLst>
-                                          <p:attrName>style.visibility</p:attrName>
-                                        </p:attrNameLst>
-                                      </p:cBhvr>
-                                      <p:to>
-                                        <p:strVal val="visible"/>
-                                      </p:to>
-                                    </p:set>
-                                  </p:childTnLst>
-                                </p:cTn>
-                              </p:par>
-                              <p:par>
-                                <p:cTn id="9" presetID="1" presetClass="entr" presetSubtype="0" fill="hold" nodeType="withEffect">
-                                  <p:stCondLst>
-                                    <p:cond delay="0"/>
-                                  </p:stCondLst>
-                                  <p:childTnLst>
-                                    <p:set>
-                                      <p:cBhvr>
-                                        <p:cTn id="10" dur="1" fill="hold">
-                                          <p:stCondLst>
-                                            <p:cond delay="0"/>
-                                          </p:stCondLst>
-                                        </p:cTn>
-                                        <p:tgtEl>
-                                          <p:spTgt spid="3">
-                                            <p:txEl>
-                                              <p:pRg st="3" end="3"/>
-                                            </p:txEl>
-                                          </p:spTgt>
-                                        </p:tgtEl>
-                                        <p:attrNameLst>
-                                          <p:attrName>style.visibility</p:attrName>
-                                        </p:attrNameLst>
-                                      </p:cBhvr>
-                                      <p:to>
-                                        <p:strVal val="visible"/>
-                                      </p:to>
-                                    </p:set>
-                                  </p:childTnLst>
-                                </p:cTn>
-                              </p:par>
-                            </p:childTnLst>
-                          </p:cTn>
-                        </p:par>
-                      </p:childTnLst>
-                    </p:cTn>
-                  </p:par>
-                  <p:par>
-                    <p:cTn id="11" fill="hold">
-                      <p:stCondLst>
-                        <p:cond delay="indefinite"/>
-                      </p:stCondLst>
-                      <p:childTnLst>
-                        <p:par>
-                          <p:cTn id="12" fill="hold">
-                            <p:stCondLst>
-                              <p:cond delay="0"/>
-                            </p:stCondLst>
-                            <p:childTnLst>
-                              <p:par>
-                                <p:cTn id="13" presetID="1" presetClass="entr" presetSubtype="0" fill="hold" nodeType="clickEffect">
-                                  <p:stCondLst>
-                                    <p:cond delay="0"/>
-                                  </p:stCondLst>
-                                  <p:childTnLst>
-                                    <p:set>
-                                      <p:cBhvr>
-                                        <p:cTn id="14" dur="1" fill="hold">
-                                          <p:stCondLst>
-                                            <p:cond delay="0"/>
-                                          </p:stCondLst>
-                                        </p:cTn>
-                                        <p:tgtEl>
-                                          <p:spTgt spid="3">
-                                            <p:txEl>
-                                              <p:pRg st="4" end="4"/>
-                                            </p:txEl>
-                                          </p:spTgt>
-                                        </p:tgtEl>
-                                        <p:attrNameLst>
-                                          <p:attrName>style.visibility</p:attrName>
-                                        </p:attrNameLst>
-                                      </p:cBhvr>
-                                      <p:to>
-                                        <p:strVal val="visible"/>
-                                      </p:to>
-                                    </p:set>
-                                  </p:childTnLst>
-                                </p:cTn>
-                              </p:par>
-                              <p:par>
-                                <p:cTn id="15" presetID="1" presetClass="entr" presetSubtype="0" fill="hold" nodeType="withEffect">
-                                  <p:stCondLst>
-                                    <p:cond delay="0"/>
-                                  </p:stCondLst>
-                                  <p:childTnLst>
-                                    <p:set>
-                                      <p:cBhvr>
-                                        <p:cTn id="16" dur="1" fill="hold">
-                                          <p:stCondLst>
-                                            <p:cond delay="0"/>
-                                          </p:stCondLst>
-                                        </p:cTn>
-                                        <p:tgtEl>
-                                          <p:spTgt spid="3">
-                                            <p:txEl>
-                                              <p:pRg st="5" end="5"/>
-                                            </p:txEl>
-                                          </p:spTgt>
-                                        </p:tgtEl>
-                                        <p:attrNameLst>
-                                          <p:attrName>style.visibility</p:attrName>
-                                        </p:attrNameLst>
-                                      </p:cBhvr>
-                                      <p:to>
-                                        <p:strVal val="visible"/>
-                                      </p:to>
-                                    </p:set>
-                                  </p:childTnLst>
-                                </p:cTn>
-                              </p:par>
-                              <p:par>
-                                <p:cTn id="17" presetID="1" presetClass="entr" presetSubtype="0" fill="hold" nodeType="withEffect">
-                                  <p:stCondLst>
-                                    <p:cond delay="0"/>
-                                  </p:stCondLst>
-                                  <p:childTnLst>
-                                    <p:set>
-                                      <p:cBhvr>
-                                        <p:cTn id="18" dur="1" fill="hold">
-                                          <p:stCondLst>
-                                            <p:cond delay="0"/>
-                                          </p:stCondLst>
-                                        </p:cTn>
-                                        <p:tgtEl>
-                                          <p:spTgt spid="3">
-                                            <p:txEl>
-                                              <p:pRg st="6" end="6"/>
-                                            </p:txEl>
-                                          </p:spTgt>
-                                        </p:tgtEl>
-                                        <p:attrNameLst>
-                                          <p:attrName>style.visibility</p:attrName>
-                                        </p:attrNameLst>
-                                      </p:cBhvr>
-                                      <p:to>
-                                        <p:strVal val="visible"/>
-                                      </p:to>
-                                    </p:set>
-                                  </p:childTnLst>
-                                </p:cTn>
-                              </p:par>
-                              <p:par>
-                                <p:cTn id="19" presetID="1" presetClass="entr" presetSubtype="0" fill="hold" nodeType="withEffect">
-                                  <p:stCondLst>
-                                    <p:cond delay="0"/>
-                                  </p:stCondLst>
-                                  <p:childTnLst>
-                                    <p:set>
-                                      <p:cBhvr>
-                                        <p:cTn id="20" dur="1" fill="hold">
-                                          <p:stCondLst>
-                                            <p:cond delay="0"/>
-                                          </p:stCondLst>
-                                        </p:cTn>
-                                        <p:tgtEl>
-                                          <p:spTgt spid="3">
-                                            <p:txEl>
-                                              <p:pRg st="7" end="7"/>
-                                            </p:txEl>
-                                          </p:spTgt>
-                                        </p:tgtEl>
-                                        <p:attrNameLst>
-                                          <p:attrName>style.visibility</p:attrName>
-                                        </p:attrNameLst>
-                                      </p:cBhvr>
-                                      <p:to>
-                                        <p:strVal val="visible"/>
-                                      </p:to>
-                                    </p:set>
-                                  </p:childTnLst>
-                                </p:cTn>
-                              </p:par>
-                            </p:childTnLst>
-                          </p:cTn>
-                        </p:par>
-                      </p:childTnLst>
-                    </p:cTn>
-                  </p:par>
-                  <p:par>
-                    <p:cTn id="21" fill="hold">
-                      <p:stCondLst>
-                        <p:cond delay="indefinite"/>
-                      </p:stCondLst>
-                      <p:childTnLst>
-                        <p:par>
-                          <p:cTn id="22" fill="hold">
-                            <p:stCondLst>
-                              <p:cond delay="0"/>
-                            </p:stCondLst>
-                            <p:childTnLst>
-                              <p:par>
-                                <p:cTn id="23" presetID="1" presetClass="entr" presetSubtype="0" fill="hold" nodeType="clickEffect">
-                                  <p:stCondLst>
-                                    <p:cond delay="0"/>
-                                  </p:stCondLst>
-                                  <p:childTnLst>
-                                    <p:set>
-                                      <p:cBhvr>
-                                        <p:cTn id="24" dur="1" fill="hold">
-                                          <p:stCondLst>
-                                            <p:cond delay="0"/>
-                                          </p:stCondLst>
-                                        </p:cTn>
-                                        <p:tgtEl>
-                                          <p:spTgt spid="3">
-                                            <p:txEl>
-                                              <p:pRg st="8" end="8"/>
-                                            </p:txEl>
-                                          </p:spTgt>
-                                        </p:tgtEl>
-                                        <p:attrNameLst>
-                                          <p:attrName>style.visibility</p:attrName>
-                                        </p:attrNameLst>
-                                      </p:cBhvr>
-                                      <p:to>
-                                        <p:strVal val="visible"/>
-                                      </p:to>
-                                    </p:set>
-                                  </p:childTnLst>
-                                </p:cTn>
-                              </p:par>
-                              <p:par>
-                                <p:cTn id="25" presetID="1" presetClass="entr" presetSubtype="0" fill="hold" nodeType="withEffect">
-                                  <p:stCondLst>
-                                    <p:cond delay="0"/>
-                                  </p:stCondLst>
-                                  <p:childTnLst>
-                                    <p:set>
-                                      <p:cBhvr>
-                                        <p:cTn id="26" dur="1" fill="hold">
-                                          <p:stCondLst>
-                                            <p:cond delay="0"/>
-                                          </p:stCondLst>
-                                        </p:cTn>
-                                        <p:tgtEl>
-                                          <p:spTgt spid="3">
-                                            <p:txEl>
-                                              <p:pRg st="9" end="9"/>
-                                            </p:txEl>
-                                          </p:spTgt>
-                                        </p:tgtEl>
-                                        <p:attrNameLst>
-                                          <p:attrName>style.visibility</p:attrName>
-                                        </p:attrNameLst>
-                                      </p:cBhvr>
-                                      <p:to>
-                                        <p:strVal val="visible"/>
-                                      </p:to>
-                                    </p:set>
-                                  </p:childTnLst>
-                                </p:cTn>
-                              </p:par>
-                              <p:par>
-                                <p:cTn id="27" presetID="1" presetClass="entr" presetSubtype="0" fill="hold" nodeType="withEffect">
-                                  <p:stCondLst>
-                                    <p:cond delay="0"/>
-                                  </p:stCondLst>
-                                  <p:childTnLst>
-                                    <p:set>
-                                      <p:cBhvr>
-                                        <p:cTn id="28" dur="1" fill="hold">
-                                          <p:stCondLst>
-                                            <p:cond delay="0"/>
-                                          </p:stCondLst>
-                                        </p:cTn>
-                                        <p:tgtEl>
-                                          <p:spTgt spid="3">
-                                            <p:txEl>
-                                              <p:pRg st="10" end="10"/>
-                                            </p:txEl>
-                                          </p:spTgt>
-                                        </p:tgtEl>
-                                        <p:attrNameLst>
-                                          <p:attrName>style.visibility</p:attrName>
-                                        </p:attrNameLst>
-                                      </p:cBhvr>
-                                      <p:to>
-                                        <p:strVal val="visible"/>
-                                      </p:to>
-                                    </p:set>
-                                  </p:childTnLst>
-                                </p:cTn>
-                              </p:par>
-                              <p:par>
-                                <p:cTn id="29" presetID="1" presetClass="entr" presetSubtype="0" fill="hold" nodeType="withEffect">
-                                  <p:stCondLst>
-                                    <p:cond delay="0"/>
-                                  </p:stCondLst>
-                                  <p:childTnLst>
-                                    <p:set>
-                                      <p:cBhvr>
-                                        <p:cTn id="30" dur="1" fill="hold">
-                                          <p:stCondLst>
-                                            <p:cond delay="0"/>
-                                          </p:stCondLst>
-                                        </p:cTn>
-                                        <p:tgtEl>
-                                          <p:spTgt spid="3">
-                                            <p:txEl>
-                                              <p:pRg st="11" end="11"/>
-                                            </p:txEl>
-                                          </p:spTgt>
-                                        </p:tgtEl>
-                                        <p:attrNameLst>
-                                          <p:attrName>style.visibility</p:attrName>
-                                        </p:attrNameLst>
-                                      </p:cBhvr>
-                                      <p:to>
-                                        <p:strVal val="visible"/>
-                                      </p:to>
-                                    </p:set>
-                                  </p:childTnLst>
-                                </p:cTn>
-                              </p:par>
-                            </p:childTnLst>
-                          </p:cTn>
-                        </p:par>
-                      </p:childTnLst>
-                    </p:cTn>
-                  </p:par>
-                  <p:par>
-                    <p:cTn id="31" fill="hold">
-                      <p:stCondLst>
-                        <p:cond delay="indefinite"/>
-                      </p:stCondLst>
-                      <p:childTnLst>
-                        <p:par>
-                          <p:cTn id="32" fill="hold">
-                            <p:stCondLst>
-                              <p:cond delay="0"/>
-                            </p:stCondLst>
-                            <p:childTnLst>
-                              <p:par>
-                                <p:cTn id="33" presetID="1" presetClass="entr" presetSubtype="0" fill="hold" nodeType="clickEffect">
-                                  <p:stCondLst>
-                                    <p:cond delay="0"/>
-                                  </p:stCondLst>
-                                  <p:childTnLst>
-                                    <p:set>
-                                      <p:cBhvr>
-                                        <p:cTn id="34" dur="1" fill="hold">
-                                          <p:stCondLst>
-                                            <p:cond delay="0"/>
-                                          </p:stCondLst>
-                                        </p:cTn>
-                                        <p:tgtEl>
-                                          <p:spTgt spid="3">
-                                            <p:txEl>
-                                              <p:pRg st="12" end="12"/>
-                                            </p:txEl>
-                                          </p:spTgt>
-                                        </p:tgtEl>
-                                        <p:attrNameLst>
-                                          <p:attrName>style.visibility</p:attrName>
-                                        </p:attrNameLst>
-                                      </p:cBhvr>
-                                      <p:to>
-                                        <p:strVal val="visible"/>
-                                      </p:to>
-                                    </p:set>
-                                  </p:childTnLst>
-                                </p:cTn>
-                              </p:par>
-                              <p:par>
-                                <p:cTn id="35" presetID="1" presetClass="entr" presetSubtype="0" fill="hold" nodeType="withEffect">
-                                  <p:stCondLst>
-                                    <p:cond delay="0"/>
-                                  </p:stCondLst>
-                                  <p:childTnLst>
-                                    <p:set>
-                                      <p:cBhvr>
-                                        <p:cTn id="36" dur="1" fill="hold">
-                                          <p:stCondLst>
-                                            <p:cond delay="0"/>
-                                          </p:stCondLst>
-                                        </p:cTn>
-                                        <p:tgtEl>
-                                          <p:spTgt spid="3">
-                                            <p:txEl>
-                                              <p:pRg st="13" end="13"/>
-                                            </p:txEl>
-                                          </p:spTgt>
-                                        </p:tgtEl>
-                                        <p:attrNameLst>
-                                          <p:attrName>style.visibility</p:attrName>
-                                        </p:attrNameLst>
-                                      </p:cBhvr>
-                                      <p:to>
-                                        <p:strVal val="visible"/>
-                                      </p:to>
-                                    </p:set>
-                                  </p:childTnLst>
-                                </p:cTn>
-                              </p:par>
-                            </p:childTnLst>
-                          </p:cTn>
-                        </p:par>
-                      </p:childTnLst>
-                    </p:cTn>
-                  </p:par>
-                </p:childTnLst>
-              </p:cTn>
-              <p:prevCondLst>
-                <p:cond evt="onPrev" delay="0">
-                  <p:tgtEl>
-                    <p:sldTgt/>
-                  </p:tgtEl>
-                </p:cond>
-              </p:prevCondLst>
-              <p:nextCondLst>
-                <p:cond evt="onNext" delay="0">
-                  <p:tgtEl>
-                    <p:sldTgt/>
-                  </p:tgtEl>
-                </p:cond>
-              </p:nextCondLst>
-            </p:seq>
-          </p:childTnLst>
-        </p:cTn>
-      </p:par>
-    </p:tnLst>
-  </p:timing>
 </p:sld>
 </file>
 
-<file path=ppt/slides/slide30.xml><?xml version="1.0" encoding="utf-8"?>
+<file path=ppt/slides/slide36.xml><?xml version="1.0" encoding="utf-8"?>
 <p:sld xmlns:a="http://schemas.openxmlformats.org/drawingml/2006/main" xmlns:r="http://schemas.openxmlformats.org/officeDocument/2006/relationships" xmlns:p="http://schemas.openxmlformats.org/presentationml/2006/main">
   <p:cSld>
     <p:spTree>
@@ -21396,13 +23465,13 @@
         </p:nvSpPr>
         <p:spPr>
           <a:xfrm>
-            <a:off x="457200" y="1063229"/>
-            <a:ext cx="8229600" cy="3643028"/>
+            <a:off x="457200" y="1106714"/>
+            <a:ext cx="8229600" cy="3693885"/>
           </a:xfrm>
         </p:spPr>
         <p:txBody>
           <a:bodyPr>
-            <a:normAutofit fontScale="92500" lnSpcReduction="20000"/>
+            <a:normAutofit fontScale="92500" lnSpcReduction="10000"/>
           </a:bodyPr>
           <a:lstStyle/>
           <a:p>
@@ -21411,81 +23480,75 @@
             </a:pPr>
             <a:r>
               <a:rPr dirty="0"/>
-              <a:t>Bootstrap estimation is widely useful and requires minimal assumption</a:t>
+              <a:t>There are several variations of the basi</a:t>
+            </a:r>
+            <a:r>
+              <a:rPr lang="en-US" dirty="0"/>
+              <a:t>c</a:t>
+            </a:r>
+            <a:r>
+              <a:rPr dirty="0"/>
+              <a:t> nonparametric bootstrap algorithm</a:t>
             </a:r>
           </a:p>
           <a:p>
             <a:pPr lvl="0"/>
             <a:r>
               <a:rPr dirty="0"/>
-              <a:t>Bootstrap distribution comprise</a:t>
-            </a:r>
+              <a:t>One sample bootstrap</a:t>
+            </a:r>
+          </a:p>
+          <a:p>
+            <a:pPr lvl="1"/>
+            <a:r>
+              <a:rPr dirty="0"/>
+              <a:t>Inference on single population</a:t>
+            </a:r>
+            <a:endParaRPr lang="en-US" dirty="0"/>
+          </a:p>
+          <a:p>
+            <a:pPr lvl="1"/>
             <a:r>
               <a:rPr lang="en-US" dirty="0"/>
-              <a:t>s</a:t>
-            </a:r>
+              <a:t>One sample statistics</a:t>
+            </a:r>
+            <a:endParaRPr dirty="0"/>
+          </a:p>
+          <a:p>
+            <a:pPr lvl="0"/>
             <a:r>
               <a:rPr dirty="0"/>
-              <a:t> values of </a:t>
-            </a:r>
+              <a:t>Two sample bootstrap</a:t>
+            </a:r>
+          </a:p>
+          <a:p>
+            <a:pPr lvl="1"/>
+            <a:r>
+              <a:rPr dirty="0"/>
+              <a:t>Inference on different populations</a:t>
+            </a:r>
+            <a:endParaRPr lang="en-US" dirty="0"/>
+          </a:p>
+          <a:p>
+            <a:pPr lvl="1"/>
             <a:r>
               <a:rPr lang="en-US" dirty="0"/>
-              <a:t>a</a:t>
-            </a:r>
+              <a:t>Two sample statistics</a:t>
+            </a:r>
+            <a:endParaRPr dirty="0"/>
+          </a:p>
+          <a:p>
+            <a:pPr lvl="0"/>
             <a:r>
               <a:rPr dirty="0"/>
-              <a:t> statistic computed from bootstrap resamples of the original observations (data sample)</a:t>
-            </a:r>
-          </a:p>
-          <a:p>
-            <a:pPr lvl="0"/>
+              <a:t>Special cases</a:t>
+            </a:r>
+          </a:p>
+          <a:p>
+            <a:pPr lvl="1"/>
             <a:r>
               <a:rPr dirty="0"/>
-              <a:t>Computing bootstrap distribution requires </a:t>
-            </a:r>
-            <a:r>
-              <a:rPr b="1" dirty="0"/>
-              <a:t>no assumptions about population distribution!</a:t>
-            </a:r>
-          </a:p>
-          <a:p>
-            <a:pPr lvl="1"/>
-            <a:r>
-              <a:rPr dirty="0"/>
-              <a:t>Bootstrap resampling substitutes computer power for paper and pencil statistician power</a:t>
-            </a:r>
-          </a:p>
-          <a:p>
-            <a:pPr lvl="0"/>
-            <a:r>
-              <a:rPr dirty="0"/>
-              <a:t>Bootstrap resampling estimates the </a:t>
-            </a:r>
-            <a:r>
-              <a:rPr b="1" dirty="0"/>
-              <a:t>bootstrap distribution</a:t>
-            </a:r>
-            <a:r>
-              <a:rPr dirty="0"/>
-              <a:t> of a statistic</a:t>
-            </a:r>
-          </a:p>
-          <a:p>
-            <a:pPr lvl="1"/>
-            <a:r>
-              <a:rPr dirty="0"/>
-              <a:t>Compute point estimate of the statistic, or bootstrap estimate</a:t>
-            </a:r>
-          </a:p>
-          <a:p>
-            <a:pPr lvl="1"/>
-            <a:r>
-              <a:rPr lang="en-US" dirty="0"/>
-              <a:t>Compute </a:t>
-            </a:r>
-            <a:r>
-              <a:rPr dirty="0"/>
-              <a:t>bootstrap confidence interval from the bootstrap distribution</a:t>
+              <a:t>Correlation coefficients - part of your assignment</a:t>
             </a:r>
           </a:p>
         </p:txBody>
@@ -21498,156 +23561,7 @@
 </p:sld>
 </file>
 
-<file path=ppt/slides/slide31.xml><?xml version="1.0" encoding="utf-8"?>
-<p:sld xmlns:a="http://schemas.openxmlformats.org/drawingml/2006/main" xmlns:r="http://schemas.openxmlformats.org/officeDocument/2006/relationships" xmlns:p="http://schemas.openxmlformats.org/presentationml/2006/main">
-  <p:cSld>
-    <p:spTree>
-      <p:nvGrpSpPr>
-        <p:cNvPr id="1" name=""/>
-        <p:cNvGrpSpPr/>
-        <p:nvPr/>
-      </p:nvGrpSpPr>
-      <p:grpSpPr>
-        <a:xfrm>
-          <a:off x="0" y="0"/>
-          <a:ext cx="0" cy="0"/>
-          <a:chOff x="0" y="0"/>
-          <a:chExt cx="0" cy="0"/>
-        </a:xfrm>
-      </p:grpSpPr>
-      <p:sp>
-        <p:nvSpPr>
-          <p:cNvPr id="2" name="Title 1"/>
-          <p:cNvSpPr>
-            <a:spLocks noGrp="1"/>
-          </p:cNvSpPr>
-          <p:nvPr>
-            <p:ph type="title"/>
-          </p:nvPr>
-        </p:nvSpPr>
-        <p:spPr/>
-        <p:txBody>
-          <a:bodyPr/>
-          <a:lstStyle/>
-          <a:p>
-            <a:pPr marL="0" lvl="0" indent="0">
-              <a:buNone/>
-            </a:pPr>
-            <a:r>
-              <a:t>Summary</a:t>
-            </a:r>
-          </a:p>
-        </p:txBody>
-      </p:sp>
-      <p:sp>
-        <p:nvSpPr>
-          <p:cNvPr id="3" name="Content Placeholder 2"/>
-          <p:cNvSpPr>
-            <a:spLocks noGrp="1"/>
-          </p:cNvSpPr>
-          <p:nvPr>
-            <p:ph idx="1"/>
-          </p:nvPr>
-        </p:nvSpPr>
-        <p:spPr>
-          <a:xfrm>
-            <a:off x="457200" y="1106714"/>
-            <a:ext cx="8229600" cy="3693885"/>
-          </a:xfrm>
-        </p:spPr>
-        <p:txBody>
-          <a:bodyPr>
-            <a:normAutofit fontScale="92500" lnSpcReduction="10000"/>
-          </a:bodyPr>
-          <a:lstStyle/>
-          <a:p>
-            <a:pPr marL="0" lvl="0" indent="0">
-              <a:buNone/>
-            </a:pPr>
-            <a:r>
-              <a:rPr dirty="0"/>
-              <a:t>There are several variations of the basi</a:t>
-            </a:r>
-            <a:r>
-              <a:rPr lang="en-US" dirty="0"/>
-              <a:t>c</a:t>
-            </a:r>
-            <a:r>
-              <a:rPr dirty="0"/>
-              <a:t> nonparametric bootstrap algorithm</a:t>
-            </a:r>
-          </a:p>
-          <a:p>
-            <a:pPr lvl="0"/>
-            <a:r>
-              <a:rPr dirty="0"/>
-              <a:t>One sample bootstrap</a:t>
-            </a:r>
-          </a:p>
-          <a:p>
-            <a:pPr lvl="1"/>
-            <a:r>
-              <a:rPr dirty="0"/>
-              <a:t>Inference on single population</a:t>
-            </a:r>
-            <a:endParaRPr lang="en-US" dirty="0"/>
-          </a:p>
-          <a:p>
-            <a:pPr lvl="1"/>
-            <a:r>
-              <a:rPr lang="en-US" dirty="0"/>
-              <a:t>One sample statistics</a:t>
-            </a:r>
-            <a:endParaRPr dirty="0"/>
-          </a:p>
-          <a:p>
-            <a:pPr lvl="0"/>
-            <a:r>
-              <a:rPr dirty="0"/>
-              <a:t>Two sample bootstrap</a:t>
-            </a:r>
-          </a:p>
-          <a:p>
-            <a:pPr lvl="1"/>
-            <a:r>
-              <a:rPr dirty="0"/>
-              <a:t>Inference on different populations</a:t>
-            </a:r>
-            <a:endParaRPr lang="en-US" dirty="0"/>
-          </a:p>
-          <a:p>
-            <a:pPr lvl="1"/>
-            <a:r>
-              <a:rPr lang="en-US" dirty="0"/>
-              <a:t>Two sample statistics</a:t>
-            </a:r>
-            <a:endParaRPr dirty="0"/>
-          </a:p>
-          <a:p>
-            <a:pPr lvl="0"/>
-            <a:r>
-              <a:rPr dirty="0"/>
-              <a:t>Special cases</a:t>
-            </a:r>
-          </a:p>
-          <a:p>
-            <a:pPr lvl="1"/>
-            <a:r>
-              <a:rPr dirty="0"/>
-              <a:t>Correlation coefficients - part of your assignment</a:t>
-            </a:r>
-          </a:p>
-        </p:txBody>
-      </p:sp>
-    </p:spTree>
-  </p:cSld>
-  <p:clrMapOvr>
-    <a:masterClrMapping/>
-  </p:clrMapOvr>
-</p:sld>
-</file>
-
-<file path=ppt/slides/slide32.xml><?xml version="1.0" encoding="utf-8"?>
+<file path=ppt/slides/slide37.xml><?xml version="1.0" encoding="utf-8"?>
 <p:sld xmlns:a="http://schemas.openxmlformats.org/drawingml/2006/main" xmlns:r="http://schemas.openxmlformats.org/officeDocument/2006/relationships" xmlns:p="http://schemas.openxmlformats.org/presentationml/2006/main">
   <p:cSld>
     <p:spTree>
@@ -22868,6 +24782,67 @@
       </p:grpSpPr>
       <p:sp>
         <p:nvSpPr>
+          <p:cNvPr id="3" name="Text Placeholder 2">
+            <a:extLst>
+              <a:ext uri="{FF2B5EF4-FFF2-40B4-BE49-F238E27FC236}">
+                <a16:creationId xmlns:a16="http://schemas.microsoft.com/office/drawing/2014/main" id="{AA41574F-0B0C-7AE8-882D-CBE480D8D64D}"/>
+              </a:ext>
+            </a:extLst>
+          </p:cNvPr>
+          <p:cNvSpPr>
+            <a:spLocks noGrp="1"/>
+          </p:cNvSpPr>
+          <p:nvPr>
+            <p:ph type="body" idx="1"/>
+          </p:nvPr>
+        </p:nvSpPr>
+        <p:spPr/>
+        <p:txBody>
+          <a:bodyPr>
+            <a:normAutofit/>
+          </a:bodyPr>
+          <a:lstStyle/>
+          <a:p>
+            <a:pPr algn="ctr"/>
+            <a:r>
+              <a:rPr lang="en-US" sz="3200" dirty="0"/>
+              <a:t>Resampling and the Bootstrap Distribution</a:t>
+            </a:r>
+          </a:p>
+        </p:txBody>
+      </p:sp>
+    </p:spTree>
+    <p:extLst>
+      <p:ext uri="{BB962C8B-B14F-4D97-AF65-F5344CB8AC3E}">
+        <p14:creationId xmlns:p14="http://schemas.microsoft.com/office/powerpoint/2010/main" val="3491666326"/>
+      </p:ext>
+    </p:extLst>
+  </p:cSld>
+  <p:clrMapOvr>
+    <a:masterClrMapping/>
+  </p:clrMapOvr>
+</p:sld>
+</file>
+
+<file path=ppt/slides/slide7.xml><?xml version="1.0" encoding="utf-8"?>
+<p:sld xmlns:a="http://schemas.openxmlformats.org/drawingml/2006/main" xmlns:r="http://schemas.openxmlformats.org/officeDocument/2006/relationships" xmlns:p="http://schemas.openxmlformats.org/presentationml/2006/main">
+  <p:cSld>
+    <p:spTree>
+      <p:nvGrpSpPr>
+        <p:cNvPr id="1" name=""/>
+        <p:cNvGrpSpPr/>
+        <p:nvPr/>
+      </p:nvGrpSpPr>
+      <p:grpSpPr>
+        <a:xfrm>
+          <a:off x="0" y="0"/>
+          <a:ext cx="0" cy="0"/>
+          <a:chOff x="0" y="0"/>
+          <a:chExt cx="0" cy="0"/>
+        </a:xfrm>
+      </p:grpSpPr>
+      <p:sp>
+        <p:nvSpPr>
           <p:cNvPr id="2" name="Title 1"/>
           <p:cNvSpPr>
             <a:spLocks noGrp="1"/>
@@ -23161,7 +25136,7 @@
 </p:sld>
 </file>
 
-<file path=ppt/slides/slide7.xml><?xml version="1.0" encoding="utf-8"?>
+<file path=ppt/slides/slide8.xml><?xml version="1.0" encoding="utf-8"?>
 <p:sld xmlns:a="http://schemas.openxmlformats.org/drawingml/2006/main" xmlns:r="http://schemas.openxmlformats.org/officeDocument/2006/relationships" xmlns:p="http://schemas.openxmlformats.org/presentationml/2006/main">
   <p:cSld>
     <p:spTree>
@@ -23202,8 +25177,8 @@
           </a:p>
         </p:txBody>
       </p:sp>
-      <mc:AlternateContent xmlns:mc="http://schemas.openxmlformats.org/markup-compatibility/2006" xmlns:a14="http://schemas.microsoft.com/office/drawing/2010/main">
-        <mc:Choice Requires="a14">
+      <mc:AlternateContent xmlns:mc="http://schemas.openxmlformats.org/markup-compatibility/2006">
+        <mc:Choice xmlns:a14="http://schemas.microsoft.com/office/drawing/2010/main" Requires="a14">
           <p:sp>
             <p:nvSpPr>
               <p:cNvPr id="3" name="Content Placeholder 2"/>
@@ -23268,7 +25243,19 @@
                 </a:r>
                 <a:r>
                   <a:rPr dirty="0"/>
-                  <a:t> sample estimate, </a:t>
+                  <a:t> sample</a:t>
+                </a:r>
+                <a:r>
+                  <a:rPr lang="en-US" dirty="0"/>
+                  <a:t> </a:t>
+                </a:r>
+                <a:r>
+                  <a:rPr lang="en-US" dirty="0" err="1"/>
+                  <a:t>estiamte</a:t>
+                </a:r>
+                <a:r>
+                  <a:rPr dirty="0"/>
+                  <a:t>, </a:t>
                 </a:r>
                 <a14:m>
                   <m:oMath xmlns:m="http://schemas.openxmlformats.org/officeDocument/2006/math">
@@ -23350,7 +25337,7 @@
             </p:txBody>
           </p:sp>
         </mc:Choice>
-        <mc:Fallback xmlns="">
+        <mc:Fallback>
           <p:sp>
             <p:nvSpPr>
               <p:cNvPr id="3" name="Content Placeholder 2"/>
@@ -23728,7 +25715,7 @@
 </p:sld>
 </file>
 
-<file path=ppt/slides/slide8.xml><?xml version="1.0" encoding="utf-8"?>
+<file path=ppt/slides/slide9.xml><?xml version="1.0" encoding="utf-8"?>
 <p:sld xmlns:a="http://schemas.openxmlformats.org/drawingml/2006/main" xmlns:r="http://schemas.openxmlformats.org/officeDocument/2006/relationships" xmlns:p="http://schemas.openxmlformats.org/presentationml/2006/main">
   <p:cSld>
     <p:spTree>
@@ -23782,7 +25769,7 @@
         <p:spPr/>
         <p:txBody>
           <a:bodyPr>
-            <a:normAutofit/>
+            <a:normAutofit lnSpcReduction="10000"/>
           </a:bodyPr>
           <a:lstStyle/>
           <a:p>
@@ -23811,6 +25798,11 @@
               <a:rPr dirty="0"/>
               <a:t>Confidence interval expresses the uncertainty of the point estimate</a:t>
             </a:r>
+            <a:r>
+              <a:rPr lang="en-US" dirty="0"/>
+              <a:t> given the sampling distribution</a:t>
+            </a:r>
+            <a:endParaRPr dirty="0"/>
           </a:p>
           <a:p>
             <a:pPr lvl="0"/>
@@ -23832,7 +25824,15 @@
             </a:r>
             <a:r>
               <a:rPr dirty="0"/>
-              <a:t>based on the properties of some assumed probability distribution</a:t>
+              <a:t>based on the properties of some assumed </a:t>
+            </a:r>
+            <a:r>
+              <a:rPr lang="en-US" dirty="0"/>
+              <a:t>sampling</a:t>
+            </a:r>
+            <a:r>
+              <a:rPr dirty="0"/>
+              <a:t> distribution</a:t>
             </a:r>
           </a:p>
           <a:p>
@@ -24035,460 +26035,6 @@
                                           <p:spTgt spid="3">
                                             <p:txEl>
                                               <p:pRg st="4" end="4"/>
-                                            </p:txEl>
-                                          </p:spTgt>
-                                        </p:tgtEl>
-                                        <p:attrNameLst>
-                                          <p:attrName>style.visibility</p:attrName>
-                                        </p:attrNameLst>
-                                      </p:cBhvr>
-                                      <p:to>
-                                        <p:strVal val="visible"/>
-                                      </p:to>
-                                    </p:set>
-                                  </p:childTnLst>
-                                </p:cTn>
-                              </p:par>
-                            </p:childTnLst>
-                          </p:cTn>
-                        </p:par>
-                      </p:childTnLst>
-                    </p:cTn>
-                  </p:par>
-                </p:childTnLst>
-              </p:cTn>
-              <p:prevCondLst>
-                <p:cond evt="onPrev" delay="0">
-                  <p:tgtEl>
-                    <p:sldTgt/>
-                  </p:tgtEl>
-                </p:cond>
-              </p:prevCondLst>
-              <p:nextCondLst>
-                <p:cond evt="onNext" delay="0">
-                  <p:tgtEl>
-                    <p:sldTgt/>
-                  </p:tgtEl>
-                </p:cond>
-              </p:nextCondLst>
-            </p:seq>
-          </p:childTnLst>
-        </p:cTn>
-      </p:par>
-    </p:tnLst>
-  </p:timing>
-</p:sld>
-</file>
-
-<file path=ppt/slides/slide9.xml><?xml version="1.0" encoding="utf-8"?>
-<p:sld xmlns:a="http://schemas.openxmlformats.org/drawingml/2006/main" xmlns:r="http://schemas.openxmlformats.org/officeDocument/2006/relationships" xmlns:p="http://schemas.openxmlformats.org/presentationml/2006/main">
-  <p:cSld>
-    <p:spTree>
-      <p:nvGrpSpPr>
-        <p:cNvPr id="1" name=""/>
-        <p:cNvGrpSpPr/>
-        <p:nvPr/>
-      </p:nvGrpSpPr>
-      <p:grpSpPr>
-        <a:xfrm>
-          <a:off x="0" y="0"/>
-          <a:ext cx="0" cy="0"/>
-          <a:chOff x="0" y="0"/>
-          <a:chExt cx="0" cy="0"/>
-        </a:xfrm>
-      </p:grpSpPr>
-      <p:sp>
-        <p:nvSpPr>
-          <p:cNvPr id="2" name="Title 1"/>
-          <p:cNvSpPr>
-            <a:spLocks noGrp="1"/>
-          </p:cNvSpPr>
-          <p:nvPr>
-            <p:ph type="title"/>
-          </p:nvPr>
-        </p:nvSpPr>
-        <p:spPr/>
-        <p:txBody>
-          <a:bodyPr/>
-          <a:lstStyle/>
-          <a:p>
-            <a:pPr marL="0" lvl="0" indent="0">
-              <a:buNone/>
-            </a:pPr>
-            <a:r>
-              <a:t>Bootstrap Distribution</a:t>
-            </a:r>
-          </a:p>
-        </p:txBody>
-      </p:sp>
-      <p:sp>
-        <p:nvSpPr>
-          <p:cNvPr id="3" name="Content Placeholder 2"/>
-          <p:cNvSpPr>
-            <a:spLocks noGrp="1"/>
-          </p:cNvSpPr>
-          <p:nvPr>
-            <p:ph idx="1"/>
-          </p:nvPr>
-        </p:nvSpPr>
-        <p:spPr>
-          <a:xfrm>
-            <a:off x="457200" y="1200150"/>
-            <a:ext cx="8229600" cy="3560535"/>
-          </a:xfrm>
-        </p:spPr>
-        <p:txBody>
-          <a:bodyPr>
-            <a:normAutofit fontScale="85000" lnSpcReduction="10000"/>
-          </a:bodyPr>
-          <a:lstStyle/>
-          <a:p>
-            <a:pPr marL="0" lvl="0" indent="0">
-              <a:buNone/>
-            </a:pPr>
-            <a:r>
-              <a:rPr dirty="0"/>
-              <a:t>Rather than computing a point estimate directly, bootstrap methods compute a bootstrap distribution of </a:t>
-            </a:r>
-            <a:r>
-              <a:rPr lang="en-US" dirty="0"/>
-              <a:t>a</a:t>
-            </a:r>
-            <a:r>
-              <a:rPr dirty="0"/>
-              <a:t> statistic</a:t>
-            </a:r>
-          </a:p>
-          <a:p>
-            <a:pPr lvl="0"/>
-            <a:r>
-              <a:rPr b="1" dirty="0"/>
-              <a:t>Bootstrap distribution </a:t>
-            </a:r>
-            <a:r>
-              <a:rPr dirty="0"/>
-              <a:t>comprise</a:t>
-            </a:r>
-            <a:r>
-              <a:rPr lang="en-US" dirty="0"/>
-              <a:t>s</a:t>
-            </a:r>
-            <a:r>
-              <a:rPr dirty="0"/>
-              <a:t> values of </a:t>
-            </a:r>
-            <a:r>
-              <a:rPr lang="en-US" dirty="0"/>
-              <a:t>a</a:t>
-            </a:r>
-            <a:r>
-              <a:rPr dirty="0"/>
-              <a:t> statistic computed from bootstrap resamples of the original observations </a:t>
-            </a:r>
-            <a:endParaRPr lang="en-US" dirty="0"/>
-          </a:p>
-          <a:p>
-            <a:pPr lvl="0"/>
-            <a:r>
-              <a:rPr dirty="0"/>
-              <a:t>Computing bootstrap distribution requires </a:t>
-            </a:r>
-            <a:r>
-              <a:rPr b="1" dirty="0"/>
-              <a:t>no assumptions about </a:t>
-            </a:r>
-            <a:r>
-              <a:rPr lang="en-US" b="1" dirty="0"/>
-              <a:t>sample</a:t>
-            </a:r>
-            <a:r>
-              <a:rPr b="1" dirty="0"/>
-              <a:t> distribution!</a:t>
-            </a:r>
-          </a:p>
-          <a:p>
-            <a:pPr lvl="1"/>
-            <a:r>
-              <a:rPr dirty="0"/>
-              <a:t>Bootstrap resampling substitutes computer power for paper and pencil statistician power</a:t>
-            </a:r>
-          </a:p>
-          <a:p>
-            <a:pPr lvl="0"/>
-            <a:r>
-              <a:rPr dirty="0"/>
-              <a:t>Bootstrap resampling estimates the </a:t>
-            </a:r>
-            <a:r>
-              <a:rPr b="1" dirty="0"/>
-              <a:t>bootstrap distribution</a:t>
-            </a:r>
-            <a:r>
-              <a:rPr dirty="0"/>
-              <a:t> of a statistic</a:t>
-            </a:r>
-          </a:p>
-          <a:p>
-            <a:pPr lvl="1"/>
-            <a:r>
-              <a:rPr dirty="0"/>
-              <a:t>Compute mostly likely point estimate of the statistic, or </a:t>
-            </a:r>
-            <a:r>
-              <a:rPr b="1" dirty="0"/>
-              <a:t>bootstrap estimate</a:t>
-            </a:r>
-          </a:p>
-          <a:p>
-            <a:pPr lvl="1"/>
-            <a:r>
-              <a:rPr dirty="0"/>
-              <a:t>The </a:t>
-            </a:r>
-            <a:r>
-              <a:rPr b="1" dirty="0"/>
-              <a:t>bootstrap confidence interval </a:t>
-            </a:r>
-            <a:r>
-              <a:rPr dirty="0"/>
-              <a:t>is computed from the bootstrap distribution</a:t>
-            </a:r>
-          </a:p>
-        </p:txBody>
-      </p:sp>
-    </p:spTree>
-  </p:cSld>
-  <p:clrMapOvr>
-    <a:masterClrMapping/>
-  </p:clrMapOvr>
-  <p:timing>
-    <p:tnLst>
-      <p:par>
-        <p:cTn id="1" dur="indefinite" restart="never" nodeType="tmRoot">
-          <p:childTnLst>
-            <p:seq concurrent="1" nextAc="seek">
-              <p:cTn id="2" dur="indefinite" nodeType="mainSeq">
-                <p:childTnLst>
-                  <p:par>
-                    <p:cTn id="3" fill="hold">
-                      <p:stCondLst>
-                        <p:cond delay="indefinite"/>
-                      </p:stCondLst>
-                      <p:childTnLst>
-                        <p:par>
-                          <p:cTn id="4" fill="hold">
-                            <p:stCondLst>
-                              <p:cond delay="0"/>
-                            </p:stCondLst>
-                            <p:childTnLst>
-                              <p:par>
-                                <p:cTn id="5" presetID="1" presetClass="entr" presetSubtype="0" fill="hold" nodeType="clickEffect">
-                                  <p:stCondLst>
-                                    <p:cond delay="0"/>
-                                  </p:stCondLst>
-                                  <p:childTnLst>
-                                    <p:set>
-                                      <p:cBhvr>
-                                        <p:cTn id="6" dur="1" fill="hold">
-                                          <p:stCondLst>
-                                            <p:cond delay="0"/>
-                                          </p:stCondLst>
-                                        </p:cTn>
-                                        <p:tgtEl>
-                                          <p:spTgt spid="3">
-                                            <p:txEl>
-                                              <p:pRg st="1" end="1"/>
-                                            </p:txEl>
-                                          </p:spTgt>
-                                        </p:tgtEl>
-                                        <p:attrNameLst>
-                                          <p:attrName>style.visibility</p:attrName>
-                                        </p:attrNameLst>
-                                      </p:cBhvr>
-                                      <p:to>
-                                        <p:strVal val="visible"/>
-                                      </p:to>
-                                    </p:set>
-                                  </p:childTnLst>
-                                </p:cTn>
-                              </p:par>
-                            </p:childTnLst>
-                          </p:cTn>
-                        </p:par>
-                      </p:childTnLst>
-                    </p:cTn>
-                  </p:par>
-                  <p:par>
-                    <p:cTn id="7" fill="hold">
-                      <p:stCondLst>
-                        <p:cond delay="indefinite"/>
-                      </p:stCondLst>
-                      <p:childTnLst>
-                        <p:par>
-                          <p:cTn id="8" fill="hold">
-                            <p:stCondLst>
-                              <p:cond delay="0"/>
-                            </p:stCondLst>
-                            <p:childTnLst>
-                              <p:par>
-                                <p:cTn id="9" presetID="1" presetClass="entr" presetSubtype="0" fill="hold" nodeType="clickEffect">
-                                  <p:stCondLst>
-                                    <p:cond delay="0"/>
-                                  </p:stCondLst>
-                                  <p:childTnLst>
-                                    <p:set>
-                                      <p:cBhvr>
-                                        <p:cTn id="10" dur="1" fill="hold">
-                                          <p:stCondLst>
-                                            <p:cond delay="0"/>
-                                          </p:stCondLst>
-                                        </p:cTn>
-                                        <p:tgtEl>
-                                          <p:spTgt spid="3">
-                                            <p:txEl>
-                                              <p:pRg st="2" end="2"/>
-                                            </p:txEl>
-                                          </p:spTgt>
-                                        </p:tgtEl>
-                                        <p:attrNameLst>
-                                          <p:attrName>style.visibility</p:attrName>
-                                        </p:attrNameLst>
-                                      </p:cBhvr>
-                                      <p:to>
-                                        <p:strVal val="visible"/>
-                                      </p:to>
-                                    </p:set>
-                                  </p:childTnLst>
-                                </p:cTn>
-                              </p:par>
-                              <p:par>
-                                <p:cTn id="11" presetID="1" presetClass="entr" presetSubtype="0" fill="hold" nodeType="withEffect">
-                                  <p:stCondLst>
-                                    <p:cond delay="0"/>
-                                  </p:stCondLst>
-                                  <p:childTnLst>
-                                    <p:set>
-                                      <p:cBhvr>
-                                        <p:cTn id="12" dur="1" fill="hold">
-                                          <p:stCondLst>
-                                            <p:cond delay="0"/>
-                                          </p:stCondLst>
-                                        </p:cTn>
-                                        <p:tgtEl>
-                                          <p:spTgt spid="3">
-                                            <p:txEl>
-                                              <p:pRg st="3" end="3"/>
-                                            </p:txEl>
-                                          </p:spTgt>
-                                        </p:tgtEl>
-                                        <p:attrNameLst>
-                                          <p:attrName>style.visibility</p:attrName>
-                                        </p:attrNameLst>
-                                      </p:cBhvr>
-                                      <p:to>
-                                        <p:strVal val="visible"/>
-                                      </p:to>
-                                    </p:set>
-                                  </p:childTnLst>
-                                </p:cTn>
-                              </p:par>
-                            </p:childTnLst>
-                          </p:cTn>
-                        </p:par>
-                      </p:childTnLst>
-                    </p:cTn>
-                  </p:par>
-                  <p:par>
-                    <p:cTn id="13" fill="hold">
-                      <p:stCondLst>
-                        <p:cond delay="indefinite"/>
-                      </p:stCondLst>
-                      <p:childTnLst>
-                        <p:par>
-                          <p:cTn id="14" fill="hold">
-                            <p:stCondLst>
-                              <p:cond delay="0"/>
-                            </p:stCondLst>
-                            <p:childTnLst>
-                              <p:par>
-                                <p:cTn id="15" presetID="1" presetClass="entr" presetSubtype="0" fill="hold" nodeType="clickEffect">
-                                  <p:stCondLst>
-                                    <p:cond delay="0"/>
-                                  </p:stCondLst>
-                                  <p:childTnLst>
-                                    <p:set>
-                                      <p:cBhvr>
-                                        <p:cTn id="16" dur="1" fill="hold">
-                                          <p:stCondLst>
-                                            <p:cond delay="0"/>
-                                          </p:stCondLst>
-                                        </p:cTn>
-                                        <p:tgtEl>
-                                          <p:spTgt spid="3">
-                                            <p:txEl>
-                                              <p:pRg st="4" end="4"/>
-                                            </p:txEl>
-                                          </p:spTgt>
-                                        </p:tgtEl>
-                                        <p:attrNameLst>
-                                          <p:attrName>style.visibility</p:attrName>
-                                        </p:attrNameLst>
-                                      </p:cBhvr>
-                                      <p:to>
-                                        <p:strVal val="visible"/>
-                                      </p:to>
-                                    </p:set>
-                                  </p:childTnLst>
-                                </p:cTn>
-                              </p:par>
-                              <p:par>
-                                <p:cTn id="17" presetID="1" presetClass="entr" presetSubtype="0" fill="hold" nodeType="withEffect">
-                                  <p:stCondLst>
-                                    <p:cond delay="0"/>
-                                  </p:stCondLst>
-                                  <p:childTnLst>
-                                    <p:set>
-                                      <p:cBhvr>
-                                        <p:cTn id="18" dur="1" fill="hold">
-                                          <p:stCondLst>
-                                            <p:cond delay="0"/>
-                                          </p:stCondLst>
-                                        </p:cTn>
-                                        <p:tgtEl>
-                                          <p:spTgt spid="3">
-                                            <p:txEl>
-                                              <p:pRg st="5" end="5"/>
-                                            </p:txEl>
-                                          </p:spTgt>
-                                        </p:tgtEl>
-                                        <p:attrNameLst>
-                                          <p:attrName>style.visibility</p:attrName>
-                                        </p:attrNameLst>
-                                      </p:cBhvr>
-                                      <p:to>
-                                        <p:strVal val="visible"/>
-                                      </p:to>
-                                    </p:set>
-                                  </p:childTnLst>
-                                </p:cTn>
-                              </p:par>
-                              <p:par>
-                                <p:cTn id="19" presetID="1" presetClass="entr" presetSubtype="0" fill="hold" nodeType="withEffect">
-                                  <p:stCondLst>
-                                    <p:cond delay="0"/>
-                                  </p:stCondLst>
-                                  <p:childTnLst>
-                                    <p:set>
-                                      <p:cBhvr>
-                                        <p:cTn id="20" dur="1" fill="hold">
-                                          <p:stCondLst>
-                                            <p:cond delay="0"/>
-                                          </p:stCondLst>
-                                        </p:cTn>
-                                        <p:tgtEl>
-                                          <p:spTgt spid="3">
-                                            <p:txEl>
-                                              <p:pRg st="6" end="6"/>
                                             </p:txEl>
                                           </p:spTgt>
                                         </p:tgtEl>

--- a/LectureSlides/06b_IntroductionToBootstrap.pptx
+++ b/LectureSlides/06b_IntroductionToBootstrap.pptx
@@ -3696,7 +3696,7 @@
         <p:spPr>
           <a:xfrm>
             <a:off x="1805276" y="4705706"/>
-            <a:ext cx="5744633" cy="369332"/>
+            <a:ext cx="5744633" cy="538609"/>
           </a:xfrm>
           <a:prstGeom prst="rect">
             <a:avLst/>
@@ -3712,7 +3712,15 @@
             <a:pPr algn="ctr"/>
             <a:r>
               <a:rPr lang="en-US" sz="1100" dirty="0"/>
-              <a:t>Copyright 2018, 2019, 2020, 2021, 2022, 2023 2024, 2025, Stephen F Elston. All rights reserved</a:t>
+              <a:t>Copyright 2018, 2019, 2020, 2021, 2022, 2023 2024</a:t>
+            </a:r>
+            <a:r>
+              <a:rPr lang="en-US" sz="1100"/>
+              <a:t>, 2025, 2026, </a:t>
+            </a:r>
+            <a:r>
+              <a:rPr lang="en-US" sz="1100" dirty="0"/>
+              <a:t>Stephen F Elston. All rights reserved</a:t>
             </a:r>
             <a:r>
               <a:rPr lang="en-US" dirty="0"/>
